--- a/agent-observability-course/10-graphics/slides/section-15.pptx
+++ b/agent-observability-course/10-graphics/slides/section-15.pptx
@@ -27,6 +27,13 @@
     <p:sldId id="275" r:id="rId27"/>
     <p:sldId id="276" r:id="rId28"/>
     <p:sldId id="277" r:id="rId29"/>
+    <p:sldId id="278" r:id="rId30"/>
+    <p:sldId id="279" r:id="rId31"/>
+    <p:sldId id="280" r:id="rId32"/>
+    <p:sldId id="281" r:id="rId33"/>
+    <p:sldId id="282" r:id="rId34"/>
+    <p:sldId id="283" r:id="rId35"/>
+    <p:sldId id="284" r:id="rId36"/>
   </p:sldIdLst>
   <p:sldSz cx="12191695" cy="6858000" type="screen4x3"/>
   <p:notesSz cx="6858000" cy="9144000"/>
@@ -593,31 +600,13 @@
           <a:lstStyle/>
           <a:p>
             <a:r>
-              <a:t>Nine. Getting worse while everything looks fine. "Quality signals: a sampled LLM judge on live traffic, user feedback, and a weekly drift comparison, all sliced by prompt version. In my incident, grounded dropped from point nine one to point seven two the hour a prompt label moved, cost actually went down, and no latency or cost SLO noticed."</a:t>
+              <a:t>Five. A cost spike. "Timeline first, then blast radius, then two hypotheses with predictions: more requests, or bigger requests. Requests per minute versus tokens per generation tells me which. Then one trace. In the incident I worked, a config change switched off context trimming for one tenant, and a provider timeout storm billed every oversized prompt up to three times."</a:t>
             </a:r>
           </a:p>
           <a:p/>
           <a:p>
             <a:r>
-              <a:t>Ten. Preventing a prompt regression. "Treat the production label as a deploy. Promotion goes through code: run offline evals against a dataset of past failures, refuse to move the label below a threshold, and restrict UI label changes. Rollback is moving the label back, which takes a minute."</a:t>
-            </a:r>
-          </a:p>
-          <a:p/>
-          <a:p>
-            <a:r>
-              <a:t>Eleven. SLIs and owners. "Task success or resolved rate, containment, tool error rate, p95 latency, cost per resolved session and a judge score. Each SLI gets an SLO and an error budget. Every alert has a named owner and a runbook, or it gets deleted."</a:t>
-            </a:r>
-          </a:p>
-          <a:p/>
-          <a:p>
-            <a:r>
-              <a:t>Twelve. Telemetry safety. "Export on a background thread with a bounded queue that drops on overflow, five-second exporter timeouts, credentials in the Collector not the app, and a counter for dropped spans. I test it by killing the backend under load and asserting p95 doesn't move."</a:t>
-            </a:r>
-          </a:p>
-          <a:p/>
-          <a:p>
-            <a:r>
-              <a:t>Notice the pattern. Every answer names a mechanism and a number. That's what interviewers are listening for.</a:t>
+              <a:t>Six. Three ways to cut spend. "Prompt caching with a stable prefix, measured by cached token share. A context diet, measured by tokens per step. And small-model-first routing, measured by model mix. I prove each by replaying the same day with and without it."</a:t>
             </a:r>
           </a:p>
         </p:txBody>
@@ -687,19 +676,13 @@
           <a:lstStyle/>
           <a:p>
             <a:r>
-              <a:t>Now the pitch. You'll need budget for the backend, for Collector infrastructure, for time. Here's the story that gets it. Three numbers.</a:t>
+              <a:t>Seven. One tenant burning the budget. "A per-tenant budget with a soft cap that degrades, a hard cap that refuses before any model call, and an anomaly alert on spend so I'm paged before the cap."</a:t>
             </a:r>
           </a:p>
           <a:p/>
           <a:p>
             <a:r>
-              <a:t>Cost avoided. The incident you caught at minute twenty instead of minute one hundred and twelve, in dollars, from the postmortem timeline. Cost saved. The replay comparison, by technique, multiplied out to a month. Risk reduced. The pull request that failed before it shipped, and the quality drift caught in an hour instead of a day, with the ticket volume it would have generated.</a:t>
-            </a:r>
-          </a:p>
-          <a:p/>
-          <a:p>
-            <a:r>
-              <a:t>Then the ask, in one sentence: what the tool costs, how much platform time, and who owns it. Managers say yes to three numbers and one sentence. They say "let's revisit next quarter" to a twelve-slide deck.</a:t>
+              <a:t>Eight. What a fallback needs. "A timeout derived from the step budget, not a default, so a stalled call becomes an error the breaker can count. A slow provider produces no errors, so nothing fails over until the timeout defines slowness as failure. And a fallback-rate metric, because a fallback nobody has seen fire is one you don't have."</a:t>
             </a:r>
           </a:p>
         </p:txBody>
@@ -769,13 +752,13 @@
           <a:lstStyle/>
           <a:p>
             <a:r>
-              <a:t>Four things not to say. Don't claim the course incidents were real production events; say they were simulated on a replayed dataset and the method is real. Interviewers respect that. Don't compare vendors by feature list; use the five criteria from Lecture 12.5. Don't quote a saving without a baseline and a method. And don't promise a hundred percent trace retention; talk about your sampling policy instead. Anyone who's run this at scale will nod.</a:t>
+              <a:t>Nine. Worse while everything looks fine. "A sampled LLM judge on live traffic, user feedback and drift checks, all sliced by prompt version. In my incident, grounded fell from point nine four to point five six the hour a prompt label moved, while cost and latency improved."</a:t>
             </a:r>
           </a:p>
           <a:p/>
           <a:p>
             <a:r>
-              <a:t>Last tip. Whether it's an interview or a budget meeting, open with a screenshot. The red pull request, or the one-page report. Then talk. Most candidates have a story. You have the artefact the story is about.</a:t>
+              <a:t>Ten. Preventing a prompt regression. "Treat the production label as a deploy. Promotion runs in CI against a dataset of past failures and refuses below a threshold. Rollback is moving the label back, which takes a minute."</a:t>
             </a:r>
           </a:p>
         </p:txBody>
@@ -845,7 +828,19 @@
           <a:lstStyle/>
           <a:p>
             <a:r>
-              <a:t>Title card (K2). Final practice test.</a:t>
+              <a:t>Eleven. SLIs and owners. "Task success, containment, tool error rate, p95 latency, cost per resolved session and a judge score. Each with an SLO and an error budget. Every alert has an owner and a runbook, or it gets deleted."</a:t>
+            </a:r>
+          </a:p>
+          <a:p/>
+          <a:p>
+            <a:r>
+              <a:t>Twelve. Telemetry safety. "Export on a background thread with a bounded queue, five-second exporter timeouts, credentials in the Collector, and a counter for export failures. I test it by killing the backend under load and checking every request still succeeds."</a:t>
+            </a:r>
+          </a:p>
+          <a:p/>
+          <a:p>
+            <a:r>
+              <a:t>Notice the pattern. Every answer names a mechanism and a number.</a:t>
             </a:r>
           </a:p>
         </p:txBody>
@@ -915,25 +910,13 @@
           <a:lstStyle/>
           <a:p>
             <a:r>
-              <a:t>The questions follow the order of the course. Tracing and the GenAI conventions first. Then Langfuse, agent patterns, cost engineering, latency and reliability, online evaluation, SLOs and alerting, governance, incidents, portability and deployment.</a:t>
+              <a:t>Now the pitch. You'll need budget for the backend, the Collector, and time. Three numbers get it. Cost avoided: the incident a routed alert would have caught at ten past ten instead of eleven forty, in dollars, from the postmortem timeline. Cost saved: the replay comparison, by lever, multiplied out to a month. Risk reduced: the pull request that failed before it shipped, and the drift caught in an hour instead of a day.</a:t>
             </a:r>
           </a:p>
           <a:p/>
           <a:p>
             <a:r>
-              <a:t>Take it in one sitting if you can. Most students need thirty to forty minutes.</a:t>
-            </a:r>
-          </a:p>
-          <a:p/>
-          <a:p>
-            <a:r>
-              <a:t>When you finish, don't just look at the score. Look at where you missed. If three misses come from the same section, that's the section to rewatch before your next project.</a:t>
-            </a:r>
-          </a:p>
-          <a:p/>
-          <a:p>
-            <a:r>
-              <a:t>Good luck. You're ready for this.</a:t>
+              <a:t>Then the ask, in one sentence: what the tool costs, how much platform time, and who owns it. Managers say yes to three numbers and one sentence.</a:t>
             </a:r>
           </a:p>
         </p:txBody>
@@ -1003,7 +986,13 @@
           <a:lstStyle/>
           <a:p>
             <a:r>
-              <a:t>Title card (K2). Bonus Lecture: keep operating.</a:t>
+              <a:t>Four things not to say. Don't claim the course incidents were real production events; say they were simulated and the method is real. Don't compare vendors by feature list; use the five criteria from Lecture 12.5. Don't quote a saving without a baseline and a method. And don't promise a hundred percent trace retention; talk about your sampling policy instead.</a:t>
+            </a:r>
+          </a:p>
+          <a:p/>
+          <a:p>
+            <a:r>
+              <a:t>Last tip. Whether it's an interview or a budget meeting, open with a screenshot. The red pull request, or the one-page report. Then talk. Most candidates have a story. You have the artefact the story is about.</a:t>
             </a:r>
           </a:p>
         </p:txBody>
@@ -1073,19 +1062,7 @@
           <a:lstStyle/>
           <a:p>
             <a:r>
-              <a:t>First, updates. This field moves fast. Langfuse ships often, the OpenTelemetry GenAI conventions are still marked incubating, and attribute names may change before they stabilise. Every script in this course was checked against the versions in the README: Langfuse four fifteen, OpenTelemetry SDK one forty-five, semantic conventions zero sixty-six, LangSmith zero fourteen.</a:t>
-            </a:r>
-          </a:p>
-          <a:p/>
-          <a:p>
-            <a:r>
-              <a:t>When something changes, I update the repo README first, with the tested versions and any code changes. Big changes also go out as a course announcement.</a:t>
-            </a:r>
-          </a:p>
-          <a:p/>
-          <a:p>
-            <a:r>
-              <a:t>For your own project, pin your versions, as we did in `pyproject.toml`. Upgrade on a branch, with the budget gate running, and read the deprecation warnings. Here's a routine that works: once a month, read the changelogs for Langfuse, the OTel SDK and the semantic conventions. Upgrade on a branch. Run `make test` and `make budget-check`. If the numbers hold, merge, and keep the rollback ready. Twenty minutes a month keeps you off the "it broke on Friday" list, which after Section 11 you know is a real list.</a:t>
+              <a:t>Title card (K2). Final practice test.</a:t>
             </a:r>
           </a:p>
         </p:txBody>
@@ -1155,13 +1132,25 @@
           <a:lstStyle/>
           <a:p>
             <a:r>
-              <a:t>Second, help. The Q&amp;A stays open. When you post, include three things: the exact command you ran, the full error message, and your package versions. That turns a two-day back-and-forth into a one-reply fix. Search first; most Docker Compose and Langfuse self-host questions have been answered.</a:t>
+              <a:t>The questions follow the order of the course. Tracing and the GenAI conventions first. Then Langfuse, agent patterns, cost engineering, latency and reliability, online evaluation, SLOs and alerting, governance, incidents, portability and deployment.</a:t>
             </a:r>
           </a:p>
           <a:p/>
           <a:p>
             <a:r>
-              <a:t>And please share your capstone numbers and your dashboard screenshot. Other students learn from seeing different agents and different SLIs, and so do I. Some of the best improvements to this course came from student questions, so if something was confusing, say so. That feedback shapes the next update.</a:t>
+              <a:t>Take it in one sitting if you can. Most students need thirty to forty minutes.</a:t>
+            </a:r>
+          </a:p>
+          <a:p/>
+          <a:p>
+            <a:r>
+              <a:t>When you finish, don't just look at the score. Look at where you missed. If three misses come from the same section, that's the section to rewatch before your next project.</a:t>
+            </a:r>
+          </a:p>
+          <a:p/>
+          <a:p>
+            <a:r>
+              <a:t>Good luck. You're ready for this.</a:t>
             </a:r>
           </a:p>
         </p:txBody>
@@ -1231,31 +1220,7 @@
           <a:lstStyle/>
           <a:p>
             <a:r>
-              <a:t>Third, and only if it's useful to you: this course is part of a set.</a:t>
-            </a:r>
-          </a:p>
-          <a:p/>
-          <a:p>
-            <a:r>
-              <a:t>*Generative AI &amp; AI Agents: Zero to Production* is the building course. It's for you if Section 5, the agent internals, felt fast. It covers prompting, tools, retrieval and agent design from first principles.</a:t>
-            </a:r>
-          </a:p>
-          <a:p/>
-          <a:p>
-            <a:r>
-              <a:t>*AI Agent Testing &amp; Evaluation* is the testing course. It's for you if Section 8 was your favourite, or if you own quality on your team. It goes much deeper on evaluation design, LLM judges, datasets and test strategy than we had room for here, and the dataset you built in Lecture 8.6 is exactly what it consumes.</a:t>
-            </a:r>
-          </a:p>
-          <a:p/>
-          <a:p>
-            <a:r>
-              <a:t>*Production Voice AI Agents with Python* is the real-time course. It's for you if the latency budgets in Section 7 interested you, or if the domain swap in Lecture 14.6 made you want to build the voice agent you instrumented.</a:t>
-            </a:r>
-          </a:p>
-          <a:p/>
-          <a:p>
-            <a:r>
-              <a:t>You don't need any of them to use what you've learned here. The links are in the resources panel for this lecture if you want to take a look.</a:t>
+              <a:t>Title card (K2). Bonus Lecture: keep operating.</a:t>
             </a:r>
           </a:p>
         </p:txBody>
@@ -1325,13 +1290,25 @@
           <a:lstStyle/>
           <a:p>
             <a:r>
-              <a:t>That's it. Thank you for taking this course, and for sticking with it all the way to an agent you can see, explain, cap and defend. Finish the capstone. Send the report. Keep the gate green.</a:t>
+              <a:t>First, updates. This field moves fast. Langfuse ships often, the OpenTelemetry GenAI conventions are still marked incubating, and attribute names may change before they stabilise. Every script in this course was checked against the versions in the README: Langfuse four fifteen, OpenTelemetry SDK one forty-five, semantic conventions zero sixty-six, LangSmith zero fourteen.</a:t>
             </a:r>
           </a:p>
           <a:p/>
           <a:p>
             <a:r>
-              <a:t>I'll see you in the Q&amp;A.</a:t>
+              <a:t>When something changes, I update the repo README first, with the tested versions and any code changes. Big changes also go out as a course announcement.</a:t>
+            </a:r>
+          </a:p>
+          <a:p/>
+          <a:p>
+            <a:r>
+              <a:t>[SCREEN: Terminal in `03-code/`: `make test` → `419 passed`; `make budget-check` → `5 passed`. The monthly upgrade check, in two commands.]</a:t>
+            </a:r>
+          </a:p>
+          <a:p/>
+          <a:p>
+            <a:r>
+              <a:t>For your own project, pin your versions, as we did in `pyproject.toml`. Upgrade on a branch, with the budget gate running, and read the deprecation warnings. Here's a routine that works: once a month, read the changelogs for Langfuse, the OTel SDK and the semantic conventions. Upgrade on a branch. Run `make test` and `make budget-check`. If the numbers hold, merge, and keep the rollback ready. Twenty minutes a month keeps you off the "it broke on Friday" list, which after Section 11 you know is a real list.</a:t>
             </a:r>
           </a:p>
         </p:txBody>
@@ -1413,25 +1390,271 @@
           <a:p/>
           <a:p>
             <a:r>
-              <a:t>Cost. You compute the true cost of every request and roll it up to the number finance asks for. You cut it by more than forty percent and proved the saving by technique. You cap it per tenant and detect anomalies before the cap.</a:t>
+              <a:t>Cost. You compute the true cost of every request and roll it up to the number finance asks for. On a replayed day you cut it from fifty-six dollars to nineteen, and proved each lever separately.</a:t>
             </a:r>
           </a:p>
           <a:p/>
           <a:p>
             <a:r>
-              <a:t>Reliability. You measure time to first token and p95, you time out, retry with bounds, fall back on slowness, and you held p95 under four seconds while the provider was failing.</a:t>
+              <a:t>Reliability. You measure time to first token and p95, you time out, retry with bounds and fall back. And you know why a slow provider never trips a breaker that only counts errors.</a:t>
             </a:r>
           </a:p>
           <a:p/>
           <a:p>
             <a:r>
-              <a:t>Quality in production. You judge a sample of live traffic, correlate it with feedback, detect drift week over week, and turn failures into regression tests.</a:t>
+              <a:t>Quality in production. You judge a sample of live traffic, correlate it with feedback, detect drift, and turn failures into regression tests.</a:t>
             </a:r>
           </a:p>
           <a:p/>
           <a:p>
             <a:r>
               <a:t>And operations. SLIs a manager understands, dashboards and alerts as code, three incidents investigated from traces alone, postmortems with verifiable action items, a self-hosted stack, a gate that stops bad changes with a number, and a one-page report.</a:t>
+            </a:r>
+          </a:p>
+        </p:txBody>
+      </p:sp>
+      <p:sp>
+        <p:nvSpPr>
+          <p:cNvPr id="4" name="Slide Number Placeholder 3"/>
+          <p:cNvSpPr>
+            <a:spLocks noGrp="1"/>
+          </p:cNvSpPr>
+          <p:nvPr>
+            <p:ph type="sldNum" idx="5" sz="quarter"/>
+          </p:nvPr>
+        </p:nvSpPr>
+        <p:spPr/>
+      </p:sp>
+    </p:spTree>
+  </p:cSld>
+  <p:clrMapOvr>
+    <a:masterClrMapping/>
+  </p:clrMapOvr>
+</p:notes>
+</file>
+
+<file path=ppt/notesSlides/notesSlide20.xml><?xml version="1.0" encoding="utf-8"?>
+<p:notes xmlns:a="http://schemas.openxmlformats.org/drawingml/2006/main" xmlns:p="http://schemas.openxmlformats.org/presentationml/2006/main" xmlns:r="http://schemas.openxmlformats.org/officeDocument/2006/relationships">
+  <p:cSld>
+    <p:spTree>
+      <p:nvGrpSpPr>
+        <p:cNvPr id="1" name=""/>
+        <p:cNvGrpSpPr/>
+        <p:nvPr/>
+      </p:nvGrpSpPr>
+      <p:grpSpPr>
+        <a:xfrm>
+          <a:off x="0" y="0"/>
+          <a:ext cx="0" cy="0"/>
+          <a:chOff x="0" y="0"/>
+          <a:chExt cx="0" cy="0"/>
+        </a:xfrm>
+      </p:grpSpPr>
+      <p:sp>
+        <p:nvSpPr>
+          <p:cNvPr id="2" name="Slide Image Placeholder 1"/>
+          <p:cNvSpPr>
+            <a:spLocks noGrp="1"/>
+          </p:cNvSpPr>
+          <p:nvPr>
+            <p:ph type="sldImg" idx="2"/>
+          </p:nvPr>
+        </p:nvSpPr>
+        <p:spPr/>
+      </p:sp>
+      <p:sp>
+        <p:nvSpPr>
+          <p:cNvPr id="3" name="Notes Placeholder 2"/>
+          <p:cNvSpPr>
+            <a:spLocks noGrp="1"/>
+          </p:cNvSpPr>
+          <p:nvPr>
+            <p:ph type="body" idx="3" sz="quarter"/>
+          </p:nvPr>
+        </p:nvSpPr>
+        <p:spPr/>
+        <p:txBody>
+          <a:bodyPr/>
+          <a:lstStyle/>
+          <a:p>
+            <a:r>
+              <a:t>Second, help. The Q&amp;A stays open. When you post, include three things: the exact command you ran, the full error message, and your package versions. That turns a two-day back-and-forth into a one-reply fix. Search first; most Docker Compose and Langfuse self-host questions have been answered.</a:t>
+            </a:r>
+          </a:p>
+          <a:p/>
+          <a:p>
+            <a:r>
+              <a:t>And please share your capstone numbers and your dashboard screenshot. Other students learn from seeing different agents and different SLIs, and so do I. Some of the best improvements to this course came from student questions, so if something was confusing, say so. That feedback shapes the next update.</a:t>
+            </a:r>
+          </a:p>
+        </p:txBody>
+      </p:sp>
+      <p:sp>
+        <p:nvSpPr>
+          <p:cNvPr id="4" name="Slide Number Placeholder 3"/>
+          <p:cNvSpPr>
+            <a:spLocks noGrp="1"/>
+          </p:cNvSpPr>
+          <p:nvPr>
+            <p:ph type="sldNum" idx="5" sz="quarter"/>
+          </p:nvPr>
+        </p:nvSpPr>
+        <p:spPr/>
+      </p:sp>
+    </p:spTree>
+  </p:cSld>
+  <p:clrMapOvr>
+    <a:masterClrMapping/>
+  </p:clrMapOvr>
+</p:notes>
+</file>
+
+<file path=ppt/notesSlides/notesSlide21.xml><?xml version="1.0" encoding="utf-8"?>
+<p:notes xmlns:a="http://schemas.openxmlformats.org/drawingml/2006/main" xmlns:p="http://schemas.openxmlformats.org/presentationml/2006/main" xmlns:r="http://schemas.openxmlformats.org/officeDocument/2006/relationships">
+  <p:cSld>
+    <p:spTree>
+      <p:nvGrpSpPr>
+        <p:cNvPr id="1" name=""/>
+        <p:cNvGrpSpPr/>
+        <p:nvPr/>
+      </p:nvGrpSpPr>
+      <p:grpSpPr>
+        <a:xfrm>
+          <a:off x="0" y="0"/>
+          <a:ext cx="0" cy="0"/>
+          <a:chOff x="0" y="0"/>
+          <a:chExt cx="0" cy="0"/>
+        </a:xfrm>
+      </p:grpSpPr>
+      <p:sp>
+        <p:nvSpPr>
+          <p:cNvPr id="2" name="Slide Image Placeholder 1"/>
+          <p:cNvSpPr>
+            <a:spLocks noGrp="1"/>
+          </p:cNvSpPr>
+          <p:nvPr>
+            <p:ph type="sldImg" idx="2"/>
+          </p:nvPr>
+        </p:nvSpPr>
+        <p:spPr/>
+      </p:sp>
+      <p:sp>
+        <p:nvSpPr>
+          <p:cNvPr id="3" name="Notes Placeholder 2"/>
+          <p:cNvSpPr>
+            <a:spLocks noGrp="1"/>
+          </p:cNvSpPr>
+          <p:nvPr>
+            <p:ph type="body" idx="3" sz="quarter"/>
+          </p:nvPr>
+        </p:nvSpPr>
+        <p:spPr/>
+        <p:txBody>
+          <a:bodyPr/>
+          <a:lstStyle/>
+          <a:p>
+            <a:r>
+              <a:t>Third, and only if it's useful to you: this course is part of a set.</a:t>
+            </a:r>
+          </a:p>
+          <a:p/>
+          <a:p>
+            <a:r>
+              <a:t>*Generative AI &amp; AI Agents: Zero to Production* is the building course. It's for you if Section 5, the agent internals, felt fast. It covers prompting, tools, retrieval and agent design from first principles.</a:t>
+            </a:r>
+          </a:p>
+          <a:p/>
+          <a:p>
+            <a:r>
+              <a:t>*AI Agent Testing &amp; Evaluation* is the testing course. It's for you if Section 8 was your favourite, or if you own quality on your team. It goes much deeper on evaluation design, LLM judges, datasets and test strategy than we had room for here, and the dataset you built in Lecture 8.6 is exactly what it consumes.</a:t>
+            </a:r>
+          </a:p>
+          <a:p/>
+          <a:p>
+            <a:r>
+              <a:t>*Production Voice AI Agents with Python* is the real-time course. It's for you if the latency budgets in Section 7 interested you, or if the domain swap in Lecture 14.6 made you want to build the voice agent you instrumented.</a:t>
+            </a:r>
+          </a:p>
+          <a:p/>
+          <a:p>
+            <a:r>
+              <a:t>You don't need any of them to use what you've learned here. The links are in the resources panel for this lecture if you want to take a look.</a:t>
+            </a:r>
+          </a:p>
+        </p:txBody>
+      </p:sp>
+      <p:sp>
+        <p:nvSpPr>
+          <p:cNvPr id="4" name="Slide Number Placeholder 3"/>
+          <p:cNvSpPr>
+            <a:spLocks noGrp="1"/>
+          </p:cNvSpPr>
+          <p:nvPr>
+            <p:ph type="sldNum" idx="5" sz="quarter"/>
+          </p:nvPr>
+        </p:nvSpPr>
+        <p:spPr/>
+      </p:sp>
+    </p:spTree>
+  </p:cSld>
+  <p:clrMapOvr>
+    <a:masterClrMapping/>
+  </p:clrMapOvr>
+</p:notes>
+</file>
+
+<file path=ppt/notesSlides/notesSlide22.xml><?xml version="1.0" encoding="utf-8"?>
+<p:notes xmlns:a="http://schemas.openxmlformats.org/drawingml/2006/main" xmlns:p="http://schemas.openxmlformats.org/presentationml/2006/main" xmlns:r="http://schemas.openxmlformats.org/officeDocument/2006/relationships">
+  <p:cSld>
+    <p:spTree>
+      <p:nvGrpSpPr>
+        <p:cNvPr id="1" name=""/>
+        <p:cNvGrpSpPr/>
+        <p:nvPr/>
+      </p:nvGrpSpPr>
+      <p:grpSpPr>
+        <a:xfrm>
+          <a:off x="0" y="0"/>
+          <a:ext cx="0" cy="0"/>
+          <a:chOff x="0" y="0"/>
+          <a:chExt cx="0" cy="0"/>
+        </a:xfrm>
+      </p:grpSpPr>
+      <p:sp>
+        <p:nvSpPr>
+          <p:cNvPr id="2" name="Slide Image Placeholder 1"/>
+          <p:cNvSpPr>
+            <a:spLocks noGrp="1"/>
+          </p:cNvSpPr>
+          <p:nvPr>
+            <p:ph type="sldImg" idx="2"/>
+          </p:nvPr>
+        </p:nvSpPr>
+        <p:spPr/>
+      </p:sp>
+      <p:sp>
+        <p:nvSpPr>
+          <p:cNvPr id="3" name="Notes Placeholder 2"/>
+          <p:cNvSpPr>
+            <a:spLocks noGrp="1"/>
+          </p:cNvSpPr>
+          <p:nvPr>
+            <p:ph type="body" idx="3" sz="quarter"/>
+          </p:nvPr>
+        </p:nvSpPr>
+        <p:spPr/>
+        <p:txBody>
+          <a:bodyPr/>
+          <a:lstStyle/>
+          <a:p>
+            <a:r>
+              <a:t>That's it. Thank you for taking this course, and for sticking with it all the way to an agent you can see, explain, cap and defend. Finish the capstone. Send the report. Keep the gate green.</a:t>
+            </a:r>
+          </a:p>
+          <a:p/>
+          <a:p>
+            <a:r>
+              <a:t>I'll see you in the Q&amp;A.</a:t>
             </a:r>
           </a:p>
         </p:txBody>
@@ -1501,7 +1724,7 @@
           <a:lstStyle/>
           <a:p>
             <a:r>
-              <a:t>This course is the fourth in a path: build, test, deploy, operate. You didn't need the other three to take this one. But if a part of this course felt thin, the offline eval theory in Section 8, or the agent internals in Section 5, that's where the deeper material lives. More in the bonus lecture at the very end.</a:t>
+              <a:t>This course is the fourth in a path: build, test, deploy, operate. You didn't need the other three to take this one. If a part of this course felt thin, the offline eval theory in Section 8, or the agent internals in Section 5, that's where the deeper material lives. More in the bonus lecture at the very end.</a:t>
             </a:r>
           </a:p>
         </p:txBody>
@@ -1571,7 +1794,7 @@
           <a:lstStyle/>
           <a:p>
             <a:r>
-              <a:t>Here's my challenge for the next seven days. Finish the capstone and get the acceptance report to fourteen or better. Send the weekly report to one real person, a manager, a colleague, a friend who runs a team, and ask them which number they'd want explained. Their answer will change your report. And pick one agent you or your team already run, and add GenAI attributes to its model call. One span. That's how it starts in a real company: one span, then a dashboard, then someone asks for the report.</a:t>
+              <a:t>Here's my challenge for the next seven days. Finish the capstone and get the acceptance report to fifteen or better. Send the weekly report to one real person and ask them which number they'd want explained. Their answer will change your report. And pick one agent you already run and add GenAI attributes to its model call. One span. That's how it starts in a real company: one span, then a dashboard, then someone asks for the report.</a:t>
             </a:r>
           </a:p>
           <a:p/>
@@ -1717,13 +1940,13 @@
           <a:lstStyle/>
           <a:p>
             <a:r>
-              <a:t>Job titles are messy, so search for several. "LLMOps" and "MLOps, LLM" roles focus on tracing, production evals, cost and the prompt and model lifecycle: Sections 3, 4, 6 and 8. "AI platform engineer" roles build the shared stack: the gateway, the observability pipeline, budgets and routing for many teams: Sections 6, 7, 12 and 13. "AI reliability engineer" or "SRE, AI systems" roles own SLOs, incidents, capacity and provider risk: Sections 7, 9 and 11. "AI product engineer" and "forward deployed" roles ship agents and are increasingly asked to own the metrics: Section 14. And FinOps teams now hire for AI spend specifically: Section 6.</a:t>
+              <a:t>Job titles are messy, so search for several. "LLMOps" roles focus on tracing, production evals, cost and the prompt lifecycle: Sections 3, 4, 6 and 8. "AI platform engineer" roles build the shared stack, the gateway, the observability pipeline, budgets and routing for many teams: Sections 6, 7, 12 and 13. "AI reliability engineer" roles own SLOs, incidents and provider risk: Sections 7, 9 and 11. "AI product engineer" and "forward deployed" roles ship agents and increasingly own the metrics: Section 14. And FinOps teams now hire for AI spend: Section 6.</a:t>
             </a:r>
           </a:p>
           <a:p/>
           <a:p>
             <a:r>
-              <a:t>Read the description, not the title. Look for: cost per task, evals in production, OpenTelemetry, SLOs, prompt versioning, incident.</a:t>
+              <a:t>Read the description, not the title. Look for cost per task, evals in production, OpenTelemetry, SLOs, prompt versioning, incident.</a:t>
             </a:r>
           </a:p>
         </p:txBody>
@@ -1793,7 +2016,7 @@
           <a:lstStyle/>
           <a:p>
             <a:r>
-              <a:t>Whatever the title, your evidence is the same. The capstone with three numbers up front. Postmortems. A red pull request. The weekly report. And the domain swap, which proves you can do it twice. Numbers beat adjectives: "cut cost per resolved session forty-three percent and held p95 under four seconds under a provider slowdown" is a stronger line than "experienced with LLM observability."</a:t>
+              <a:t>Whatever the title, your evidence is the same. The capstone with three numbers up front. Postmortems. A red pull request. The weekly report. And the domain swap. Numbers beat adjectives: "cut a replayed day's cost by sixty-six percent with quality scores unchanged" is a stronger line than "experienced with LLM observability."</a:t>
             </a:r>
           </a:p>
         </p:txBody>
@@ -1875,19 +2098,7 @@
           <a:p/>
           <a:p>
             <a:r>
-              <a:t>Two. GenAI semantic conventions. "A standard vocabulary from OpenTelemetry for model, token usage, tool and agent attributes. Using them means any backend understands my spans, so I'm not locked in. They're still incubating, so I keep them behind one helper module."</a:t>
-            </a:r>
-          </a:p>
-          <a:p/>
-          <a:p>
-            <a:r>
-              <a:t>Three. Cost attribution. "Compute cost once per generation from a price table I control, write it as a span attribute and a low-cardinality metric labelled by tenant and model, then roll up by session, user, tenant and feature. The report uses the same aggregation as the dashboard so they can't disagree."</a:t>
-            </a:r>
-          </a:p>
-          <a:p/>
-          <a:p>
-            <a:r>
-              <a:t>Four. What never goes in a trace. "Raw PII and full tool payloads. I mask in the SDK with a mask function and again in the Collector, keep hashes for joins, and I have a test that sends a fake email through and asserts it comes out hashed."</a:t>
+              <a:t>Two. GenAI semantic conventions. "A standard OpenTelemetry vocabulary for model, token, tool and agent attributes. Any backend understands my spans, so I'm not locked in. They're still incubating, so I keep them behind one helper module."</a:t>
             </a:r>
           </a:p>
         </p:txBody>
@@ -1957,25 +2168,13 @@
           <a:lstStyle/>
           <a:p>
             <a:r>
-              <a:t>Five. Cost tripled overnight. "Timeline first: when, and what changed. Then blast radius: which tenant, which tool. Then two hypotheses with predictions: more requests, or bigger requests. Requests per minute versus tokens per generation tells me which. Then one trace. In the incident I worked, it was a config override that switched off context trimming, multiplied by a provider timeout storm that sent every oversized prompt three times."</a:t>
+              <a:t>Three. Cost attribution. "Compute cost once per generation from a price table I control, write it as a span attribute and a low-cardinality metric, then roll up by session, tenant and feature. The report uses the same aggregation as the dashboard so they can't disagree."</a:t>
             </a:r>
           </a:p>
           <a:p/>
           <a:p>
             <a:r>
-              <a:t>Six. Three ways to cut spend. "Prompt caching with a stable prefix, measured by cached token share. A context diet: trimming history, truncating tool results, tuning retrieval k, measured by tokens per step. And small-model-first routing with escalation, measured by model mix. I prove each by replaying the same day with and without it."</a:t>
-            </a:r>
-          </a:p>
-          <a:p/>
-          <a:p>
-            <a:r>
-              <a:t>Seven. One tenant burning the budget. "A per-tenant budget with a soft cap that degrades, a hard cap that refuses politely, and an anomaly detector on the spend rate so I'm paged before the cap. The cap saved the money; the anomaly alert saves the morning."</a:t>
-            </a:r>
-          </a:p>
-          <a:p/>
-          <a:p>
-            <a:r>
-              <a:t>Eight. What a fallback needs. "A timeout derived from the step budget, not a default, and a circuit breaker that counts slow calls and timeouts, not only exhausted retries. Fallbacks trigger on failures; a slow provider produces none unless you define slowness as failure. And a metric for the fallback rate, because a fallback nobody has seen fire is one you don't have."</a:t>
+              <a:t>Four. What never goes in a trace. "Raw PII and full tool payloads. I mask in the SDK and again in the Collector, keep hashes for joins, and a test asserts no raw email or employee ID reaches any span."</a:t>
             </a:r>
           </a:p>
         </p:txBody>
@@ -5306,7 +5505,7 @@
                 </a:solidFill>
                 <a:latin typeface="Inter"/>
               </a:rPr>
-              <a:t>Interview questions 5-8: cost and reliability</a:t>
+              <a:t>Interview questions 1-2: tracing</a:t>
             </a:r>
           </a:p>
         </p:txBody>
@@ -5380,7 +5579,7 @@
                 <a:spcPct val="120000"/>
               </a:lnSpc>
               <a:spcAft>
-                <a:spcPts val="1260"/>
+                <a:spcPts val="1539"/>
               </a:spcAft>
               <a:buClr>
                 <a:srgbClr val="00D4AA"/>
@@ -5389,13 +5588,13 @@
               <a:buChar char="•"/>
             </a:pPr>
             <a:r>
-              <a:rPr sz="1800" b="0">
+              <a:rPr sz="2200" b="0">
                 <a:solidFill>
                   <a:srgbClr val="FFFFFF"/>
                 </a:solidFill>
                 <a:latin typeface="Inter"/>
               </a:rPr>
-              <a:t>An agent's cost tripled overnight. Walk me through your investigation.</a:t>
+              <a:t>How do you trace a multi-step agent so the trace explains the tool calls?</a:t>
             </a:r>
           </a:p>
           <a:p>
@@ -5404,7 +5603,7 @@
                 <a:spcPct val="120000"/>
               </a:lnSpc>
               <a:spcAft>
-                <a:spcPts val="1260"/>
+                <a:spcPts val="1539"/>
               </a:spcAft>
               <a:buClr>
                 <a:srgbClr val="00D4AA"/>
@@ -5413,61 +5612,13 @@
               <a:buChar char="•"/>
             </a:pPr>
             <a:r>
-              <a:rPr sz="1800" b="0">
+              <a:rPr sz="2200" b="0">
                 <a:solidFill>
                   <a:srgbClr val="FFFFFF"/>
                 </a:solidFill>
                 <a:latin typeface="Inter"/>
               </a:rPr>
-              <a:t>Name three ways to cut LLM spend and how you'd prove each saving.</a:t>
-            </a:r>
-          </a:p>
-          <a:p>
-            <a:pPr marL="292608" indent="-292608">
-              <a:lnSpc>
-                <a:spcPct val="120000"/>
-              </a:lnSpc>
-              <a:spcAft>
-                <a:spcPts val="1260"/>
-              </a:spcAft>
-              <a:buClr>
-                <a:srgbClr val="00D4AA"/>
-              </a:buClr>
-              <a:buFont typeface="Inter"/>
-              <a:buChar char="•"/>
-            </a:pPr>
-            <a:r>
-              <a:rPr sz="1800" b="0">
-                <a:solidFill>
-                  <a:srgbClr val="FFFFFF"/>
-                </a:solidFill>
-                <a:latin typeface="Inter"/>
-              </a:rPr>
-              <a:t>How do you stop one tenant from burning the whole budget?</a:t>
-            </a:r>
-          </a:p>
-          <a:p>
-            <a:pPr marL="292608" indent="-292608">
-              <a:lnSpc>
-                <a:spcPct val="120000"/>
-              </a:lnSpc>
-              <a:spcAft>
-                <a:spcPts val="1260"/>
-              </a:spcAft>
-              <a:buClr>
-                <a:srgbClr val="00D4AA"/>
-              </a:buClr>
-              <a:buFont typeface="Inter"/>
-              <a:buChar char="•"/>
-            </a:pPr>
-            <a:r>
-              <a:rPr sz="1800" b="0">
-                <a:solidFill>
-                  <a:srgbClr val="FFFFFF"/>
-                </a:solidFill>
-                <a:latin typeface="Inter"/>
-              </a:rPr>
-              <a:t>What does a fallback need in order to protect a latency SLO?</a:t>
+              <a:t>What are the GenAI semantic conventions and why use them?</a:t>
             </a:r>
           </a:p>
         </p:txBody>
@@ -5566,7 +5717,7 @@
                 </a:solidFill>
                 <a:latin typeface="Inter"/>
               </a:rPr>
-              <a:t>Interview questions 9-12: quality and operations</a:t>
+              <a:t>Interview questions 3-4: cost and privacy</a:t>
             </a:r>
           </a:p>
         </p:txBody>
@@ -5640,7 +5791,7 @@
                 <a:spcPct val="120000"/>
               </a:lnSpc>
               <a:spcAft>
-                <a:spcPts val="1260"/>
+                <a:spcPts val="1539"/>
               </a:spcAft>
               <a:buClr>
                 <a:srgbClr val="00D4AA"/>
@@ -5649,13 +5800,13 @@
               <a:buChar char="•"/>
             </a:pPr>
             <a:r>
-              <a:rPr sz="1800" b="0">
+              <a:rPr sz="2200" b="0">
                 <a:solidFill>
                   <a:srgbClr val="FFFFFF"/>
                 </a:solidFill>
                 <a:latin typeface="Inter"/>
               </a:rPr>
-              <a:t>How do you know an agent got worse when latency, errors and cost all look fine?</a:t>
+              <a:t>How do you attribute cost to a tenant or feature?</a:t>
             </a:r>
           </a:p>
           <a:p>
@@ -5664,7 +5815,7 @@
                 <a:spcPct val="120000"/>
               </a:lnSpc>
               <a:spcAft>
-                <a:spcPts val="1260"/>
+                <a:spcPts val="1539"/>
               </a:spcAft>
               <a:buClr>
                 <a:srgbClr val="00D4AA"/>
@@ -5673,61 +5824,13 @@
               <a:buChar char="•"/>
             </a:pPr>
             <a:r>
-              <a:rPr sz="1800" b="0">
+              <a:rPr sz="2200" b="0">
                 <a:solidFill>
                   <a:srgbClr val="FFFFFF"/>
                 </a:solidFill>
                 <a:latin typeface="Inter"/>
               </a:rPr>
-              <a:t>How do you prevent a prompt change from regressing production?</a:t>
-            </a:r>
-          </a:p>
-          <a:p>
-            <a:pPr marL="292608" indent="-292608">
-              <a:lnSpc>
-                <a:spcPct val="120000"/>
-              </a:lnSpc>
-              <a:spcAft>
-                <a:spcPts val="1260"/>
-              </a:spcAft>
-              <a:buClr>
-                <a:srgbClr val="00D4AA"/>
-              </a:buClr>
-              <a:buFont typeface="Inter"/>
-              <a:buChar char="•"/>
-            </a:pPr>
-            <a:r>
-              <a:rPr sz="1800" b="0">
-                <a:solidFill>
-                  <a:srgbClr val="FFFFFF"/>
-                </a:solidFill>
-                <a:latin typeface="Inter"/>
-              </a:rPr>
-              <a:t>What SLIs would you put on a dashboard for an AI agent, and who owns each alert?</a:t>
-            </a:r>
-          </a:p>
-          <a:p>
-            <a:pPr marL="292608" indent="-292608">
-              <a:lnSpc>
-                <a:spcPct val="120000"/>
-              </a:lnSpc>
-              <a:spcAft>
-                <a:spcPts val="1260"/>
-              </a:spcAft>
-              <a:buClr>
-                <a:srgbClr val="00D4AA"/>
-              </a:buClr>
-              <a:buFont typeface="Inter"/>
-              <a:buChar char="•"/>
-            </a:pPr>
-            <a:r>
-              <a:rPr sz="1800" b="0">
-                <a:solidFill>
-                  <a:srgbClr val="FFFFFF"/>
-                </a:solidFill>
-                <a:latin typeface="Inter"/>
-              </a:rPr>
-              <a:t>How do you keep telemetry from taking down the service it observes?</a:t>
+              <a:t>What do you never put in a trace, and how do you enforce that?</a:t>
             </a:r>
           </a:p>
         </p:txBody>
@@ -5826,7 +5929,7 @@
                 </a:solidFill>
                 <a:latin typeface="Inter"/>
               </a:rPr>
-              <a:t>Pitching observability to management: the ROI story</a:t>
+              <a:t>Interview questions 5-6: cost incidents and savings</a:t>
             </a:r>
           </a:p>
         </p:txBody>
@@ -5900,7 +6003,7 @@
                 <a:spcPct val="120000"/>
               </a:lnSpc>
               <a:spcAft>
-                <a:spcPts val="1260"/>
+                <a:spcPts val="1539"/>
               </a:spcAft>
               <a:buClr>
                 <a:srgbClr val="00D4AA"/>
@@ -5909,13 +6012,13 @@
               <a:buChar char="•"/>
             </a:pPr>
             <a:r>
-              <a:rPr sz="1800" b="0">
+              <a:rPr sz="2200" b="0">
                 <a:solidFill>
                   <a:srgbClr val="FFFFFF"/>
                 </a:solidFill>
                 <a:latin typeface="Inter"/>
               </a:rPr>
-              <a:t>Cost avoided: "the incident we caught at minute 20 instead of minute 112" in dollars</a:t>
+              <a:t>An agent's cost spiked overnight. Walk me through your investigation.</a:t>
             </a:r>
           </a:p>
           <a:p>
@@ -5924,7 +6027,7 @@
                 <a:spcPct val="120000"/>
               </a:lnSpc>
               <a:spcAft>
-                <a:spcPts val="1260"/>
+                <a:spcPts val="1539"/>
               </a:spcAft>
               <a:buClr>
                 <a:srgbClr val="00D4AA"/>
@@ -5933,61 +6036,13 @@
               <a:buChar char="•"/>
             </a:pPr>
             <a:r>
-              <a:rPr sz="1800" b="0">
+              <a:rPr sz="2200" b="0">
                 <a:solidFill>
                   <a:srgbClr val="FFFFFF"/>
                 </a:solidFill>
                 <a:latin typeface="Inter"/>
               </a:rPr>
-              <a:t>Cost saved: the replay comparison, by technique, per month</a:t>
-            </a:r>
-          </a:p>
-          <a:p>
-            <a:pPr marL="292608" indent="-292608">
-              <a:lnSpc>
-                <a:spcPct val="120000"/>
-              </a:lnSpc>
-              <a:spcAft>
-                <a:spcPts val="1260"/>
-              </a:spcAft>
-              <a:buClr>
-                <a:srgbClr val="00D4AA"/>
-              </a:buClr>
-              <a:buFont typeface="Inter"/>
-              <a:buChar char="•"/>
-            </a:pPr>
-            <a:r>
-              <a:rPr sz="1800" b="0">
-                <a:solidFill>
-                  <a:srgbClr val="FFFFFF"/>
-                </a:solidFill>
-                <a:latin typeface="Inter"/>
-              </a:rPr>
-              <a:t>Risk reduced: the pull request that failed; the quality drift caught in an hour instead of a day</a:t>
-            </a:r>
-          </a:p>
-          <a:p>
-            <a:pPr marL="292608" indent="-292608">
-              <a:lnSpc>
-                <a:spcPct val="120000"/>
-              </a:lnSpc>
-              <a:spcAft>
-                <a:spcPts val="1260"/>
-              </a:spcAft>
-              <a:buClr>
-                <a:srgbClr val="00D4AA"/>
-              </a:buClr>
-              <a:buFont typeface="Inter"/>
-              <a:buChar char="•"/>
-            </a:pPr>
-            <a:r>
-              <a:rPr sz="1800" b="0">
-                <a:solidFill>
-                  <a:srgbClr val="FFFFFF"/>
-                </a:solidFill>
-                <a:latin typeface="Inter"/>
-              </a:rPr>
-              <a:t>Ask: the tool cost, the platform time, the owner, in one sentence</a:t>
+              <a:t>Name three ways to cut LLM spend and how you'd prove each saving.</a:t>
             </a:r>
           </a:p>
         </p:txBody>
@@ -6086,7 +6141,7 @@
                 </a:solidFill>
                 <a:latin typeface="Inter"/>
               </a:rPr>
-              <a:t>What not to say</a:t>
+              <a:t>Interview questions 7-8: budgets and fallbacks</a:t>
             </a:r>
           </a:p>
         </p:txBody>
@@ -6160,7 +6215,7 @@
                 <a:spcPct val="120000"/>
               </a:lnSpc>
               <a:spcAft>
-                <a:spcPts val="1260"/>
+                <a:spcPts val="1539"/>
               </a:spcAft>
               <a:buClr>
                 <a:srgbClr val="00D4AA"/>
@@ -6169,13 +6224,13 @@
               <a:buChar char="•"/>
             </a:pPr>
             <a:r>
-              <a:rPr sz="1800" b="0">
+              <a:rPr sz="2200" b="0">
                 <a:solidFill>
                   <a:srgbClr val="FFFFFF"/>
                 </a:solidFill>
                 <a:latin typeface="Inter"/>
               </a:rPr>
-              <a:t>Don't claim the incidents were real; say "simulated on a replayed dataset, method is real"</a:t>
+              <a:t>How do you stop one tenant from burning the whole budget?</a:t>
             </a:r>
           </a:p>
           <a:p>
@@ -6184,7 +6239,7 @@
                 <a:spcPct val="120000"/>
               </a:lnSpc>
               <a:spcAft>
-                <a:spcPts val="1260"/>
+                <a:spcPts val="1539"/>
               </a:spcAft>
               <a:buClr>
                 <a:srgbClr val="00D4AA"/>
@@ -6193,61 +6248,13 @@
               <a:buChar char="•"/>
             </a:pPr>
             <a:r>
-              <a:rPr sz="1800" b="0">
+              <a:rPr sz="2200" b="0">
                 <a:solidFill>
                   <a:srgbClr val="FFFFFF"/>
                 </a:solidFill>
                 <a:latin typeface="Inter"/>
               </a:rPr>
-              <a:t>Don't compare vendors by feature list; compare by control, cost, compliance, lock-in</a:t>
-            </a:r>
-          </a:p>
-          <a:p>
-            <a:pPr marL="292608" indent="-292608">
-              <a:lnSpc>
-                <a:spcPct val="120000"/>
-              </a:lnSpc>
-              <a:spcAft>
-                <a:spcPts val="1260"/>
-              </a:spcAft>
-              <a:buClr>
-                <a:srgbClr val="00D4AA"/>
-              </a:buClr>
-              <a:buFont typeface="Inter"/>
-              <a:buChar char="•"/>
-            </a:pPr>
-            <a:r>
-              <a:rPr sz="1800" b="0">
-                <a:solidFill>
-                  <a:srgbClr val="FFFFFF"/>
-                </a:solidFill>
-                <a:latin typeface="Inter"/>
-              </a:rPr>
-              <a:t>Don't quote a cost saving without the baseline and the method</a:t>
-            </a:r>
-          </a:p>
-          <a:p>
-            <a:pPr marL="292608" indent="-292608">
-              <a:lnSpc>
-                <a:spcPct val="120000"/>
-              </a:lnSpc>
-              <a:spcAft>
-                <a:spcPts val="1260"/>
-              </a:spcAft>
-              <a:buClr>
-                <a:srgbClr val="00D4AA"/>
-              </a:buClr>
-              <a:buFont typeface="Inter"/>
-              <a:buChar char="•"/>
-            </a:pPr>
-            <a:r>
-              <a:rPr sz="1800" b="0">
-                <a:solidFill>
-                  <a:srgbClr val="FFFFFF"/>
-                </a:solidFill>
-                <a:latin typeface="Inter"/>
-              </a:rPr>
-              <a:t>Don't promise 100% trace retention; talk about sampling policy</a:t>
+              <a:t>What does a fallback need in order to protect a latency SLO?</a:t>
             </a:r>
           </a:p>
         </p:txBody>
@@ -6320,42 +6327,8 @@
         </p:nvSpPr>
         <p:spPr>
           <a:xfrm>
-            <a:off x="2377440" y="2286000"/>
-            <a:ext cx="1097280" cy="1097280"/>
-          </a:xfrm>
-          <a:prstGeom prst="rect">
-            <a:avLst/>
-          </a:prstGeom>
-          <a:noFill/>
-        </p:spPr>
-        <p:txBody>
-          <a:bodyPr wrap="square" lIns="45720" rIns="45720" tIns="27432" bIns="27432" anchor="ctr">
-            <a:spAutoFit/>
-          </a:bodyPr>
-          <a:lstStyle/>
-          <a:p>
-            <a:r>
-              <a:rPr sz="5400" b="1">
-                <a:solidFill>
-                  <a:srgbClr val="00D4AA"/>
-                </a:solidFill>
-                <a:latin typeface="Inter"/>
-              </a:rPr>
-              <a:t>→</a:t>
-            </a:r>
-          </a:p>
-        </p:txBody>
-      </p:sp>
-      <p:sp>
-        <p:nvSpPr>
-          <p:cNvPr id="4" name="TextBox 3"/>
-          <p:cNvSpPr txBox="1"/>
-          <p:nvPr/>
-        </p:nvSpPr>
-        <p:spPr>
-          <a:xfrm>
-            <a:off x="3566160" y="2148840"/>
-            <a:ext cx="7315200" cy="457200"/>
+            <a:off x="457200" y="411480"/>
+            <a:ext cx="11247120" cy="868680"/>
           </a:xfrm>
           <a:prstGeom prst="rect">
             <a:avLst/>
@@ -6368,16 +6341,63 @@
           </a:bodyPr>
           <a:lstStyle/>
           <a:p>
-            <a:r>
-              <a:rPr sz="1400" b="0">
-                <a:solidFill>
-                  <a:srgbClr val="94A3B8"/>
-                </a:solidFill>
-                <a:latin typeface="Inter"/>
-              </a:rPr>
-              <a:t>Next up:</a:t>
-            </a:r>
-          </a:p>
+            <a:pPr>
+              <a:lnSpc>
+                <a:spcPct val="110000"/>
+              </a:lnSpc>
+            </a:pPr>
+            <a:r>
+              <a:rPr sz="2600" b="1">
+                <a:solidFill>
+                  <a:srgbClr val="FFFFFF"/>
+                </a:solidFill>
+                <a:latin typeface="Inter"/>
+              </a:rPr>
+              <a:t>Interview questions 9-10: quality</a:t>
+            </a:r>
+          </a:p>
+        </p:txBody>
+      </p:sp>
+      <p:sp>
+        <p:nvSpPr>
+          <p:cNvPr id="4" name="Rectangle 3"/>
+          <p:cNvSpPr/>
+          <p:nvPr/>
+        </p:nvSpPr>
+        <p:spPr>
+          <a:xfrm>
+            <a:off x="502920" y="1024128"/>
+            <a:ext cx="822960" cy="54864"/>
+          </a:xfrm>
+          <a:prstGeom prst="rect">
+            <a:avLst/>
+          </a:prstGeom>
+          <a:solidFill>
+            <a:srgbClr val="00D4AA"/>
+          </a:solidFill>
+          <a:ln>
+            <a:noFill/>
+          </a:ln>
+          <a:effectLst/>
+        </p:spPr>
+        <p:style>
+          <a:lnRef idx="1">
+            <a:schemeClr val="accent1"/>
+          </a:lnRef>
+          <a:fillRef idx="3">
+            <a:schemeClr val="accent1"/>
+          </a:fillRef>
+          <a:effectRef idx="2">
+            <a:schemeClr val="accent1"/>
+          </a:effectRef>
+          <a:fontRef idx="minor">
+            <a:schemeClr val="lt1"/>
+          </a:fontRef>
+        </p:style>
+        <p:txBody>
+          <a:bodyPr rtlCol="0" anchor="ctr"/>
+          <a:lstStyle/>
+          <a:p/>
         </p:txBody>
       </p:sp>
       <p:sp>
@@ -6388,8 +6408,8 @@
         </p:nvSpPr>
         <p:spPr>
           <a:xfrm>
-            <a:off x="3566160" y="2560320"/>
-            <a:ext cx="7315200" cy="1097280"/>
+            <a:off x="640080" y="1417320"/>
+            <a:ext cx="10881360" cy="4892040"/>
           </a:xfrm>
           <a:prstGeom prst="rect">
             <a:avLst/>
@@ -6402,48 +6422,51 @@
           </a:bodyPr>
           <a:lstStyle/>
           <a:p>
-            <a:r>
-              <a:rPr sz="2600" b="1">
+            <a:pPr marL="292608" indent="-292608">
+              <a:lnSpc>
+                <a:spcPct val="120000"/>
+              </a:lnSpc>
+              <a:spcAft>
+                <a:spcPts val="1539"/>
+              </a:spcAft>
+              <a:buClr>
+                <a:srgbClr val="00D4AA"/>
+              </a:buClr>
+              <a:buFont typeface="Inter"/>
+              <a:buChar char="•"/>
+            </a:pPr>
+            <a:r>
+              <a:rPr sz="2200" b="0">
                 <a:solidFill>
                   <a:srgbClr val="FFFFFF"/>
                 </a:solidFill>
                 <a:latin typeface="Inter"/>
               </a:rPr>
-              <a:t>Final practice test</a:t>
-            </a:r>
-          </a:p>
-        </p:txBody>
-      </p:sp>
-      <p:sp>
-        <p:nvSpPr>
-          <p:cNvPr id="6" name="TextBox 5"/>
-          <p:cNvSpPr txBox="1"/>
-          <p:nvPr/>
-        </p:nvSpPr>
-        <p:spPr>
-          <a:xfrm>
-            <a:off x="3566160" y="3703320"/>
-            <a:ext cx="7315200" cy="1097280"/>
-          </a:xfrm>
-          <a:prstGeom prst="rect">
-            <a:avLst/>
-          </a:prstGeom>
-          <a:noFill/>
-        </p:spPr>
-        <p:txBody>
-          <a:bodyPr wrap="square" lIns="45720" rIns="45720" tIns="27432" bIns="27432" anchor="t">
-            <a:spAutoFit/>
-          </a:bodyPr>
-          <a:lstStyle/>
-          <a:p>
-            <a:r>
-              <a:rPr sz="1400" b="0">
-                <a:solidFill>
-                  <a:srgbClr val="94A3B8"/>
-                </a:solidFill>
-                <a:latin typeface="Inter"/>
-              </a:rPr>
-              <a:t>Next, the forty-question practice test, then one short bonus lecture to finish.</a:t>
+              <a:t>How do you know an agent got worse when latency, errors and cost all look fine?</a:t>
+            </a:r>
+          </a:p>
+          <a:p>
+            <a:pPr marL="292608" indent="-292608">
+              <a:lnSpc>
+                <a:spcPct val="120000"/>
+              </a:lnSpc>
+              <a:spcAft>
+                <a:spcPts val="1539"/>
+              </a:spcAft>
+              <a:buClr>
+                <a:srgbClr val="00D4AA"/>
+              </a:buClr>
+              <a:buFont typeface="Inter"/>
+              <a:buChar char="•"/>
+            </a:pPr>
+            <a:r>
+              <a:rPr sz="2200" b="0">
+                <a:solidFill>
+                  <a:srgbClr val="FFFFFF"/>
+                </a:solidFill>
+                <a:latin typeface="Inter"/>
+              </a:rPr>
+              <a:t>How do you prevent a prompt change from regressing production?</a:t>
             </a:r>
           </a:p>
         </p:txBody>
@@ -6503,7 +6526,7 @@
                 </a:solidFill>
                 <a:latin typeface="Inter"/>
               </a:rPr>
-              <a:t>AI Agent Observability &amp; Cost Control · Section 15 · Lecture 15.3</a:t>
+              <a:t>AI Agent Observability &amp; Cost Control · Section 15 · Lecture 15.2</a:t>
             </a:r>
           </a:p>
         </p:txBody>
@@ -6516,77 +6539,8 @@
         </p:nvSpPr>
         <p:spPr>
           <a:xfrm>
-            <a:off x="6675120" y="320040"/>
-            <a:ext cx="5074920" cy="548640"/>
-          </a:xfrm>
-          <a:prstGeom prst="rect">
-            <a:avLst/>
-          </a:prstGeom>
-          <a:noFill/>
-        </p:spPr>
-        <p:txBody>
-          <a:bodyPr wrap="square" lIns="45720" rIns="45720" tIns="27432" bIns="27432" anchor="t">
-            <a:spAutoFit/>
-          </a:bodyPr>
-          <a:lstStyle/>
-          <a:p>
-            <a:pPr algn="r"/>
-            <a:r>
-              <a:rPr sz="1000" b="0">
-                <a:solidFill>
-                  <a:srgbClr val="94A3B8"/>
-                </a:solidFill>
-                <a:latin typeface="Inter"/>
-              </a:rPr>
-              <a:t>SECTION 15 · WRAP-UP AND CAREERS</a:t>
-            </a:r>
-          </a:p>
-        </p:txBody>
-      </p:sp>
-      <p:sp>
-        <p:nvSpPr>
-          <p:cNvPr id="4" name="TextBox 3"/>
-          <p:cNvSpPr txBox="1"/>
-          <p:nvPr/>
-        </p:nvSpPr>
-        <p:spPr>
-          <a:xfrm>
-            <a:off x="914400" y="1417320"/>
-            <a:ext cx="10332720" cy="457200"/>
-          </a:xfrm>
-          <a:prstGeom prst="rect">
-            <a:avLst/>
-          </a:prstGeom>
-          <a:noFill/>
-        </p:spPr>
-        <p:txBody>
-          <a:bodyPr wrap="square" lIns="45720" rIns="45720" tIns="27432" bIns="27432" anchor="t">
-            <a:spAutoFit/>
-          </a:bodyPr>
-          <a:lstStyle/>
-          <a:p>
-            <a:r>
-              <a:rPr sz="1200" b="1">
-                <a:solidFill>
-                  <a:srgbClr val="00D4AA"/>
-                </a:solidFill>
-                <a:latin typeface="Inter"/>
-              </a:rPr>
-              <a:t>LECTURE 15.3</a:t>
-            </a:r>
-          </a:p>
-        </p:txBody>
-      </p:sp>
-      <p:sp>
-        <p:nvSpPr>
-          <p:cNvPr id="5" name="TextBox 4"/>
-          <p:cNvSpPr txBox="1"/>
-          <p:nvPr/>
-        </p:nvSpPr>
-        <p:spPr>
-          <a:xfrm>
-            <a:off x="914400" y="1874519"/>
-            <a:ext cx="10332720" cy="1645920"/>
+            <a:off x="457200" y="411480"/>
+            <a:ext cx="11247120" cy="868680"/>
           </a:xfrm>
           <a:prstGeom prst="rect">
             <a:avLst/>
@@ -6605,27 +6559,27 @@
               </a:lnSpc>
             </a:pPr>
             <a:r>
-              <a:rPr sz="3000" b="1">
+              <a:rPr sz="2600" b="1">
                 <a:solidFill>
                   <a:srgbClr val="FFFFFF"/>
                 </a:solidFill>
                 <a:latin typeface="Inter"/>
               </a:rPr>
-              <a:t>Final practice test</a:t>
-            </a:r>
-          </a:p>
-        </p:txBody>
-      </p:sp>
-      <p:sp>
-        <p:nvSpPr>
-          <p:cNvPr id="6" name="Rectangle 5"/>
+              <a:t>Interview questions 11-12: operations</a:t>
+            </a:r>
+          </a:p>
+        </p:txBody>
+      </p:sp>
+      <p:sp>
+        <p:nvSpPr>
+          <p:cNvPr id="4" name="Rectangle 3"/>
           <p:cNvSpPr/>
           <p:nvPr/>
         </p:nvSpPr>
         <p:spPr>
           <a:xfrm>
-            <a:off x="914400" y="3794760"/>
-            <a:ext cx="64008" cy="1143000"/>
+            <a:off x="502920" y="1024128"/>
+            <a:ext cx="822960" cy="54864"/>
           </a:xfrm>
           <a:prstGeom prst="rect">
             <a:avLst/>
@@ -6660,14 +6614,14 @@
       </p:sp>
       <p:sp>
         <p:nvSpPr>
-          <p:cNvPr id="7" name="TextBox 6"/>
+          <p:cNvPr id="5" name="TextBox 4"/>
           <p:cNvSpPr txBox="1"/>
           <p:nvPr/>
         </p:nvSpPr>
         <p:spPr>
           <a:xfrm>
-            <a:off x="1188720" y="3749039"/>
-            <a:ext cx="9692640" cy="1280160"/>
+            <a:off x="640080" y="1417320"/>
+            <a:ext cx="10881360" cy="4892040"/>
           </a:xfrm>
           <a:prstGeom prst="rect">
             <a:avLst/>
@@ -6675,24 +6629,56 @@
           <a:noFill/>
         </p:spPr>
         <p:txBody>
-          <a:bodyPr wrap="square" lIns="45720" rIns="45720" tIns="27432" bIns="27432" anchor="ctr">
+          <a:bodyPr wrap="square" lIns="45720" rIns="45720" tIns="27432" bIns="27432" anchor="t">
             <a:spAutoFit/>
           </a:bodyPr>
           <a:lstStyle/>
           <a:p>
-            <a:pPr>
+            <a:pPr marL="292608" indent="-292608">
               <a:lnSpc>
-                <a:spcPct val="130000"/>
+                <a:spcPct val="120000"/>
               </a:lnSpc>
+              <a:spcAft>
+                <a:spcPts val="1539"/>
+              </a:spcAft>
+              <a:buClr>
+                <a:srgbClr val="00D4AA"/>
+              </a:buClr>
+              <a:buFont typeface="Inter"/>
+              <a:buChar char="•"/>
             </a:pPr>
             <a:r>
-              <a:rPr sz="1600" b="0">
-                <a:solidFill>
-                  <a:srgbClr val="CBD5E1"/>
-                </a:solidFill>
-                <a:latin typeface="Inter"/>
-              </a:rPr>
-              <a:t>Check end-to-end understanding across all fifteen sections.</a:t>
+              <a:rPr sz="2200" b="0">
+                <a:solidFill>
+                  <a:srgbClr val="FFFFFF"/>
+                </a:solidFill>
+                <a:latin typeface="Inter"/>
+              </a:rPr>
+              <a:t>What SLIs would you put on a dashboard for an AI agent, and who owns each alert?</a:t>
+            </a:r>
+          </a:p>
+          <a:p>
+            <a:pPr marL="292608" indent="-292608">
+              <a:lnSpc>
+                <a:spcPct val="120000"/>
+              </a:lnSpc>
+              <a:spcAft>
+                <a:spcPts val="1539"/>
+              </a:spcAft>
+              <a:buClr>
+                <a:srgbClr val="00D4AA"/>
+              </a:buClr>
+              <a:buFont typeface="Inter"/>
+              <a:buChar char="•"/>
+            </a:pPr>
+            <a:r>
+              <a:rPr sz="2200" b="0">
+                <a:solidFill>
+                  <a:srgbClr val="FFFFFF"/>
+                </a:solidFill>
+                <a:latin typeface="Inter"/>
+              </a:rPr>
+              <a:t>How do you keep telemetry from taking down the service it observes?</a:t>
             </a:r>
           </a:p>
         </p:txBody>
@@ -6752,7 +6738,7 @@
                 </a:solidFill>
                 <a:latin typeface="Inter"/>
               </a:rPr>
-              <a:t>AI Agent Observability &amp; Cost Control · Section 15 · Lecture 15.3</a:t>
+              <a:t>AI Agent Observability &amp; Cost Control · Section 15 · Lecture 15.2</a:t>
             </a:r>
           </a:p>
         </p:txBody>
@@ -6791,7 +6777,7 @@
                 </a:solidFill>
                 <a:latin typeface="Inter"/>
               </a:rPr>
-              <a:t>Final practice test</a:t>
+              <a:t>Pitching observability to management: the ROI story</a:t>
             </a:r>
           </a:p>
         </p:txBody>
@@ -6880,7 +6866,7 @@
                 </a:solidFill>
                 <a:latin typeface="Inter"/>
               </a:rPr>
-              <a:t>40 questions across all 15 sections</a:t>
+              <a:t>Cost avoided: the incident caught at 10:10 instead of 11:40, in dollars</a:t>
             </a:r>
           </a:p>
           <a:p>
@@ -6904,7 +6890,7 @@
                 </a:solidFill>
                 <a:latin typeface="Inter"/>
               </a:rPr>
-              <a:t>Tracing and conventions, Langfuse, agent patterns, cost, latency, online evals, SLOs, governance, incidents, portability, deployment</a:t>
+              <a:t>Cost saved: the replay comparison, by lever, per month</a:t>
             </a:r>
           </a:p>
           <a:p>
@@ -6928,7 +6914,31 @@
                 </a:solidFill>
                 <a:latin typeface="Inter"/>
               </a:rPr>
-              <a:t>Read every explanation, even for answers you got right</a:t>
+              <a:t>Risk reduced: the pull request that failed; drift caught in an hour</a:t>
+            </a:r>
+          </a:p>
+          <a:p>
+            <a:pPr marL="292608" indent="-292608">
+              <a:lnSpc>
+                <a:spcPct val="120000"/>
+              </a:lnSpc>
+              <a:spcAft>
+                <a:spcPts val="1260"/>
+              </a:spcAft>
+              <a:buClr>
+                <a:srgbClr val="00D4AA"/>
+              </a:buClr>
+              <a:buFont typeface="Inter"/>
+              <a:buChar char="•"/>
+            </a:pPr>
+            <a:r>
+              <a:rPr sz="1800" b="0">
+                <a:solidFill>
+                  <a:srgbClr val="FFFFFF"/>
+                </a:solidFill>
+                <a:latin typeface="Inter"/>
+              </a:rPr>
+              <a:t>Ask: the tool cost, the platform time, the owner, in one sentence</a:t>
             </a:r>
           </a:p>
         </p:txBody>
@@ -6988,7 +6998,7 @@
                 </a:solidFill>
                 <a:latin typeface="Inter"/>
               </a:rPr>
-              <a:t>AI Agent Observability &amp; Cost Control · Section 15 · Lecture 15.3</a:t>
+              <a:t>AI Agent Observability &amp; Cost Control · Section 15 · Lecture 15.2</a:t>
             </a:r>
           </a:p>
         </p:txBody>
@@ -7001,42 +7011,8 @@
         </p:nvSpPr>
         <p:spPr>
           <a:xfrm>
-            <a:off x="2377440" y="2286000"/>
-            <a:ext cx="1097280" cy="1097280"/>
-          </a:xfrm>
-          <a:prstGeom prst="rect">
-            <a:avLst/>
-          </a:prstGeom>
-          <a:noFill/>
-        </p:spPr>
-        <p:txBody>
-          <a:bodyPr wrap="square" lIns="45720" rIns="45720" tIns="27432" bIns="27432" anchor="ctr">
-            <a:spAutoFit/>
-          </a:bodyPr>
-          <a:lstStyle/>
-          <a:p>
-            <a:r>
-              <a:rPr sz="5400" b="1">
-                <a:solidFill>
-                  <a:srgbClr val="00D4AA"/>
-                </a:solidFill>
-                <a:latin typeface="Inter"/>
-              </a:rPr>
-              <a:t>→</a:t>
-            </a:r>
-          </a:p>
-        </p:txBody>
-      </p:sp>
-      <p:sp>
-        <p:nvSpPr>
-          <p:cNvPr id="4" name="TextBox 3"/>
-          <p:cNvSpPr txBox="1"/>
-          <p:nvPr/>
-        </p:nvSpPr>
-        <p:spPr>
-          <a:xfrm>
-            <a:off x="3566160" y="2148840"/>
-            <a:ext cx="7315200" cy="457200"/>
+            <a:off x="457200" y="411480"/>
+            <a:ext cx="11247120" cy="868680"/>
           </a:xfrm>
           <a:prstGeom prst="rect">
             <a:avLst/>
@@ -7049,16 +7025,63 @@
           </a:bodyPr>
           <a:lstStyle/>
           <a:p>
-            <a:r>
-              <a:rPr sz="1400" b="0">
-                <a:solidFill>
-                  <a:srgbClr val="94A3B8"/>
-                </a:solidFill>
-                <a:latin typeface="Inter"/>
-              </a:rPr>
-              <a:t>Next up:</a:t>
-            </a:r>
-          </a:p>
+            <a:pPr>
+              <a:lnSpc>
+                <a:spcPct val="110000"/>
+              </a:lnSpc>
+            </a:pPr>
+            <a:r>
+              <a:rPr sz="2600" b="1">
+                <a:solidFill>
+                  <a:srgbClr val="FFFFFF"/>
+                </a:solidFill>
+                <a:latin typeface="Inter"/>
+              </a:rPr>
+              <a:t>What not to say</a:t>
+            </a:r>
+          </a:p>
+        </p:txBody>
+      </p:sp>
+      <p:sp>
+        <p:nvSpPr>
+          <p:cNvPr id="4" name="Rectangle 3"/>
+          <p:cNvSpPr/>
+          <p:nvPr/>
+        </p:nvSpPr>
+        <p:spPr>
+          <a:xfrm>
+            <a:off x="502920" y="1024128"/>
+            <a:ext cx="822960" cy="54864"/>
+          </a:xfrm>
+          <a:prstGeom prst="rect">
+            <a:avLst/>
+          </a:prstGeom>
+          <a:solidFill>
+            <a:srgbClr val="00D4AA"/>
+          </a:solidFill>
+          <a:ln>
+            <a:noFill/>
+          </a:ln>
+          <a:effectLst/>
+        </p:spPr>
+        <p:style>
+          <a:lnRef idx="1">
+            <a:schemeClr val="accent1"/>
+          </a:lnRef>
+          <a:fillRef idx="3">
+            <a:schemeClr val="accent1"/>
+          </a:fillRef>
+          <a:effectRef idx="2">
+            <a:schemeClr val="accent1"/>
+          </a:effectRef>
+          <a:fontRef idx="minor">
+            <a:schemeClr val="lt1"/>
+          </a:fontRef>
+        </p:style>
+        <p:txBody>
+          <a:bodyPr rtlCol="0" anchor="ctr"/>
+          <a:lstStyle/>
+          <a:p/>
         </p:txBody>
       </p:sp>
       <p:sp>
@@ -7069,8 +7092,8 @@
         </p:nvSpPr>
         <p:spPr>
           <a:xfrm>
-            <a:off x="3566160" y="2560320"/>
-            <a:ext cx="7315200" cy="1097280"/>
+            <a:off x="640080" y="1417320"/>
+            <a:ext cx="10881360" cy="4892040"/>
           </a:xfrm>
           <a:prstGeom prst="rect">
             <a:avLst/>
@@ -7083,48 +7106,99 @@
           </a:bodyPr>
           <a:lstStyle/>
           <a:p>
-            <a:r>
-              <a:rPr sz="2600" b="1">
+            <a:pPr marL="292608" indent="-292608">
+              <a:lnSpc>
+                <a:spcPct val="120000"/>
+              </a:lnSpc>
+              <a:spcAft>
+                <a:spcPts val="1260"/>
+              </a:spcAft>
+              <a:buClr>
+                <a:srgbClr val="00D4AA"/>
+              </a:buClr>
+              <a:buFont typeface="Inter"/>
+              <a:buChar char="•"/>
+            </a:pPr>
+            <a:r>
+              <a:rPr sz="1800" b="0">
                 <a:solidFill>
                   <a:srgbClr val="FFFFFF"/>
                 </a:solidFill>
                 <a:latin typeface="Inter"/>
               </a:rPr>
-              <a:t>Bonus Lecture: keep operating</a:t>
-            </a:r>
-          </a:p>
-        </p:txBody>
-      </p:sp>
-      <p:sp>
-        <p:nvSpPr>
-          <p:cNvPr id="6" name="TextBox 5"/>
-          <p:cNvSpPr txBox="1"/>
-          <p:nvPr/>
-        </p:nvSpPr>
-        <p:spPr>
-          <a:xfrm>
-            <a:off x="3566160" y="3703320"/>
-            <a:ext cx="7315200" cy="1097280"/>
-          </a:xfrm>
-          <a:prstGeom prst="rect">
-            <a:avLst/>
-          </a:prstGeom>
-          <a:noFill/>
-        </p:spPr>
-        <p:txBody>
-          <a:bodyPr wrap="square" lIns="45720" rIns="45720" tIns="27432" bIns="27432" anchor="t">
-            <a:spAutoFit/>
-          </a:bodyPr>
-          <a:lstStyle/>
-          <a:p>
-            <a:r>
-              <a:rPr sz="1400" b="0">
-                <a:solidFill>
-                  <a:srgbClr val="94A3B8"/>
-                </a:solidFill>
-                <a:latin typeface="Inter"/>
-              </a:rPr>
-              <a:t>One more short video to finish the course: the bonus lecture.</a:t>
+              <a:t>Don't claim the incidents were real; say "simulated on a replayed dataset, method is real"</a:t>
+            </a:r>
+          </a:p>
+          <a:p>
+            <a:pPr marL="292608" indent="-292608">
+              <a:lnSpc>
+                <a:spcPct val="120000"/>
+              </a:lnSpc>
+              <a:spcAft>
+                <a:spcPts val="1260"/>
+              </a:spcAft>
+              <a:buClr>
+                <a:srgbClr val="00D4AA"/>
+              </a:buClr>
+              <a:buFont typeface="Inter"/>
+              <a:buChar char="•"/>
+            </a:pPr>
+            <a:r>
+              <a:rPr sz="1800" b="0">
+                <a:solidFill>
+                  <a:srgbClr val="FFFFFF"/>
+                </a:solidFill>
+                <a:latin typeface="Inter"/>
+              </a:rPr>
+              <a:t>Don't compare vendors by feature list; compare by control, cost, compliance, lock-in</a:t>
+            </a:r>
+          </a:p>
+          <a:p>
+            <a:pPr marL="292608" indent="-292608">
+              <a:lnSpc>
+                <a:spcPct val="120000"/>
+              </a:lnSpc>
+              <a:spcAft>
+                <a:spcPts val="1260"/>
+              </a:spcAft>
+              <a:buClr>
+                <a:srgbClr val="00D4AA"/>
+              </a:buClr>
+              <a:buFont typeface="Inter"/>
+              <a:buChar char="•"/>
+            </a:pPr>
+            <a:r>
+              <a:rPr sz="1800" b="0">
+                <a:solidFill>
+                  <a:srgbClr val="FFFFFF"/>
+                </a:solidFill>
+                <a:latin typeface="Inter"/>
+              </a:rPr>
+              <a:t>Don't quote a cost saving without the baseline and the method</a:t>
+            </a:r>
+          </a:p>
+          <a:p>
+            <a:pPr marL="292608" indent="-292608">
+              <a:lnSpc>
+                <a:spcPct val="120000"/>
+              </a:lnSpc>
+              <a:spcAft>
+                <a:spcPts val="1260"/>
+              </a:spcAft>
+              <a:buClr>
+                <a:srgbClr val="00D4AA"/>
+              </a:buClr>
+              <a:buFont typeface="Inter"/>
+              <a:buChar char="•"/>
+            </a:pPr>
+            <a:r>
+              <a:rPr sz="1800" b="0">
+                <a:solidFill>
+                  <a:srgbClr val="FFFFFF"/>
+                </a:solidFill>
+                <a:latin typeface="Inter"/>
+              </a:rPr>
+              <a:t>Don't promise 100% trace retention; talk about sampling policy</a:t>
             </a:r>
           </a:p>
         </p:txBody>
@@ -7184,7 +7258,7 @@
                 </a:solidFill>
                 <a:latin typeface="Inter"/>
               </a:rPr>
-              <a:t>AI Agent Observability &amp; Cost Control · Section 15 · Lecture 15.4</a:t>
+              <a:t>AI Agent Observability &amp; Cost Control · Section 15 · Lecture 15.2</a:t>
             </a:r>
           </a:p>
         </p:txBody>
@@ -7197,8 +7271,8 @@
         </p:nvSpPr>
         <p:spPr>
           <a:xfrm>
-            <a:off x="6675120" y="320040"/>
-            <a:ext cx="5074920" cy="548640"/>
+            <a:off x="1371600" y="822960"/>
+            <a:ext cx="9418320" cy="457200"/>
           </a:xfrm>
           <a:prstGeom prst="rect">
             <a:avLst/>
@@ -7211,15 +7285,15 @@
           </a:bodyPr>
           <a:lstStyle/>
           <a:p>
-            <a:pPr algn="r"/>
-            <a:r>
-              <a:rPr sz="1000" b="0">
-                <a:solidFill>
-                  <a:srgbClr val="94A3B8"/>
-                </a:solidFill>
-                <a:latin typeface="Inter"/>
-              </a:rPr>
-              <a:t>SECTION 15 · WRAP-UP AND CAREERS</a:t>
+            <a:pPr algn="ctr"/>
+            <a:r>
+              <a:rPr sz="1200" b="1">
+                <a:solidFill>
+                  <a:srgbClr val="00D4AA"/>
+                </a:solidFill>
+                <a:latin typeface="Inter"/>
+              </a:rPr>
+              <a:t>RECAP</a:t>
             </a:r>
           </a:p>
         </p:txBody>
@@ -7232,8 +7306,8 @@
         </p:nvSpPr>
         <p:spPr>
           <a:xfrm>
-            <a:off x="914400" y="1417320"/>
-            <a:ext cx="10332720" cy="457200"/>
+            <a:off x="1371600" y="1234440"/>
+            <a:ext cx="9418320" cy="822960"/>
           </a:xfrm>
           <a:prstGeom prst="rect">
             <a:avLst/>
@@ -7246,73 +7320,37 @@
           </a:bodyPr>
           <a:lstStyle/>
           <a:p>
-            <a:r>
-              <a:rPr sz="1200" b="1">
-                <a:solidFill>
-                  <a:srgbClr val="00D4AA"/>
-                </a:solidFill>
-                <a:latin typeface="Inter"/>
-              </a:rPr>
-              <a:t>LECTURE 15.4</a:t>
-            </a:r>
-          </a:p>
-        </p:txBody>
-      </p:sp>
-      <p:sp>
-        <p:nvSpPr>
-          <p:cNvPr id="5" name="TextBox 4"/>
-          <p:cNvSpPr txBox="1"/>
-          <p:nvPr/>
-        </p:nvSpPr>
-        <p:spPr>
-          <a:xfrm>
-            <a:off x="914400" y="1874519"/>
-            <a:ext cx="10332720" cy="1645920"/>
-          </a:xfrm>
-          <a:prstGeom prst="rect">
-            <a:avLst/>
-          </a:prstGeom>
-          <a:noFill/>
-        </p:spPr>
-        <p:txBody>
-          <a:bodyPr wrap="square" lIns="45720" rIns="45720" tIns="27432" bIns="27432" anchor="t">
-            <a:spAutoFit/>
-          </a:bodyPr>
-          <a:lstStyle/>
-          <a:p>
-            <a:pPr>
-              <a:lnSpc>
-                <a:spcPct val="110000"/>
-              </a:lnSpc>
-            </a:pPr>
-            <a:r>
-              <a:rPr sz="3000" b="1">
+            <a:pPr algn="ctr"/>
+            <a:r>
+              <a:rPr sz="2600" b="1">
                 <a:solidFill>
                   <a:srgbClr val="FFFFFF"/>
                 </a:solidFill>
                 <a:latin typeface="Inter"/>
               </a:rPr>
-              <a:t>Bonus Lecture: keep operating</a:t>
-            </a:r>
-          </a:p>
-        </p:txBody>
-      </p:sp>
-      <p:sp>
-        <p:nvSpPr>
-          <p:cNvPr id="6" name="Rectangle 5"/>
+              <a:t>Key takeaways</a:t>
+            </a:r>
+          </a:p>
+        </p:txBody>
+      </p:sp>
+      <p:sp>
+        <p:nvSpPr>
+          <p:cNvPr id="5" name="Rounded Rectangle 4"/>
           <p:cNvSpPr/>
           <p:nvPr/>
         </p:nvSpPr>
         <p:spPr>
           <a:xfrm>
-            <a:off x="914400" y="3794760"/>
-            <a:ext cx="64008" cy="1143000"/>
-          </a:xfrm>
-          <a:prstGeom prst="rect">
-            <a:avLst/>
+            <a:off x="2011680" y="2514600"/>
+            <a:ext cx="8138160" cy="777240"/>
+          </a:xfrm>
+          <a:prstGeom prst="roundRect">
+            <a:avLst>
+              <a:gd name="adj" fmla="val 6588"/>
+            </a:avLst>
           </a:prstGeom>
           <a:solidFill>
-            <a:srgbClr val="00D4AA"/>
+            <a:srgbClr val="1A2742"/>
           </a:solidFill>
           <a:ln>
             <a:noFill/>
@@ -7341,14 +7379,14 @@
       </p:sp>
       <p:sp>
         <p:nvSpPr>
-          <p:cNvPr id="7" name="TextBox 6"/>
+          <p:cNvPr id="6" name="TextBox 5"/>
           <p:cNvSpPr txBox="1"/>
           <p:nvPr/>
         </p:nvSpPr>
         <p:spPr>
           <a:xfrm>
-            <a:off x="1188720" y="3749039"/>
-            <a:ext cx="9692640" cy="1280160"/>
+            <a:off x="2194560" y="2514600"/>
+            <a:ext cx="548640" cy="777240"/>
           </a:xfrm>
           <a:prstGeom prst="rect">
             <a:avLst/>
@@ -7361,19 +7399,272 @@
           </a:bodyPr>
           <a:lstStyle/>
           <a:p>
-            <a:pPr>
-              <a:lnSpc>
-                <a:spcPct val="130000"/>
-              </a:lnSpc>
-            </a:pPr>
-            <a:r>
-              <a:rPr sz="1600" b="0">
-                <a:solidFill>
-                  <a:srgbClr val="CBD5E1"/>
-                </a:solidFill>
-                <a:latin typeface="Inter"/>
-              </a:rPr>
-              <a:t>Know where to get help and updates after the course: the Q&amp;A, the repo README and announcements.</a:t>
+            <a:r>
+              <a:rPr sz="2200" b="1">
+                <a:solidFill>
+                  <a:srgbClr val="00D4AA"/>
+                </a:solidFill>
+                <a:latin typeface="Inter"/>
+              </a:rPr>
+              <a:t>✓</a:t>
+            </a:r>
+          </a:p>
+        </p:txBody>
+      </p:sp>
+      <p:sp>
+        <p:nvSpPr>
+          <p:cNvPr id="7" name="TextBox 6"/>
+          <p:cNvSpPr txBox="1"/>
+          <p:nvPr/>
+        </p:nvSpPr>
+        <p:spPr>
+          <a:xfrm>
+            <a:off x="2788920" y="2514600"/>
+            <a:ext cx="7223760" cy="777240"/>
+          </a:xfrm>
+          <a:prstGeom prst="rect">
+            <a:avLst/>
+          </a:prstGeom>
+          <a:noFill/>
+        </p:spPr>
+        <p:txBody>
+          <a:bodyPr wrap="square" lIns="45720" rIns="45720" tIns="27432" bIns="27432" anchor="ctr">
+            <a:spAutoFit/>
+          </a:bodyPr>
+          <a:lstStyle/>
+          <a:p>
+            <a:r>
+              <a:rPr sz="1800" b="1">
+                <a:solidFill>
+                  <a:srgbClr val="FFFFFF"/>
+                </a:solidFill>
+                <a:latin typeface="Inter"/>
+              </a:rPr>
+              <a:t>Read descriptions, not job titles</a:t>
+            </a:r>
+          </a:p>
+        </p:txBody>
+      </p:sp>
+      <p:sp>
+        <p:nvSpPr>
+          <p:cNvPr id="8" name="Rounded Rectangle 7"/>
+          <p:cNvSpPr/>
+          <p:nvPr/>
+        </p:nvSpPr>
+        <p:spPr>
+          <a:xfrm>
+            <a:off x="2011680" y="3474720"/>
+            <a:ext cx="8138160" cy="777240"/>
+          </a:xfrm>
+          <a:prstGeom prst="roundRect">
+            <a:avLst>
+              <a:gd name="adj" fmla="val 6588"/>
+            </a:avLst>
+          </a:prstGeom>
+          <a:solidFill>
+            <a:srgbClr val="1A2742"/>
+          </a:solidFill>
+          <a:ln>
+            <a:noFill/>
+          </a:ln>
+          <a:effectLst/>
+        </p:spPr>
+        <p:style>
+          <a:lnRef idx="1">
+            <a:schemeClr val="accent1"/>
+          </a:lnRef>
+          <a:fillRef idx="3">
+            <a:schemeClr val="accent1"/>
+          </a:fillRef>
+          <a:effectRef idx="2">
+            <a:schemeClr val="accent1"/>
+          </a:effectRef>
+          <a:fontRef idx="minor">
+            <a:schemeClr val="lt1"/>
+          </a:fontRef>
+        </p:style>
+        <p:txBody>
+          <a:bodyPr rtlCol="0" anchor="ctr"/>
+          <a:lstStyle/>
+          <a:p/>
+        </p:txBody>
+      </p:sp>
+      <p:sp>
+        <p:nvSpPr>
+          <p:cNvPr id="9" name="TextBox 8"/>
+          <p:cNvSpPr txBox="1"/>
+          <p:nvPr/>
+        </p:nvSpPr>
+        <p:spPr>
+          <a:xfrm>
+            <a:off x="2194560" y="3474720"/>
+            <a:ext cx="548640" cy="777240"/>
+          </a:xfrm>
+          <a:prstGeom prst="rect">
+            <a:avLst/>
+          </a:prstGeom>
+          <a:noFill/>
+        </p:spPr>
+        <p:txBody>
+          <a:bodyPr wrap="square" lIns="45720" rIns="45720" tIns="27432" bIns="27432" anchor="ctr">
+            <a:spAutoFit/>
+          </a:bodyPr>
+          <a:lstStyle/>
+          <a:p>
+            <a:r>
+              <a:rPr sz="2200" b="1">
+                <a:solidFill>
+                  <a:srgbClr val="00D4AA"/>
+                </a:solidFill>
+                <a:latin typeface="Inter"/>
+              </a:rPr>
+              <a:t>✓</a:t>
+            </a:r>
+          </a:p>
+        </p:txBody>
+      </p:sp>
+      <p:sp>
+        <p:nvSpPr>
+          <p:cNvPr id="10" name="TextBox 9"/>
+          <p:cNvSpPr txBox="1"/>
+          <p:nvPr/>
+        </p:nvSpPr>
+        <p:spPr>
+          <a:xfrm>
+            <a:off x="2788920" y="3474720"/>
+            <a:ext cx="7223760" cy="777240"/>
+          </a:xfrm>
+          <a:prstGeom prst="rect">
+            <a:avLst/>
+          </a:prstGeom>
+          <a:noFill/>
+        </p:spPr>
+        <p:txBody>
+          <a:bodyPr wrap="square" lIns="45720" rIns="45720" tIns="27432" bIns="27432" anchor="ctr">
+            <a:spAutoFit/>
+          </a:bodyPr>
+          <a:lstStyle/>
+          <a:p>
+            <a:r>
+              <a:rPr sz="1800" b="1">
+                <a:solidFill>
+                  <a:srgbClr val="FFFFFF"/>
+                </a:solidFill>
+                <a:latin typeface="Inter"/>
+              </a:rPr>
+              <a:t>Answer with a mechanism and a number</a:t>
+            </a:r>
+          </a:p>
+        </p:txBody>
+      </p:sp>
+      <p:sp>
+        <p:nvSpPr>
+          <p:cNvPr id="11" name="Rounded Rectangle 10"/>
+          <p:cNvSpPr/>
+          <p:nvPr/>
+        </p:nvSpPr>
+        <p:spPr>
+          <a:xfrm>
+            <a:off x="2011680" y="4434840"/>
+            <a:ext cx="8138160" cy="777240"/>
+          </a:xfrm>
+          <a:prstGeom prst="roundRect">
+            <a:avLst>
+              <a:gd name="adj" fmla="val 6588"/>
+            </a:avLst>
+          </a:prstGeom>
+          <a:solidFill>
+            <a:srgbClr val="1A2742"/>
+          </a:solidFill>
+          <a:ln>
+            <a:noFill/>
+          </a:ln>
+          <a:effectLst/>
+        </p:spPr>
+        <p:style>
+          <a:lnRef idx="1">
+            <a:schemeClr val="accent1"/>
+          </a:lnRef>
+          <a:fillRef idx="3">
+            <a:schemeClr val="accent1"/>
+          </a:fillRef>
+          <a:effectRef idx="2">
+            <a:schemeClr val="accent1"/>
+          </a:effectRef>
+          <a:fontRef idx="minor">
+            <a:schemeClr val="lt1"/>
+          </a:fontRef>
+        </p:style>
+        <p:txBody>
+          <a:bodyPr rtlCol="0" anchor="ctr"/>
+          <a:lstStyle/>
+          <a:p/>
+        </p:txBody>
+      </p:sp>
+      <p:sp>
+        <p:nvSpPr>
+          <p:cNvPr id="12" name="TextBox 11"/>
+          <p:cNvSpPr txBox="1"/>
+          <p:nvPr/>
+        </p:nvSpPr>
+        <p:spPr>
+          <a:xfrm>
+            <a:off x="2194560" y="4434840"/>
+            <a:ext cx="548640" cy="777240"/>
+          </a:xfrm>
+          <a:prstGeom prst="rect">
+            <a:avLst/>
+          </a:prstGeom>
+          <a:noFill/>
+        </p:spPr>
+        <p:txBody>
+          <a:bodyPr wrap="square" lIns="45720" rIns="45720" tIns="27432" bIns="27432" anchor="ctr">
+            <a:spAutoFit/>
+          </a:bodyPr>
+          <a:lstStyle/>
+          <a:p>
+            <a:r>
+              <a:rPr sz="2200" b="1">
+                <a:solidFill>
+                  <a:srgbClr val="00D4AA"/>
+                </a:solidFill>
+                <a:latin typeface="Inter"/>
+              </a:rPr>
+              <a:t>✓</a:t>
+            </a:r>
+          </a:p>
+        </p:txBody>
+      </p:sp>
+      <p:sp>
+        <p:nvSpPr>
+          <p:cNvPr id="13" name="TextBox 12"/>
+          <p:cNvSpPr txBox="1"/>
+          <p:nvPr/>
+        </p:nvSpPr>
+        <p:spPr>
+          <a:xfrm>
+            <a:off x="2788920" y="4434840"/>
+            <a:ext cx="7223760" cy="777240"/>
+          </a:xfrm>
+          <a:prstGeom prst="rect">
+            <a:avLst/>
+          </a:prstGeom>
+          <a:noFill/>
+        </p:spPr>
+        <p:txBody>
+          <a:bodyPr wrap="square" lIns="45720" rIns="45720" tIns="27432" bIns="27432" anchor="ctr">
+            <a:spAutoFit/>
+          </a:bodyPr>
+          <a:lstStyle/>
+          <a:p>
+            <a:r>
+              <a:rPr sz="1800" b="1">
+                <a:solidFill>
+                  <a:srgbClr val="FFFFFF"/>
+                </a:solidFill>
+                <a:latin typeface="Inter"/>
+              </a:rPr>
+              <a:t>Pitch: three numbers and one sentence</a:t>
             </a:r>
           </a:p>
         </p:txBody>
@@ -7433,7 +7724,7 @@
                 </a:solidFill>
                 <a:latin typeface="Inter"/>
               </a:rPr>
-              <a:t>AI Agent Observability &amp; Cost Control · Section 15 · Lecture 15.4</a:t>
+              <a:t>AI Agent Observability &amp; Cost Control · Section 15 · Lecture 15.2</a:t>
             </a:r>
           </a:p>
         </p:txBody>
@@ -7446,8 +7737,42 @@
         </p:nvSpPr>
         <p:spPr>
           <a:xfrm>
-            <a:off x="457200" y="411480"/>
-            <a:ext cx="11247120" cy="868680"/>
+            <a:off x="2377440" y="2286000"/>
+            <a:ext cx="1097280" cy="1097280"/>
+          </a:xfrm>
+          <a:prstGeom prst="rect">
+            <a:avLst/>
+          </a:prstGeom>
+          <a:noFill/>
+        </p:spPr>
+        <p:txBody>
+          <a:bodyPr wrap="square" lIns="45720" rIns="45720" tIns="27432" bIns="27432" anchor="ctr">
+            <a:spAutoFit/>
+          </a:bodyPr>
+          <a:lstStyle/>
+          <a:p>
+            <a:r>
+              <a:rPr sz="5400" b="1">
+                <a:solidFill>
+                  <a:srgbClr val="00D4AA"/>
+                </a:solidFill>
+                <a:latin typeface="Inter"/>
+              </a:rPr>
+              <a:t>→</a:t>
+            </a:r>
+          </a:p>
+        </p:txBody>
+      </p:sp>
+      <p:sp>
+        <p:nvSpPr>
+          <p:cNvPr id="4" name="TextBox 3"/>
+          <p:cNvSpPr txBox="1"/>
+          <p:nvPr/>
+        </p:nvSpPr>
+        <p:spPr>
+          <a:xfrm>
+            <a:off x="3566160" y="2148840"/>
+            <a:ext cx="7315200" cy="457200"/>
           </a:xfrm>
           <a:prstGeom prst="rect">
             <a:avLst/>
@@ -7460,63 +7785,16 @@
           </a:bodyPr>
           <a:lstStyle/>
           <a:p>
-            <a:pPr>
-              <a:lnSpc>
-                <a:spcPct val="110000"/>
-              </a:lnSpc>
-            </a:pPr>
-            <a:r>
-              <a:rPr sz="2600" b="1">
-                <a:solidFill>
-                  <a:srgbClr val="FFFFFF"/>
-                </a:solidFill>
-                <a:latin typeface="Inter"/>
-              </a:rPr>
-              <a:t>Keeping your project current</a:t>
-            </a:r>
-          </a:p>
-        </p:txBody>
-      </p:sp>
-      <p:sp>
-        <p:nvSpPr>
-          <p:cNvPr id="4" name="Rectangle 3"/>
-          <p:cNvSpPr/>
-          <p:nvPr/>
-        </p:nvSpPr>
-        <p:spPr>
-          <a:xfrm>
-            <a:off x="502920" y="1024128"/>
-            <a:ext cx="822960" cy="54864"/>
-          </a:xfrm>
-          <a:prstGeom prst="rect">
-            <a:avLst/>
-          </a:prstGeom>
-          <a:solidFill>
-            <a:srgbClr val="00D4AA"/>
-          </a:solidFill>
-          <a:ln>
-            <a:noFill/>
-          </a:ln>
-          <a:effectLst/>
-        </p:spPr>
-        <p:style>
-          <a:lnRef idx="1">
-            <a:schemeClr val="accent1"/>
-          </a:lnRef>
-          <a:fillRef idx="3">
-            <a:schemeClr val="accent1"/>
-          </a:fillRef>
-          <a:effectRef idx="2">
-            <a:schemeClr val="accent1"/>
-          </a:effectRef>
-          <a:fontRef idx="minor">
-            <a:schemeClr val="lt1"/>
-          </a:fontRef>
-        </p:style>
-        <p:txBody>
-          <a:bodyPr rtlCol="0" anchor="ctr"/>
-          <a:lstStyle/>
-          <a:p/>
+            <a:r>
+              <a:rPr sz="1400" b="0">
+                <a:solidFill>
+                  <a:srgbClr val="94A3B8"/>
+                </a:solidFill>
+                <a:latin typeface="Inter"/>
+              </a:rPr>
+              <a:t>Next up:</a:t>
+            </a:r>
+          </a:p>
         </p:txBody>
       </p:sp>
       <p:sp>
@@ -7527,8 +7805,8 @@
         </p:nvSpPr>
         <p:spPr>
           <a:xfrm>
-            <a:off x="640080" y="1417320"/>
-            <a:ext cx="10881360" cy="4892040"/>
+            <a:off x="3566160" y="2560320"/>
+            <a:ext cx="7315200" cy="1097280"/>
           </a:xfrm>
           <a:prstGeom prst="rect">
             <a:avLst/>
@@ -7541,99 +7819,48 @@
           </a:bodyPr>
           <a:lstStyle/>
           <a:p>
-            <a:pPr marL="292608" indent="-292608">
-              <a:lnSpc>
-                <a:spcPct val="120000"/>
-              </a:lnSpc>
-              <a:spcAft>
-                <a:spcPts val="1260"/>
-              </a:spcAft>
-              <a:buClr>
-                <a:srgbClr val="00D4AA"/>
-              </a:buClr>
-              <a:buFont typeface="Inter"/>
-              <a:buChar char="•"/>
-            </a:pPr>
-            <a:r>
-              <a:rPr sz="1800" b="0">
+            <a:r>
+              <a:rPr sz="2600" b="1">
                 <a:solidFill>
                   <a:srgbClr val="FFFFFF"/>
                 </a:solidFill>
                 <a:latin typeface="Inter"/>
               </a:rPr>
-              <a:t>Observability libraries release often; the GenAI conventions are still incubating</a:t>
-            </a:r>
-          </a:p>
-          <a:p>
-            <a:pPr marL="292608" indent="-292608">
-              <a:lnSpc>
-                <a:spcPct val="120000"/>
-              </a:lnSpc>
-              <a:spcAft>
-                <a:spcPts val="1260"/>
-              </a:spcAft>
-              <a:buClr>
-                <a:srgbClr val="00D4AA"/>
-              </a:buClr>
-              <a:buFont typeface="Inter"/>
-              <a:buChar char="•"/>
-            </a:pPr>
-            <a:r>
-              <a:rPr sz="1800" b="0">
-                <a:solidFill>
-                  <a:srgbClr val="FFFFFF"/>
-                </a:solidFill>
-                <a:latin typeface="Inter"/>
-              </a:rPr>
-              <a:t>The repo README lists the tested versions: langfuse 4.15, opentelemetry-sdk 1.45, semconv 0.66, langsmith 0.14</a:t>
-            </a:r>
-          </a:p>
-          <a:p>
-            <a:pPr marL="292608" indent="-292608">
-              <a:lnSpc>
-                <a:spcPct val="120000"/>
-              </a:lnSpc>
-              <a:spcAft>
-                <a:spcPts val="1260"/>
-              </a:spcAft>
-              <a:buClr>
-                <a:srgbClr val="00D4AA"/>
-              </a:buClr>
-              <a:buFont typeface="Inter"/>
-              <a:buChar char="•"/>
-            </a:pPr>
-            <a:r>
-              <a:rPr sz="1800" b="0">
-                <a:solidFill>
-                  <a:srgbClr val="FFFFFF"/>
-                </a:solidFill>
-                <a:latin typeface="Inter"/>
-              </a:rPr>
-              <a:t>Course announcements flag breaking changes</a:t>
-            </a:r>
-          </a:p>
-          <a:p>
-            <a:pPr marL="292608" indent="-292608">
-              <a:lnSpc>
-                <a:spcPct val="120000"/>
-              </a:lnSpc>
-              <a:spcAft>
-                <a:spcPts val="1260"/>
-              </a:spcAft>
-              <a:buClr>
-                <a:srgbClr val="00D4AA"/>
-              </a:buClr>
-              <a:buFont typeface="Inter"/>
-              <a:buChar char="•"/>
-            </a:pPr>
-            <a:r>
-              <a:rPr sz="1800" b="0">
-                <a:solidFill>
-                  <a:srgbClr val="FFFFFF"/>
-                </a:solidFill>
-                <a:latin typeface="Inter"/>
-              </a:rPr>
-              <a:t>Pin your versions; upgrade on a branch with the budget gate running</a:t>
+              <a:t>Final practice test</a:t>
+            </a:r>
+          </a:p>
+        </p:txBody>
+      </p:sp>
+      <p:sp>
+        <p:nvSpPr>
+          <p:cNvPr id="6" name="TextBox 5"/>
+          <p:cNvSpPr txBox="1"/>
+          <p:nvPr/>
+        </p:nvSpPr>
+        <p:spPr>
+          <a:xfrm>
+            <a:off x="3566160" y="3703320"/>
+            <a:ext cx="7315200" cy="1097280"/>
+          </a:xfrm>
+          <a:prstGeom prst="rect">
+            <a:avLst/>
+          </a:prstGeom>
+          <a:noFill/>
+        </p:spPr>
+        <p:txBody>
+          <a:bodyPr wrap="square" lIns="45720" rIns="45720" tIns="27432" bIns="27432" anchor="t">
+            <a:spAutoFit/>
+          </a:bodyPr>
+          <a:lstStyle/>
+          <a:p>
+            <a:r>
+              <a:rPr sz="1400" b="0">
+                <a:solidFill>
+                  <a:srgbClr val="94A3B8"/>
+                </a:solidFill>
+                <a:latin typeface="Inter"/>
+              </a:rPr>
+              <a:t>Next, the forty-question practice test, then one short bonus lecture to finish.</a:t>
             </a:r>
           </a:p>
         </p:txBody>
@@ -7821,7 +8048,7 @@
                 </a:solidFill>
                 <a:latin typeface="Inter"/>
               </a:rPr>
-              <a:t>Traces: OpenTelemetry spans with GenAI semantic conventions for every model, tool, retriever and agent; sessions, users, tenants, releases; masked</a:t>
+              <a:t>Traces: GenAI-convention spans for every model, tool, retriever and agent; sessions, tenants, releases; masked</a:t>
             </a:r>
           </a:p>
           <a:p>
@@ -7845,7 +8072,7 @@
                 </a:solidFill>
                 <a:latin typeface="Inter"/>
               </a:rPr>
-              <a:t>Cost: true cost per request, session, user, tenant and feature; a showback report finance accepts; 40%+ saved with caching, a context diet and routing; budgets per tenant</a:t>
+              <a:t>Cost: cost per request, session, tenant and feature; showback; 66% cut on a replayed day</a:t>
             </a:r>
           </a:p>
           <a:p>
@@ -7869,7 +8096,7 @@
                 </a:solidFill>
                 <a:latin typeface="Inter"/>
               </a:rPr>
-              <a:t>Reliability: TTFT and p95 measured; timeouts, bounded retries, fallbacks that fire on slowness; p95 held under chaos</a:t>
+              <a:t>Reliability: TTFT and p95 measured; timeouts, bounded retries, fallbacks, breakers</a:t>
             </a:r>
           </a:p>
           <a:p>
@@ -7893,7 +8120,7 @@
                 </a:solidFill>
                 <a:latin typeface="Inter"/>
               </a:rPr>
-              <a:t>Quality in production: sampled judge, feedback, drift detection, failures promoted to a regression suite</a:t>
+              <a:t>Quality in production: sampled judge, feedback, drift, failures promoted to a dataset</a:t>
             </a:r>
           </a:p>
           <a:p>
@@ -7917,7 +8144,7 @@
                 </a:solidFill>
                 <a:latin typeface="Inter"/>
               </a:rPr>
-              <a:t>Operations: SLIs and SLOs, dashboards and alerts as code with owners, incidents investigated from traces, postmortems, a self-hosted stack, a CI budget gate, a weekly report</a:t>
+              <a:t>Operations: SLOs, dashboards and alerts as code, incidents from traces, a CI gate, a weekly report</a:t>
             </a:r>
           </a:p>
         </p:txBody>
@@ -7977,7 +8204,7 @@
                 </a:solidFill>
                 <a:latin typeface="Inter"/>
               </a:rPr>
-              <a:t>AI Agent Observability &amp; Cost Control · Section 15 · Lecture 15.4</a:t>
+              <a:t>AI Agent Observability &amp; Cost Control · Section 15 · Lecture 15.3</a:t>
             </a:r>
           </a:p>
         </p:txBody>
@@ -7990,8 +8217,77 @@
         </p:nvSpPr>
         <p:spPr>
           <a:xfrm>
-            <a:off x="457200" y="411480"/>
-            <a:ext cx="11247120" cy="868680"/>
+            <a:off x="6675120" y="320040"/>
+            <a:ext cx="5074920" cy="548640"/>
+          </a:xfrm>
+          <a:prstGeom prst="rect">
+            <a:avLst/>
+          </a:prstGeom>
+          <a:noFill/>
+        </p:spPr>
+        <p:txBody>
+          <a:bodyPr wrap="square" lIns="45720" rIns="45720" tIns="27432" bIns="27432" anchor="t">
+            <a:spAutoFit/>
+          </a:bodyPr>
+          <a:lstStyle/>
+          <a:p>
+            <a:pPr algn="r"/>
+            <a:r>
+              <a:rPr sz="1000" b="0">
+                <a:solidFill>
+                  <a:srgbClr val="94A3B8"/>
+                </a:solidFill>
+                <a:latin typeface="Inter"/>
+              </a:rPr>
+              <a:t>SECTION 15 · WRAP-UP AND CAREERS</a:t>
+            </a:r>
+          </a:p>
+        </p:txBody>
+      </p:sp>
+      <p:sp>
+        <p:nvSpPr>
+          <p:cNvPr id="4" name="TextBox 3"/>
+          <p:cNvSpPr txBox="1"/>
+          <p:nvPr/>
+        </p:nvSpPr>
+        <p:spPr>
+          <a:xfrm>
+            <a:off x="914400" y="1417320"/>
+            <a:ext cx="10332720" cy="457200"/>
+          </a:xfrm>
+          <a:prstGeom prst="rect">
+            <a:avLst/>
+          </a:prstGeom>
+          <a:noFill/>
+        </p:spPr>
+        <p:txBody>
+          <a:bodyPr wrap="square" lIns="45720" rIns="45720" tIns="27432" bIns="27432" anchor="t">
+            <a:spAutoFit/>
+          </a:bodyPr>
+          <a:lstStyle/>
+          <a:p>
+            <a:r>
+              <a:rPr sz="1200" b="1">
+                <a:solidFill>
+                  <a:srgbClr val="00D4AA"/>
+                </a:solidFill>
+                <a:latin typeface="Inter"/>
+              </a:rPr>
+              <a:t>LECTURE 15.3</a:t>
+            </a:r>
+          </a:p>
+        </p:txBody>
+      </p:sp>
+      <p:sp>
+        <p:nvSpPr>
+          <p:cNvPr id="5" name="TextBox 4"/>
+          <p:cNvSpPr txBox="1"/>
+          <p:nvPr/>
+        </p:nvSpPr>
+        <p:spPr>
+          <a:xfrm>
+            <a:off x="914400" y="1874519"/>
+            <a:ext cx="10332720" cy="1645920"/>
           </a:xfrm>
           <a:prstGeom prst="rect">
             <a:avLst/>
@@ -8010,27 +8306,27 @@
               </a:lnSpc>
             </a:pPr>
             <a:r>
-              <a:rPr sz="2600" b="1">
+              <a:rPr sz="3000" b="1">
                 <a:solidFill>
                   <a:srgbClr val="FFFFFF"/>
                 </a:solidFill>
                 <a:latin typeface="Inter"/>
               </a:rPr>
-              <a:t>Getting help</a:t>
-            </a:r>
-          </a:p>
-        </p:txBody>
-      </p:sp>
-      <p:sp>
-        <p:nvSpPr>
-          <p:cNvPr id="4" name="Rectangle 3"/>
+              <a:t>Final practice test</a:t>
+            </a:r>
+          </a:p>
+        </p:txBody>
+      </p:sp>
+      <p:sp>
+        <p:nvSpPr>
+          <p:cNvPr id="6" name="Rectangle 5"/>
           <p:cNvSpPr/>
           <p:nvPr/>
         </p:nvSpPr>
         <p:spPr>
           <a:xfrm>
-            <a:off x="502920" y="1024128"/>
-            <a:ext cx="822960" cy="54864"/>
+            <a:off x="914400" y="3794760"/>
+            <a:ext cx="64008" cy="1143000"/>
           </a:xfrm>
           <a:prstGeom prst="rect">
             <a:avLst/>
@@ -8065,14 +8361,14 @@
       </p:sp>
       <p:sp>
         <p:nvSpPr>
-          <p:cNvPr id="5" name="TextBox 4"/>
+          <p:cNvPr id="7" name="TextBox 6"/>
           <p:cNvSpPr txBox="1"/>
           <p:nvPr/>
         </p:nvSpPr>
         <p:spPr>
           <a:xfrm>
-            <a:off x="640080" y="1417320"/>
-            <a:ext cx="10881360" cy="4892040"/>
+            <a:off x="1188720" y="3749039"/>
+            <a:ext cx="9692640" cy="1280160"/>
           </a:xfrm>
           <a:prstGeom prst="rect">
             <a:avLst/>
@@ -8080,80 +8376,24 @@
           <a:noFill/>
         </p:spPr>
         <p:txBody>
-          <a:bodyPr wrap="square" lIns="45720" rIns="45720" tIns="27432" bIns="27432" anchor="t">
+          <a:bodyPr wrap="square" lIns="45720" rIns="45720" tIns="27432" bIns="27432" anchor="ctr">
             <a:spAutoFit/>
           </a:bodyPr>
           <a:lstStyle/>
           <a:p>
-            <a:pPr marL="292608" indent="-292608">
+            <a:pPr>
               <a:lnSpc>
-                <a:spcPct val="120000"/>
+                <a:spcPct val="130000"/>
               </a:lnSpc>
-              <a:spcAft>
-                <a:spcPts val="1539"/>
-              </a:spcAft>
-              <a:buClr>
-                <a:srgbClr val="00D4AA"/>
-              </a:buClr>
-              <a:buFont typeface="Inter"/>
-              <a:buChar char="•"/>
             </a:pPr>
             <a:r>
-              <a:rPr sz="2200" b="0">
-                <a:solidFill>
-                  <a:srgbClr val="FFFFFF"/>
-                </a:solidFill>
-                <a:latin typeface="Inter"/>
-              </a:rPr>
-              <a:t>Q&amp;A: include your command, the full error and your package versions</a:t>
-            </a:r>
-          </a:p>
-          <a:p>
-            <a:pPr marL="292608" indent="-292608">
-              <a:lnSpc>
-                <a:spcPct val="120000"/>
-              </a:lnSpc>
-              <a:spcAft>
-                <a:spcPts val="1539"/>
-              </a:spcAft>
-              <a:buClr>
-                <a:srgbClr val="00D4AA"/>
-              </a:buClr>
-              <a:buFont typeface="Inter"/>
-              <a:buChar char="•"/>
-            </a:pPr>
-            <a:r>
-              <a:rPr sz="2200" b="0">
-                <a:solidFill>
-                  <a:srgbClr val="FFFFFF"/>
-                </a:solidFill>
-                <a:latin typeface="Inter"/>
-              </a:rPr>
-              <a:t>Search the Q&amp;A first: most setup and Docker issues are answered there</a:t>
-            </a:r>
-          </a:p>
-          <a:p>
-            <a:pPr marL="292608" indent="-292608">
-              <a:lnSpc>
-                <a:spcPct val="120000"/>
-              </a:lnSpc>
-              <a:spcAft>
-                <a:spcPts val="1539"/>
-              </a:spcAft>
-              <a:buClr>
-                <a:srgbClr val="00D4AA"/>
-              </a:buClr>
-              <a:buFont typeface="Inter"/>
-              <a:buChar char="•"/>
-            </a:pPr>
-            <a:r>
-              <a:rPr sz="2200" b="0">
-                <a:solidFill>
-                  <a:srgbClr val="FFFFFF"/>
-                </a:solidFill>
-                <a:latin typeface="Inter"/>
-              </a:rPr>
-              <a:t>Share your capstone numbers and your Grafana screenshot: it helps other students</a:t>
+              <a:rPr sz="1600" b="0">
+                <a:solidFill>
+                  <a:srgbClr val="CBD5E1"/>
+                </a:solidFill>
+                <a:latin typeface="Inter"/>
+              </a:rPr>
+              <a:t>Check end-to-end understanding across all fifteen sections.</a:t>
             </a:r>
           </a:p>
         </p:txBody>
@@ -8213,7 +8453,7 @@
                 </a:solidFill>
                 <a:latin typeface="Inter"/>
               </a:rPr>
-              <a:t>AI Agent Observability &amp; Cost Control · Section 15 · Lecture 15.4</a:t>
+              <a:t>AI Agent Observability &amp; Cost Control · Section 15 · Lecture 15.3</a:t>
             </a:r>
           </a:p>
         </p:txBody>
@@ -8252,7 +8492,7 @@
                 </a:solidFill>
                 <a:latin typeface="Inter"/>
               </a:rPr>
-              <a:t>Related courses (optional)</a:t>
+              <a:t>Final practice test</a:t>
             </a:r>
           </a:p>
         </p:txBody>
@@ -8341,7 +8581,7 @@
                 </a:solidFill>
                 <a:latin typeface="Inter"/>
               </a:rPr>
-              <a:t>Generative AI &amp; AI Agents: Zero to Production: build text agents from first principles</a:t>
+              <a:t>40 questions across all 15 sections</a:t>
             </a:r>
           </a:p>
           <a:p>
@@ -8365,7 +8605,7 @@
                 </a:solidFill>
                 <a:latin typeface="Inter"/>
               </a:rPr>
-              <a:t>AI Agent Testing &amp; Evaluation: offline evals, judges, datasets and test strategy</a:t>
+              <a:t>Tracing and conventions, Langfuse, agent patterns, cost, latency, online evals, SLOs, governance, incidents, portability, deployment</a:t>
             </a:r>
           </a:p>
           <a:p>
@@ -8389,31 +8629,7 @@
                 </a:solidFill>
                 <a:latin typeface="Inter"/>
               </a:rPr>
-              <a:t>Production Voice AI Agents with Python: real-time agents, latency budgets and telephony</a:t>
-            </a:r>
-          </a:p>
-          <a:p>
-            <a:pPr marL="292608" indent="-292608">
-              <a:lnSpc>
-                <a:spcPct val="120000"/>
-              </a:lnSpc>
-              <a:spcAft>
-                <a:spcPts val="1260"/>
-              </a:spcAft>
-              <a:buClr>
-                <a:srgbClr val="00D4AA"/>
-              </a:buClr>
-              <a:buFont typeface="Inter"/>
-              <a:buChar char="•"/>
-            </a:pPr>
-            <a:r>
-              <a:rPr sz="1800" b="0">
-                <a:solidFill>
-                  <a:srgbClr val="FFFFFF"/>
-                </a:solidFill>
-                <a:latin typeface="Inter"/>
-              </a:rPr>
-              <a:t>Links are in the resources panel for this lecture</a:t>
+              <a:t>Read every explanation, even for answers you got right</a:t>
             </a:r>
           </a:p>
         </p:txBody>
@@ -8473,7 +8689,7 @@
                 </a:solidFill>
                 <a:latin typeface="Inter"/>
               </a:rPr>
-              <a:t>AI Agent Observability &amp; Cost Control · Section 15 · Lecture 15.4</a:t>
+              <a:t>AI Agent Observability &amp; Cost Control · Section 15 · Lecture 15.3</a:t>
             </a:r>
           </a:p>
         </p:txBody>
@@ -8486,8 +8702,273 @@
         </p:nvSpPr>
         <p:spPr>
           <a:xfrm>
-            <a:off x="457200" y="411480"/>
-            <a:ext cx="11247120" cy="868680"/>
+            <a:off x="2377440" y="2286000"/>
+            <a:ext cx="1097280" cy="1097280"/>
+          </a:xfrm>
+          <a:prstGeom prst="rect">
+            <a:avLst/>
+          </a:prstGeom>
+          <a:noFill/>
+        </p:spPr>
+        <p:txBody>
+          <a:bodyPr wrap="square" lIns="45720" rIns="45720" tIns="27432" bIns="27432" anchor="ctr">
+            <a:spAutoFit/>
+          </a:bodyPr>
+          <a:lstStyle/>
+          <a:p>
+            <a:r>
+              <a:rPr sz="5400" b="1">
+                <a:solidFill>
+                  <a:srgbClr val="00D4AA"/>
+                </a:solidFill>
+                <a:latin typeface="Inter"/>
+              </a:rPr>
+              <a:t>→</a:t>
+            </a:r>
+          </a:p>
+        </p:txBody>
+      </p:sp>
+      <p:sp>
+        <p:nvSpPr>
+          <p:cNvPr id="4" name="TextBox 3"/>
+          <p:cNvSpPr txBox="1"/>
+          <p:nvPr/>
+        </p:nvSpPr>
+        <p:spPr>
+          <a:xfrm>
+            <a:off x="3566160" y="2148840"/>
+            <a:ext cx="7315200" cy="457200"/>
+          </a:xfrm>
+          <a:prstGeom prst="rect">
+            <a:avLst/>
+          </a:prstGeom>
+          <a:noFill/>
+        </p:spPr>
+        <p:txBody>
+          <a:bodyPr wrap="square" lIns="45720" rIns="45720" tIns="27432" bIns="27432" anchor="t">
+            <a:spAutoFit/>
+          </a:bodyPr>
+          <a:lstStyle/>
+          <a:p>
+            <a:r>
+              <a:rPr sz="1400" b="0">
+                <a:solidFill>
+                  <a:srgbClr val="94A3B8"/>
+                </a:solidFill>
+                <a:latin typeface="Inter"/>
+              </a:rPr>
+              <a:t>Next up:</a:t>
+            </a:r>
+          </a:p>
+        </p:txBody>
+      </p:sp>
+      <p:sp>
+        <p:nvSpPr>
+          <p:cNvPr id="5" name="TextBox 4"/>
+          <p:cNvSpPr txBox="1"/>
+          <p:nvPr/>
+        </p:nvSpPr>
+        <p:spPr>
+          <a:xfrm>
+            <a:off x="3566160" y="2560320"/>
+            <a:ext cx="7315200" cy="1097280"/>
+          </a:xfrm>
+          <a:prstGeom prst="rect">
+            <a:avLst/>
+          </a:prstGeom>
+          <a:noFill/>
+        </p:spPr>
+        <p:txBody>
+          <a:bodyPr wrap="square" lIns="45720" rIns="45720" tIns="27432" bIns="27432" anchor="t">
+            <a:spAutoFit/>
+          </a:bodyPr>
+          <a:lstStyle/>
+          <a:p>
+            <a:r>
+              <a:rPr sz="2600" b="1">
+                <a:solidFill>
+                  <a:srgbClr val="FFFFFF"/>
+                </a:solidFill>
+                <a:latin typeface="Inter"/>
+              </a:rPr>
+              <a:t>Bonus Lecture: keep operating</a:t>
+            </a:r>
+          </a:p>
+        </p:txBody>
+      </p:sp>
+      <p:sp>
+        <p:nvSpPr>
+          <p:cNvPr id="6" name="TextBox 5"/>
+          <p:cNvSpPr txBox="1"/>
+          <p:nvPr/>
+        </p:nvSpPr>
+        <p:spPr>
+          <a:xfrm>
+            <a:off x="3566160" y="3703320"/>
+            <a:ext cx="7315200" cy="1097280"/>
+          </a:xfrm>
+          <a:prstGeom prst="rect">
+            <a:avLst/>
+          </a:prstGeom>
+          <a:noFill/>
+        </p:spPr>
+        <p:txBody>
+          <a:bodyPr wrap="square" lIns="45720" rIns="45720" tIns="27432" bIns="27432" anchor="t">
+            <a:spAutoFit/>
+          </a:bodyPr>
+          <a:lstStyle/>
+          <a:p>
+            <a:r>
+              <a:rPr sz="1400" b="0">
+                <a:solidFill>
+                  <a:srgbClr val="94A3B8"/>
+                </a:solidFill>
+                <a:latin typeface="Inter"/>
+              </a:rPr>
+              <a:t>One more short video to finish the course: the bonus lecture.</a:t>
+            </a:r>
+          </a:p>
+        </p:txBody>
+      </p:sp>
+    </p:spTree>
+  </p:cSld>
+  <p:clrMapOvr>
+    <a:masterClrMapping/>
+  </p:clrMapOvr>
+</p:sld>
+</file>
+
+<file path=ppt/slides/slide23.xml><?xml version="1.0" encoding="utf-8"?>
+<p:sld xmlns:a="http://schemas.openxmlformats.org/drawingml/2006/main" xmlns:p="http://schemas.openxmlformats.org/presentationml/2006/main" xmlns:r="http://schemas.openxmlformats.org/officeDocument/2006/relationships">
+  <p:cSld>
+    <p:bg>
+      <p:bgPr>
+        <a:solidFill>
+          <a:srgbClr val="0A1628"/>
+        </a:solidFill>
+        <a:effectLst/>
+      </p:bgPr>
+    </p:bg>
+    <p:spTree>
+      <p:nvGrpSpPr>
+        <p:cNvPr id="1" name=""/>
+        <p:cNvGrpSpPr/>
+        <p:nvPr/>
+      </p:nvGrpSpPr>
+      <p:grpSpPr/>
+      <p:sp>
+        <p:nvSpPr>
+          <p:cNvPr id="2" name="TextBox 1"/>
+          <p:cNvSpPr txBox="1"/>
+          <p:nvPr/>
+        </p:nvSpPr>
+        <p:spPr>
+          <a:xfrm>
+            <a:off x="457200" y="6419088"/>
+            <a:ext cx="8686800" cy="320040"/>
+          </a:xfrm>
+          <a:prstGeom prst="rect">
+            <a:avLst/>
+          </a:prstGeom>
+          <a:noFill/>
+        </p:spPr>
+        <p:txBody>
+          <a:bodyPr wrap="square" lIns="45720" rIns="45720" tIns="27432" bIns="27432" anchor="t">
+            <a:spAutoFit/>
+          </a:bodyPr>
+          <a:lstStyle/>
+          <a:p>
+            <a:r>
+              <a:rPr sz="900" b="0">
+                <a:solidFill>
+                  <a:srgbClr val="64748B"/>
+                </a:solidFill>
+                <a:latin typeface="Inter"/>
+              </a:rPr>
+              <a:t>AI Agent Observability &amp; Cost Control · Section 15 · Lecture 15.4</a:t>
+            </a:r>
+          </a:p>
+        </p:txBody>
+      </p:sp>
+      <p:sp>
+        <p:nvSpPr>
+          <p:cNvPr id="3" name="TextBox 2"/>
+          <p:cNvSpPr txBox="1"/>
+          <p:nvPr/>
+        </p:nvSpPr>
+        <p:spPr>
+          <a:xfrm>
+            <a:off x="6675120" y="320040"/>
+            <a:ext cx="5074920" cy="548640"/>
+          </a:xfrm>
+          <a:prstGeom prst="rect">
+            <a:avLst/>
+          </a:prstGeom>
+          <a:noFill/>
+        </p:spPr>
+        <p:txBody>
+          <a:bodyPr wrap="square" lIns="45720" rIns="45720" tIns="27432" bIns="27432" anchor="t">
+            <a:spAutoFit/>
+          </a:bodyPr>
+          <a:lstStyle/>
+          <a:p>
+            <a:pPr algn="r"/>
+            <a:r>
+              <a:rPr sz="1000" b="0">
+                <a:solidFill>
+                  <a:srgbClr val="94A3B8"/>
+                </a:solidFill>
+                <a:latin typeface="Inter"/>
+              </a:rPr>
+              <a:t>SECTION 15 · WRAP-UP AND CAREERS</a:t>
+            </a:r>
+          </a:p>
+        </p:txBody>
+      </p:sp>
+      <p:sp>
+        <p:nvSpPr>
+          <p:cNvPr id="4" name="TextBox 3"/>
+          <p:cNvSpPr txBox="1"/>
+          <p:nvPr/>
+        </p:nvSpPr>
+        <p:spPr>
+          <a:xfrm>
+            <a:off x="914400" y="1417320"/>
+            <a:ext cx="10332720" cy="457200"/>
+          </a:xfrm>
+          <a:prstGeom prst="rect">
+            <a:avLst/>
+          </a:prstGeom>
+          <a:noFill/>
+        </p:spPr>
+        <p:txBody>
+          <a:bodyPr wrap="square" lIns="45720" rIns="45720" tIns="27432" bIns="27432" anchor="t">
+            <a:spAutoFit/>
+          </a:bodyPr>
+          <a:lstStyle/>
+          <a:p>
+            <a:r>
+              <a:rPr sz="1200" b="1">
+                <a:solidFill>
+                  <a:srgbClr val="00D4AA"/>
+                </a:solidFill>
+                <a:latin typeface="Inter"/>
+              </a:rPr>
+              <a:t>LECTURE 15.4</a:t>
+            </a:r>
+          </a:p>
+        </p:txBody>
+      </p:sp>
+      <p:sp>
+        <p:nvSpPr>
+          <p:cNvPr id="5" name="TextBox 4"/>
+          <p:cNvSpPr txBox="1"/>
+          <p:nvPr/>
+        </p:nvSpPr>
+        <p:spPr>
+          <a:xfrm>
+            <a:off x="914400" y="1874519"/>
+            <a:ext cx="10332720" cy="1645920"/>
           </a:xfrm>
           <a:prstGeom prst="rect">
             <a:avLst/>
@@ -8506,27 +8987,27 @@
               </a:lnSpc>
             </a:pPr>
             <a:r>
-              <a:rPr sz="2600" b="1">
+              <a:rPr sz="3000" b="1">
                 <a:solidFill>
                   <a:srgbClr val="FFFFFF"/>
                 </a:solidFill>
                 <a:latin typeface="Inter"/>
               </a:rPr>
-              <a:t>Thank you</a:t>
-            </a:r>
-          </a:p>
-        </p:txBody>
-      </p:sp>
-      <p:sp>
-        <p:nvSpPr>
-          <p:cNvPr id="4" name="Rectangle 3"/>
+              <a:t>Bonus Lecture: keep operating</a:t>
+            </a:r>
+          </a:p>
+        </p:txBody>
+      </p:sp>
+      <p:sp>
+        <p:nvSpPr>
+          <p:cNvPr id="6" name="Rectangle 5"/>
           <p:cNvSpPr/>
           <p:nvPr/>
         </p:nvSpPr>
         <p:spPr>
           <a:xfrm>
-            <a:off x="502920" y="1024128"/>
-            <a:ext cx="822960" cy="54864"/>
+            <a:off x="914400" y="3794760"/>
+            <a:ext cx="64008" cy="1143000"/>
           </a:xfrm>
           <a:prstGeom prst="rect">
             <a:avLst/>
@@ -8561,6 +9042,446 @@
       </p:sp>
       <p:sp>
         <p:nvSpPr>
+          <p:cNvPr id="7" name="TextBox 6"/>
+          <p:cNvSpPr txBox="1"/>
+          <p:nvPr/>
+        </p:nvSpPr>
+        <p:spPr>
+          <a:xfrm>
+            <a:off x="1188720" y="3749039"/>
+            <a:ext cx="9692640" cy="1280160"/>
+          </a:xfrm>
+          <a:prstGeom prst="rect">
+            <a:avLst/>
+          </a:prstGeom>
+          <a:noFill/>
+        </p:spPr>
+        <p:txBody>
+          <a:bodyPr wrap="square" lIns="45720" rIns="45720" tIns="27432" bIns="27432" anchor="ctr">
+            <a:spAutoFit/>
+          </a:bodyPr>
+          <a:lstStyle/>
+          <a:p>
+            <a:pPr>
+              <a:lnSpc>
+                <a:spcPct val="130000"/>
+              </a:lnSpc>
+            </a:pPr>
+            <a:r>
+              <a:rPr sz="1600" b="0">
+                <a:solidFill>
+                  <a:srgbClr val="CBD5E1"/>
+                </a:solidFill>
+                <a:latin typeface="Inter"/>
+              </a:rPr>
+              <a:t>Know where to get help and updates after the course: the Q&amp;A, the repo README and announcements.</a:t>
+            </a:r>
+          </a:p>
+        </p:txBody>
+      </p:sp>
+    </p:spTree>
+  </p:cSld>
+  <p:clrMapOvr>
+    <a:masterClrMapping/>
+  </p:clrMapOvr>
+</p:sld>
+</file>
+
+<file path=ppt/slides/slide24.xml><?xml version="1.0" encoding="utf-8"?>
+<p:sld xmlns:a="http://schemas.openxmlformats.org/drawingml/2006/main" xmlns:p="http://schemas.openxmlformats.org/presentationml/2006/main" xmlns:r="http://schemas.openxmlformats.org/officeDocument/2006/relationships">
+  <p:cSld>
+    <p:bg>
+      <p:bgPr>
+        <a:solidFill>
+          <a:srgbClr val="0A1628"/>
+        </a:solidFill>
+        <a:effectLst/>
+      </p:bgPr>
+    </p:bg>
+    <p:spTree>
+      <p:nvGrpSpPr>
+        <p:cNvPr id="1" name=""/>
+        <p:cNvGrpSpPr/>
+        <p:nvPr/>
+      </p:nvGrpSpPr>
+      <p:grpSpPr/>
+      <p:sp>
+        <p:nvSpPr>
+          <p:cNvPr id="2" name="TextBox 1"/>
+          <p:cNvSpPr txBox="1"/>
+          <p:nvPr/>
+        </p:nvSpPr>
+        <p:spPr>
+          <a:xfrm>
+            <a:off x="457200" y="6419088"/>
+            <a:ext cx="8686800" cy="320040"/>
+          </a:xfrm>
+          <a:prstGeom prst="rect">
+            <a:avLst/>
+          </a:prstGeom>
+          <a:noFill/>
+        </p:spPr>
+        <p:txBody>
+          <a:bodyPr wrap="square" lIns="45720" rIns="45720" tIns="27432" bIns="27432" anchor="t">
+            <a:spAutoFit/>
+          </a:bodyPr>
+          <a:lstStyle/>
+          <a:p>
+            <a:r>
+              <a:rPr sz="900" b="0">
+                <a:solidFill>
+                  <a:srgbClr val="64748B"/>
+                </a:solidFill>
+                <a:latin typeface="Inter"/>
+              </a:rPr>
+              <a:t>AI Agent Observability &amp; Cost Control · Section 15 · Lecture 15.4</a:t>
+            </a:r>
+          </a:p>
+        </p:txBody>
+      </p:sp>
+      <p:sp>
+        <p:nvSpPr>
+          <p:cNvPr id="3" name="TextBox 2"/>
+          <p:cNvSpPr txBox="1"/>
+          <p:nvPr/>
+        </p:nvSpPr>
+        <p:spPr>
+          <a:xfrm>
+            <a:off x="457200" y="411480"/>
+            <a:ext cx="11247120" cy="868680"/>
+          </a:xfrm>
+          <a:prstGeom prst="rect">
+            <a:avLst/>
+          </a:prstGeom>
+          <a:noFill/>
+        </p:spPr>
+        <p:txBody>
+          <a:bodyPr wrap="square" lIns="45720" rIns="45720" tIns="27432" bIns="27432" anchor="t">
+            <a:spAutoFit/>
+          </a:bodyPr>
+          <a:lstStyle/>
+          <a:p>
+            <a:pPr>
+              <a:lnSpc>
+                <a:spcPct val="110000"/>
+              </a:lnSpc>
+            </a:pPr>
+            <a:r>
+              <a:rPr sz="2600" b="1">
+                <a:solidFill>
+                  <a:srgbClr val="FFFFFF"/>
+                </a:solidFill>
+                <a:latin typeface="Inter"/>
+              </a:rPr>
+              <a:t>Keeping your project current</a:t>
+            </a:r>
+          </a:p>
+        </p:txBody>
+      </p:sp>
+      <p:sp>
+        <p:nvSpPr>
+          <p:cNvPr id="4" name="Rectangle 3"/>
+          <p:cNvSpPr/>
+          <p:nvPr/>
+        </p:nvSpPr>
+        <p:spPr>
+          <a:xfrm>
+            <a:off x="502920" y="1024128"/>
+            <a:ext cx="822960" cy="54864"/>
+          </a:xfrm>
+          <a:prstGeom prst="rect">
+            <a:avLst/>
+          </a:prstGeom>
+          <a:solidFill>
+            <a:srgbClr val="00D4AA"/>
+          </a:solidFill>
+          <a:ln>
+            <a:noFill/>
+          </a:ln>
+          <a:effectLst/>
+        </p:spPr>
+        <p:style>
+          <a:lnRef idx="1">
+            <a:schemeClr val="accent1"/>
+          </a:lnRef>
+          <a:fillRef idx="3">
+            <a:schemeClr val="accent1"/>
+          </a:fillRef>
+          <a:effectRef idx="2">
+            <a:schemeClr val="accent1"/>
+          </a:effectRef>
+          <a:fontRef idx="minor">
+            <a:schemeClr val="lt1"/>
+          </a:fontRef>
+        </p:style>
+        <p:txBody>
+          <a:bodyPr rtlCol="0" anchor="ctr"/>
+          <a:lstStyle/>
+          <a:p/>
+        </p:txBody>
+      </p:sp>
+      <p:sp>
+        <p:nvSpPr>
+          <p:cNvPr id="5" name="TextBox 4"/>
+          <p:cNvSpPr txBox="1"/>
+          <p:nvPr/>
+        </p:nvSpPr>
+        <p:spPr>
+          <a:xfrm>
+            <a:off x="640080" y="1417320"/>
+            <a:ext cx="10881360" cy="4892040"/>
+          </a:xfrm>
+          <a:prstGeom prst="rect">
+            <a:avLst/>
+          </a:prstGeom>
+          <a:noFill/>
+        </p:spPr>
+        <p:txBody>
+          <a:bodyPr wrap="square" lIns="45720" rIns="45720" tIns="27432" bIns="27432" anchor="t">
+            <a:spAutoFit/>
+          </a:bodyPr>
+          <a:lstStyle/>
+          <a:p>
+            <a:pPr marL="292608" indent="-292608">
+              <a:lnSpc>
+                <a:spcPct val="120000"/>
+              </a:lnSpc>
+              <a:spcAft>
+                <a:spcPts val="1260"/>
+              </a:spcAft>
+              <a:buClr>
+                <a:srgbClr val="00D4AA"/>
+              </a:buClr>
+              <a:buFont typeface="Inter"/>
+              <a:buChar char="•"/>
+            </a:pPr>
+            <a:r>
+              <a:rPr sz="1800" b="0">
+                <a:solidFill>
+                  <a:srgbClr val="FFFFFF"/>
+                </a:solidFill>
+                <a:latin typeface="Inter"/>
+              </a:rPr>
+              <a:t>Observability libraries release often; the GenAI conventions are still incubating</a:t>
+            </a:r>
+          </a:p>
+          <a:p>
+            <a:pPr marL="292608" indent="-292608">
+              <a:lnSpc>
+                <a:spcPct val="120000"/>
+              </a:lnSpc>
+              <a:spcAft>
+                <a:spcPts val="1260"/>
+              </a:spcAft>
+              <a:buClr>
+                <a:srgbClr val="00D4AA"/>
+              </a:buClr>
+              <a:buFont typeface="Inter"/>
+              <a:buChar char="•"/>
+            </a:pPr>
+            <a:r>
+              <a:rPr sz="1800" b="0">
+                <a:solidFill>
+                  <a:srgbClr val="FFFFFF"/>
+                </a:solidFill>
+                <a:latin typeface="Inter"/>
+              </a:rPr>
+              <a:t>The repo README lists the tested versions: langfuse 4.15, opentelemetry-sdk 1.45, semconv 0.66, langsmith 0.14</a:t>
+            </a:r>
+          </a:p>
+          <a:p>
+            <a:pPr marL="292608" indent="-292608">
+              <a:lnSpc>
+                <a:spcPct val="120000"/>
+              </a:lnSpc>
+              <a:spcAft>
+                <a:spcPts val="1260"/>
+              </a:spcAft>
+              <a:buClr>
+                <a:srgbClr val="00D4AA"/>
+              </a:buClr>
+              <a:buFont typeface="Inter"/>
+              <a:buChar char="•"/>
+            </a:pPr>
+            <a:r>
+              <a:rPr sz="1800" b="0">
+                <a:solidFill>
+                  <a:srgbClr val="FFFFFF"/>
+                </a:solidFill>
+                <a:latin typeface="Inter"/>
+              </a:rPr>
+              <a:t>Course announcements flag breaking changes</a:t>
+            </a:r>
+          </a:p>
+          <a:p>
+            <a:pPr marL="292608" indent="-292608">
+              <a:lnSpc>
+                <a:spcPct val="120000"/>
+              </a:lnSpc>
+              <a:spcAft>
+                <a:spcPts val="1260"/>
+              </a:spcAft>
+              <a:buClr>
+                <a:srgbClr val="00D4AA"/>
+              </a:buClr>
+              <a:buFont typeface="Inter"/>
+              <a:buChar char="•"/>
+            </a:pPr>
+            <a:r>
+              <a:rPr sz="1800" b="0">
+                <a:solidFill>
+                  <a:srgbClr val="FFFFFF"/>
+                </a:solidFill>
+                <a:latin typeface="Inter"/>
+              </a:rPr>
+              <a:t>Pin your versions; upgrade on a branch with the budget gate running</a:t>
+            </a:r>
+          </a:p>
+        </p:txBody>
+      </p:sp>
+    </p:spTree>
+  </p:cSld>
+  <p:clrMapOvr>
+    <a:masterClrMapping/>
+  </p:clrMapOvr>
+</p:sld>
+</file>
+
+<file path=ppt/slides/slide25.xml><?xml version="1.0" encoding="utf-8"?>
+<p:sld xmlns:a="http://schemas.openxmlformats.org/drawingml/2006/main" xmlns:p="http://schemas.openxmlformats.org/presentationml/2006/main" xmlns:r="http://schemas.openxmlformats.org/officeDocument/2006/relationships">
+  <p:cSld>
+    <p:bg>
+      <p:bgPr>
+        <a:solidFill>
+          <a:srgbClr val="0A1628"/>
+        </a:solidFill>
+        <a:effectLst/>
+      </p:bgPr>
+    </p:bg>
+    <p:spTree>
+      <p:nvGrpSpPr>
+        <p:cNvPr id="1" name=""/>
+        <p:cNvGrpSpPr/>
+        <p:nvPr/>
+      </p:nvGrpSpPr>
+      <p:grpSpPr/>
+      <p:sp>
+        <p:nvSpPr>
+          <p:cNvPr id="2" name="TextBox 1"/>
+          <p:cNvSpPr txBox="1"/>
+          <p:nvPr/>
+        </p:nvSpPr>
+        <p:spPr>
+          <a:xfrm>
+            <a:off x="457200" y="6419088"/>
+            <a:ext cx="8686800" cy="320040"/>
+          </a:xfrm>
+          <a:prstGeom prst="rect">
+            <a:avLst/>
+          </a:prstGeom>
+          <a:noFill/>
+        </p:spPr>
+        <p:txBody>
+          <a:bodyPr wrap="square" lIns="45720" rIns="45720" tIns="27432" bIns="27432" anchor="t">
+            <a:spAutoFit/>
+          </a:bodyPr>
+          <a:lstStyle/>
+          <a:p>
+            <a:r>
+              <a:rPr sz="900" b="0">
+                <a:solidFill>
+                  <a:srgbClr val="64748B"/>
+                </a:solidFill>
+                <a:latin typeface="Inter"/>
+              </a:rPr>
+              <a:t>AI Agent Observability &amp; Cost Control · Section 15 · Lecture 15.4</a:t>
+            </a:r>
+          </a:p>
+        </p:txBody>
+      </p:sp>
+      <p:sp>
+        <p:nvSpPr>
+          <p:cNvPr id="3" name="TextBox 2"/>
+          <p:cNvSpPr txBox="1"/>
+          <p:nvPr/>
+        </p:nvSpPr>
+        <p:spPr>
+          <a:xfrm>
+            <a:off x="457200" y="411480"/>
+            <a:ext cx="11247120" cy="868680"/>
+          </a:xfrm>
+          <a:prstGeom prst="rect">
+            <a:avLst/>
+          </a:prstGeom>
+          <a:noFill/>
+        </p:spPr>
+        <p:txBody>
+          <a:bodyPr wrap="square" lIns="45720" rIns="45720" tIns="27432" bIns="27432" anchor="t">
+            <a:spAutoFit/>
+          </a:bodyPr>
+          <a:lstStyle/>
+          <a:p>
+            <a:pPr>
+              <a:lnSpc>
+                <a:spcPct val="110000"/>
+              </a:lnSpc>
+            </a:pPr>
+            <a:r>
+              <a:rPr sz="2600" b="1">
+                <a:solidFill>
+                  <a:srgbClr val="FFFFFF"/>
+                </a:solidFill>
+                <a:latin typeface="Inter"/>
+              </a:rPr>
+              <a:t>Getting help</a:t>
+            </a:r>
+          </a:p>
+        </p:txBody>
+      </p:sp>
+      <p:sp>
+        <p:nvSpPr>
+          <p:cNvPr id="4" name="Rectangle 3"/>
+          <p:cNvSpPr/>
+          <p:nvPr/>
+        </p:nvSpPr>
+        <p:spPr>
+          <a:xfrm>
+            <a:off x="502920" y="1024128"/>
+            <a:ext cx="822960" cy="54864"/>
+          </a:xfrm>
+          <a:prstGeom prst="rect">
+            <a:avLst/>
+          </a:prstGeom>
+          <a:solidFill>
+            <a:srgbClr val="00D4AA"/>
+          </a:solidFill>
+          <a:ln>
+            <a:noFill/>
+          </a:ln>
+          <a:effectLst/>
+        </p:spPr>
+        <p:style>
+          <a:lnRef idx="1">
+            <a:schemeClr val="accent1"/>
+          </a:lnRef>
+          <a:fillRef idx="3">
+            <a:schemeClr val="accent1"/>
+          </a:fillRef>
+          <a:effectRef idx="2">
+            <a:schemeClr val="accent1"/>
+          </a:effectRef>
+          <a:fontRef idx="minor">
+            <a:schemeClr val="lt1"/>
+          </a:fontRef>
+        </p:style>
+        <p:txBody>
+          <a:bodyPr rtlCol="0" anchor="ctr"/>
+          <a:lstStyle/>
+          <a:p/>
+        </p:txBody>
+      </p:sp>
+      <p:sp>
+        <p:nvSpPr>
           <p:cNvPr id="5" name="TextBox 4"/>
           <p:cNvSpPr txBox="1"/>
           <p:nvPr/>
@@ -8601,7 +9522,7 @@
                 </a:solidFill>
                 <a:latin typeface="Inter"/>
               </a:rPr>
-              <a:t>Finish the capstone</a:t>
+              <a:t>Q&amp;A: include your command, the full error and your package versions</a:t>
             </a:r>
           </a:p>
           <a:p>
@@ -8625,7 +9546,7 @@
                 </a:solidFill>
                 <a:latin typeface="Inter"/>
               </a:rPr>
-              <a:t>Send the report</a:t>
+              <a:t>Search the Q&amp;A first: most setup and Docker issues are answered there</a:t>
             </a:r>
           </a:p>
           <a:p>
@@ -8649,7 +9570,1435 @@
                 </a:solidFill>
                 <a:latin typeface="Inter"/>
               </a:rPr>
+              <a:t>Share your capstone numbers and your Grafana screenshot: it helps other students</a:t>
+            </a:r>
+          </a:p>
+        </p:txBody>
+      </p:sp>
+    </p:spTree>
+  </p:cSld>
+  <p:clrMapOvr>
+    <a:masterClrMapping/>
+  </p:clrMapOvr>
+</p:sld>
+</file>
+
+<file path=ppt/slides/slide26.xml><?xml version="1.0" encoding="utf-8"?>
+<p:sld xmlns:a="http://schemas.openxmlformats.org/drawingml/2006/main" xmlns:p="http://schemas.openxmlformats.org/presentationml/2006/main" xmlns:r="http://schemas.openxmlformats.org/officeDocument/2006/relationships">
+  <p:cSld>
+    <p:bg>
+      <p:bgPr>
+        <a:solidFill>
+          <a:srgbClr val="0A1628"/>
+        </a:solidFill>
+        <a:effectLst/>
+      </p:bgPr>
+    </p:bg>
+    <p:spTree>
+      <p:nvGrpSpPr>
+        <p:cNvPr id="1" name=""/>
+        <p:cNvGrpSpPr/>
+        <p:nvPr/>
+      </p:nvGrpSpPr>
+      <p:grpSpPr/>
+      <p:sp>
+        <p:nvSpPr>
+          <p:cNvPr id="2" name="TextBox 1"/>
+          <p:cNvSpPr txBox="1"/>
+          <p:nvPr/>
+        </p:nvSpPr>
+        <p:spPr>
+          <a:xfrm>
+            <a:off x="457200" y="6419088"/>
+            <a:ext cx="8686800" cy="320040"/>
+          </a:xfrm>
+          <a:prstGeom prst="rect">
+            <a:avLst/>
+          </a:prstGeom>
+          <a:noFill/>
+        </p:spPr>
+        <p:txBody>
+          <a:bodyPr wrap="square" lIns="45720" rIns="45720" tIns="27432" bIns="27432" anchor="t">
+            <a:spAutoFit/>
+          </a:bodyPr>
+          <a:lstStyle/>
+          <a:p>
+            <a:r>
+              <a:rPr sz="900" b="0">
+                <a:solidFill>
+                  <a:srgbClr val="64748B"/>
+                </a:solidFill>
+                <a:latin typeface="Inter"/>
+              </a:rPr>
+              <a:t>AI Agent Observability &amp; Cost Control · Section 15 · Lecture 15.4</a:t>
+            </a:r>
+          </a:p>
+        </p:txBody>
+      </p:sp>
+      <p:sp>
+        <p:nvSpPr>
+          <p:cNvPr id="3" name="TextBox 2"/>
+          <p:cNvSpPr txBox="1"/>
+          <p:nvPr/>
+        </p:nvSpPr>
+        <p:spPr>
+          <a:xfrm>
+            <a:off x="457200" y="411480"/>
+            <a:ext cx="11247120" cy="868680"/>
+          </a:xfrm>
+          <a:prstGeom prst="rect">
+            <a:avLst/>
+          </a:prstGeom>
+          <a:noFill/>
+        </p:spPr>
+        <p:txBody>
+          <a:bodyPr wrap="square" lIns="45720" rIns="45720" tIns="27432" bIns="27432" anchor="t">
+            <a:spAutoFit/>
+          </a:bodyPr>
+          <a:lstStyle/>
+          <a:p>
+            <a:pPr>
+              <a:lnSpc>
+                <a:spcPct val="110000"/>
+              </a:lnSpc>
+            </a:pPr>
+            <a:r>
+              <a:rPr sz="2600" b="1">
+                <a:solidFill>
+                  <a:srgbClr val="FFFFFF"/>
+                </a:solidFill>
+                <a:latin typeface="Inter"/>
+              </a:rPr>
+              <a:t>Related courses (optional)</a:t>
+            </a:r>
+          </a:p>
+        </p:txBody>
+      </p:sp>
+      <p:sp>
+        <p:nvSpPr>
+          <p:cNvPr id="4" name="Rectangle 3"/>
+          <p:cNvSpPr/>
+          <p:nvPr/>
+        </p:nvSpPr>
+        <p:spPr>
+          <a:xfrm>
+            <a:off x="502920" y="1024128"/>
+            <a:ext cx="822960" cy="54864"/>
+          </a:xfrm>
+          <a:prstGeom prst="rect">
+            <a:avLst/>
+          </a:prstGeom>
+          <a:solidFill>
+            <a:srgbClr val="00D4AA"/>
+          </a:solidFill>
+          <a:ln>
+            <a:noFill/>
+          </a:ln>
+          <a:effectLst/>
+        </p:spPr>
+        <p:style>
+          <a:lnRef idx="1">
+            <a:schemeClr val="accent1"/>
+          </a:lnRef>
+          <a:fillRef idx="3">
+            <a:schemeClr val="accent1"/>
+          </a:fillRef>
+          <a:effectRef idx="2">
+            <a:schemeClr val="accent1"/>
+          </a:effectRef>
+          <a:fontRef idx="minor">
+            <a:schemeClr val="lt1"/>
+          </a:fontRef>
+        </p:style>
+        <p:txBody>
+          <a:bodyPr rtlCol="0" anchor="ctr"/>
+          <a:lstStyle/>
+          <a:p/>
+        </p:txBody>
+      </p:sp>
+      <p:sp>
+        <p:nvSpPr>
+          <p:cNvPr id="5" name="TextBox 4"/>
+          <p:cNvSpPr txBox="1"/>
+          <p:nvPr/>
+        </p:nvSpPr>
+        <p:spPr>
+          <a:xfrm>
+            <a:off x="640080" y="1417320"/>
+            <a:ext cx="10881360" cy="4892040"/>
+          </a:xfrm>
+          <a:prstGeom prst="rect">
+            <a:avLst/>
+          </a:prstGeom>
+          <a:noFill/>
+        </p:spPr>
+        <p:txBody>
+          <a:bodyPr wrap="square" lIns="45720" rIns="45720" tIns="27432" bIns="27432" anchor="t">
+            <a:spAutoFit/>
+          </a:bodyPr>
+          <a:lstStyle/>
+          <a:p>
+            <a:pPr marL="292608" indent="-292608">
+              <a:lnSpc>
+                <a:spcPct val="120000"/>
+              </a:lnSpc>
+              <a:spcAft>
+                <a:spcPts val="1260"/>
+              </a:spcAft>
+              <a:buClr>
+                <a:srgbClr val="00D4AA"/>
+              </a:buClr>
+              <a:buFont typeface="Inter"/>
+              <a:buChar char="•"/>
+            </a:pPr>
+            <a:r>
+              <a:rPr sz="1800" b="0">
+                <a:solidFill>
+                  <a:srgbClr val="FFFFFF"/>
+                </a:solidFill>
+                <a:latin typeface="Inter"/>
+              </a:rPr>
+              <a:t>Generative AI &amp; AI Agents: Zero to Production: build text agents from first principles</a:t>
+            </a:r>
+          </a:p>
+          <a:p>
+            <a:pPr marL="292608" indent="-292608">
+              <a:lnSpc>
+                <a:spcPct val="120000"/>
+              </a:lnSpc>
+              <a:spcAft>
+                <a:spcPts val="1260"/>
+              </a:spcAft>
+              <a:buClr>
+                <a:srgbClr val="00D4AA"/>
+              </a:buClr>
+              <a:buFont typeface="Inter"/>
+              <a:buChar char="•"/>
+            </a:pPr>
+            <a:r>
+              <a:rPr sz="1800" b="0">
+                <a:solidFill>
+                  <a:srgbClr val="FFFFFF"/>
+                </a:solidFill>
+                <a:latin typeface="Inter"/>
+              </a:rPr>
+              <a:t>AI Agent Testing &amp; Evaluation: offline evals, judges, datasets and test strategy</a:t>
+            </a:r>
+          </a:p>
+          <a:p>
+            <a:pPr marL="292608" indent="-292608">
+              <a:lnSpc>
+                <a:spcPct val="120000"/>
+              </a:lnSpc>
+              <a:spcAft>
+                <a:spcPts val="1260"/>
+              </a:spcAft>
+              <a:buClr>
+                <a:srgbClr val="00D4AA"/>
+              </a:buClr>
+              <a:buFont typeface="Inter"/>
+              <a:buChar char="•"/>
+            </a:pPr>
+            <a:r>
+              <a:rPr sz="1800" b="0">
+                <a:solidFill>
+                  <a:srgbClr val="FFFFFF"/>
+                </a:solidFill>
+                <a:latin typeface="Inter"/>
+              </a:rPr>
+              <a:t>Production Voice AI Agents with Python: real-time agents, latency budgets and telephony</a:t>
+            </a:r>
+          </a:p>
+          <a:p>
+            <a:pPr marL="292608" indent="-292608">
+              <a:lnSpc>
+                <a:spcPct val="120000"/>
+              </a:lnSpc>
+              <a:spcAft>
+                <a:spcPts val="1260"/>
+              </a:spcAft>
+              <a:buClr>
+                <a:srgbClr val="00D4AA"/>
+              </a:buClr>
+              <a:buFont typeface="Inter"/>
+              <a:buChar char="•"/>
+            </a:pPr>
+            <a:r>
+              <a:rPr sz="1800" b="0">
+                <a:solidFill>
+                  <a:srgbClr val="FFFFFF"/>
+                </a:solidFill>
+                <a:latin typeface="Inter"/>
+              </a:rPr>
+              <a:t>Links are in the resources panel for this lecture</a:t>
+            </a:r>
+          </a:p>
+        </p:txBody>
+      </p:sp>
+    </p:spTree>
+  </p:cSld>
+  <p:clrMapOvr>
+    <a:masterClrMapping/>
+  </p:clrMapOvr>
+</p:sld>
+</file>
+
+<file path=ppt/slides/slide27.xml><?xml version="1.0" encoding="utf-8"?>
+<p:sld xmlns:a="http://schemas.openxmlformats.org/drawingml/2006/main" xmlns:p="http://schemas.openxmlformats.org/presentationml/2006/main" xmlns:r="http://schemas.openxmlformats.org/officeDocument/2006/relationships">
+  <p:cSld>
+    <p:bg>
+      <p:bgPr>
+        <a:solidFill>
+          <a:srgbClr val="0A1628"/>
+        </a:solidFill>
+        <a:effectLst/>
+      </p:bgPr>
+    </p:bg>
+    <p:spTree>
+      <p:nvGrpSpPr>
+        <p:cNvPr id="1" name=""/>
+        <p:cNvGrpSpPr/>
+        <p:nvPr/>
+      </p:nvGrpSpPr>
+      <p:grpSpPr/>
+      <p:sp>
+        <p:nvSpPr>
+          <p:cNvPr id="2" name="TextBox 1"/>
+          <p:cNvSpPr txBox="1"/>
+          <p:nvPr/>
+        </p:nvSpPr>
+        <p:spPr>
+          <a:xfrm>
+            <a:off x="457200" y="6419088"/>
+            <a:ext cx="8686800" cy="320040"/>
+          </a:xfrm>
+          <a:prstGeom prst="rect">
+            <a:avLst/>
+          </a:prstGeom>
+          <a:noFill/>
+        </p:spPr>
+        <p:txBody>
+          <a:bodyPr wrap="square" lIns="45720" rIns="45720" tIns="27432" bIns="27432" anchor="t">
+            <a:spAutoFit/>
+          </a:bodyPr>
+          <a:lstStyle/>
+          <a:p>
+            <a:r>
+              <a:rPr sz="900" b="0">
+                <a:solidFill>
+                  <a:srgbClr val="64748B"/>
+                </a:solidFill>
+                <a:latin typeface="Inter"/>
+              </a:rPr>
+              <a:t>AI Agent Observability &amp; Cost Control · Section 15 · Lecture 15.4</a:t>
+            </a:r>
+          </a:p>
+        </p:txBody>
+      </p:sp>
+      <p:sp>
+        <p:nvSpPr>
+          <p:cNvPr id="3" name="TextBox 2"/>
+          <p:cNvSpPr txBox="1"/>
+          <p:nvPr/>
+        </p:nvSpPr>
+        <p:spPr>
+          <a:xfrm>
+            <a:off x="457200" y="411480"/>
+            <a:ext cx="11247120" cy="868680"/>
+          </a:xfrm>
+          <a:prstGeom prst="rect">
+            <a:avLst/>
+          </a:prstGeom>
+          <a:noFill/>
+        </p:spPr>
+        <p:txBody>
+          <a:bodyPr wrap="square" lIns="45720" rIns="45720" tIns="27432" bIns="27432" anchor="t">
+            <a:spAutoFit/>
+          </a:bodyPr>
+          <a:lstStyle/>
+          <a:p>
+            <a:pPr>
+              <a:lnSpc>
+                <a:spcPct val="110000"/>
+              </a:lnSpc>
+            </a:pPr>
+            <a:r>
+              <a:rPr sz="2600" b="1">
+                <a:solidFill>
+                  <a:srgbClr val="FFFFFF"/>
+                </a:solidFill>
+                <a:latin typeface="Inter"/>
+              </a:rPr>
+              <a:t>Thank you</a:t>
+            </a:r>
+          </a:p>
+        </p:txBody>
+      </p:sp>
+      <p:sp>
+        <p:nvSpPr>
+          <p:cNvPr id="4" name="Rectangle 3"/>
+          <p:cNvSpPr/>
+          <p:nvPr/>
+        </p:nvSpPr>
+        <p:spPr>
+          <a:xfrm>
+            <a:off x="502920" y="1024128"/>
+            <a:ext cx="822960" cy="54864"/>
+          </a:xfrm>
+          <a:prstGeom prst="rect">
+            <a:avLst/>
+          </a:prstGeom>
+          <a:solidFill>
+            <a:srgbClr val="00D4AA"/>
+          </a:solidFill>
+          <a:ln>
+            <a:noFill/>
+          </a:ln>
+          <a:effectLst/>
+        </p:spPr>
+        <p:style>
+          <a:lnRef idx="1">
+            <a:schemeClr val="accent1"/>
+          </a:lnRef>
+          <a:fillRef idx="3">
+            <a:schemeClr val="accent1"/>
+          </a:fillRef>
+          <a:effectRef idx="2">
+            <a:schemeClr val="accent1"/>
+          </a:effectRef>
+          <a:fontRef idx="minor">
+            <a:schemeClr val="lt1"/>
+          </a:fontRef>
+        </p:style>
+        <p:txBody>
+          <a:bodyPr rtlCol="0" anchor="ctr"/>
+          <a:lstStyle/>
+          <a:p/>
+        </p:txBody>
+      </p:sp>
+      <p:sp>
+        <p:nvSpPr>
+          <p:cNvPr id="5" name="TextBox 4"/>
+          <p:cNvSpPr txBox="1"/>
+          <p:nvPr/>
+        </p:nvSpPr>
+        <p:spPr>
+          <a:xfrm>
+            <a:off x="640080" y="1417320"/>
+            <a:ext cx="10881360" cy="4892040"/>
+          </a:xfrm>
+          <a:prstGeom prst="rect">
+            <a:avLst/>
+          </a:prstGeom>
+          <a:noFill/>
+        </p:spPr>
+        <p:txBody>
+          <a:bodyPr wrap="square" lIns="45720" rIns="45720" tIns="27432" bIns="27432" anchor="t">
+            <a:spAutoFit/>
+          </a:bodyPr>
+          <a:lstStyle/>
+          <a:p>
+            <a:pPr marL="292608" indent="-292608">
+              <a:lnSpc>
+                <a:spcPct val="120000"/>
+              </a:lnSpc>
+              <a:spcAft>
+                <a:spcPts val="1539"/>
+              </a:spcAft>
+              <a:buClr>
+                <a:srgbClr val="00D4AA"/>
+              </a:buClr>
+              <a:buFont typeface="Inter"/>
+              <a:buChar char="•"/>
+            </a:pPr>
+            <a:r>
+              <a:rPr sz="2200" b="0">
+                <a:solidFill>
+                  <a:srgbClr val="FFFFFF"/>
+                </a:solidFill>
+                <a:latin typeface="Inter"/>
+              </a:rPr>
+              <a:t>Finish the capstone</a:t>
+            </a:r>
+          </a:p>
+          <a:p>
+            <a:pPr marL="292608" indent="-292608">
+              <a:lnSpc>
+                <a:spcPct val="120000"/>
+              </a:lnSpc>
+              <a:spcAft>
+                <a:spcPts val="1539"/>
+              </a:spcAft>
+              <a:buClr>
+                <a:srgbClr val="00D4AA"/>
+              </a:buClr>
+              <a:buFont typeface="Inter"/>
+              <a:buChar char="•"/>
+            </a:pPr>
+            <a:r>
+              <a:rPr sz="2200" b="0">
+                <a:solidFill>
+                  <a:srgbClr val="FFFFFF"/>
+                </a:solidFill>
+                <a:latin typeface="Inter"/>
+              </a:rPr>
+              <a:t>Send the report</a:t>
+            </a:r>
+          </a:p>
+          <a:p>
+            <a:pPr marL="292608" indent="-292608">
+              <a:lnSpc>
+                <a:spcPct val="120000"/>
+              </a:lnSpc>
+              <a:spcAft>
+                <a:spcPts val="1539"/>
+              </a:spcAft>
+              <a:buClr>
+                <a:srgbClr val="00D4AA"/>
+              </a:buClr>
+              <a:buFont typeface="Inter"/>
+              <a:buChar char="•"/>
+            </a:pPr>
+            <a:r>
+              <a:rPr sz="2200" b="0">
+                <a:solidFill>
+                  <a:srgbClr val="FFFFFF"/>
+                </a:solidFill>
+                <a:latin typeface="Inter"/>
+              </a:rPr>
               <a:t>Keep the gate green</a:t>
+            </a:r>
+          </a:p>
+        </p:txBody>
+      </p:sp>
+    </p:spTree>
+  </p:cSld>
+  <p:clrMapOvr>
+    <a:masterClrMapping/>
+  </p:clrMapOvr>
+</p:sld>
+</file>
+
+<file path=ppt/slides/slide28.xml><?xml version="1.0" encoding="utf-8"?>
+<p:sld xmlns:a="http://schemas.openxmlformats.org/drawingml/2006/main" xmlns:p="http://schemas.openxmlformats.org/presentationml/2006/main" xmlns:r="http://schemas.openxmlformats.org/officeDocument/2006/relationships">
+  <p:cSld>
+    <p:bg>
+      <p:bgPr>
+        <a:solidFill>
+          <a:srgbClr val="0A1628"/>
+        </a:solidFill>
+        <a:effectLst/>
+      </p:bgPr>
+    </p:bg>
+    <p:spTree>
+      <p:nvGrpSpPr>
+        <p:cNvPr id="1" name=""/>
+        <p:cNvGrpSpPr/>
+        <p:nvPr/>
+      </p:nvGrpSpPr>
+      <p:grpSpPr/>
+      <p:sp>
+        <p:nvSpPr>
+          <p:cNvPr id="2" name="TextBox 1"/>
+          <p:cNvSpPr txBox="1"/>
+          <p:nvPr/>
+        </p:nvSpPr>
+        <p:spPr>
+          <a:xfrm>
+            <a:off x="457200" y="6419088"/>
+            <a:ext cx="8686800" cy="320040"/>
+          </a:xfrm>
+          <a:prstGeom prst="rect">
+            <a:avLst/>
+          </a:prstGeom>
+          <a:noFill/>
+        </p:spPr>
+        <p:txBody>
+          <a:bodyPr wrap="square" lIns="45720" rIns="45720" tIns="27432" bIns="27432" anchor="t">
+            <a:spAutoFit/>
+          </a:bodyPr>
+          <a:lstStyle/>
+          <a:p>
+            <a:r>
+              <a:rPr sz="900" b="0">
+                <a:solidFill>
+                  <a:srgbClr val="64748B"/>
+                </a:solidFill>
+                <a:latin typeface="Inter"/>
+              </a:rPr>
+              <a:t>AI Agent Observability &amp; Cost Control · Section 15 · Lecture 15.4</a:t>
+            </a:r>
+          </a:p>
+        </p:txBody>
+      </p:sp>
+      <p:sp>
+        <p:nvSpPr>
+          <p:cNvPr id="3" name="TextBox 2"/>
+          <p:cNvSpPr txBox="1"/>
+          <p:nvPr/>
+        </p:nvSpPr>
+        <p:spPr>
+          <a:xfrm>
+            <a:off x="1371600" y="822960"/>
+            <a:ext cx="9418320" cy="457200"/>
+          </a:xfrm>
+          <a:prstGeom prst="rect">
+            <a:avLst/>
+          </a:prstGeom>
+          <a:noFill/>
+        </p:spPr>
+        <p:txBody>
+          <a:bodyPr wrap="square" lIns="45720" rIns="45720" tIns="27432" bIns="27432" anchor="t">
+            <a:spAutoFit/>
+          </a:bodyPr>
+          <a:lstStyle/>
+          <a:p>
+            <a:pPr algn="ctr"/>
+            <a:r>
+              <a:rPr sz="1200" b="1">
+                <a:solidFill>
+                  <a:srgbClr val="00D4AA"/>
+                </a:solidFill>
+                <a:latin typeface="Inter"/>
+              </a:rPr>
+              <a:t>RECAP</a:t>
+            </a:r>
+          </a:p>
+        </p:txBody>
+      </p:sp>
+      <p:sp>
+        <p:nvSpPr>
+          <p:cNvPr id="4" name="TextBox 3"/>
+          <p:cNvSpPr txBox="1"/>
+          <p:nvPr/>
+        </p:nvSpPr>
+        <p:spPr>
+          <a:xfrm>
+            <a:off x="1371600" y="1234440"/>
+            <a:ext cx="9418320" cy="822960"/>
+          </a:xfrm>
+          <a:prstGeom prst="rect">
+            <a:avLst/>
+          </a:prstGeom>
+          <a:noFill/>
+        </p:spPr>
+        <p:txBody>
+          <a:bodyPr wrap="square" lIns="45720" rIns="45720" tIns="27432" bIns="27432" anchor="t">
+            <a:spAutoFit/>
+          </a:bodyPr>
+          <a:lstStyle/>
+          <a:p>
+            <a:pPr algn="ctr"/>
+            <a:r>
+              <a:rPr sz="2600" b="1">
+                <a:solidFill>
+                  <a:srgbClr val="FFFFFF"/>
+                </a:solidFill>
+                <a:latin typeface="Inter"/>
+              </a:rPr>
+              <a:t>Key takeaways</a:t>
+            </a:r>
+          </a:p>
+        </p:txBody>
+      </p:sp>
+      <p:sp>
+        <p:nvSpPr>
+          <p:cNvPr id="5" name="Rounded Rectangle 4"/>
+          <p:cNvSpPr/>
+          <p:nvPr/>
+        </p:nvSpPr>
+        <p:spPr>
+          <a:xfrm>
+            <a:off x="2011680" y="2514600"/>
+            <a:ext cx="8138160" cy="777240"/>
+          </a:xfrm>
+          <a:prstGeom prst="roundRect">
+            <a:avLst>
+              <a:gd name="adj" fmla="val 6588"/>
+            </a:avLst>
+          </a:prstGeom>
+          <a:solidFill>
+            <a:srgbClr val="1A2742"/>
+          </a:solidFill>
+          <a:ln>
+            <a:noFill/>
+          </a:ln>
+          <a:effectLst/>
+        </p:spPr>
+        <p:style>
+          <a:lnRef idx="1">
+            <a:schemeClr val="accent1"/>
+          </a:lnRef>
+          <a:fillRef idx="3">
+            <a:schemeClr val="accent1"/>
+          </a:fillRef>
+          <a:effectRef idx="2">
+            <a:schemeClr val="accent1"/>
+          </a:effectRef>
+          <a:fontRef idx="minor">
+            <a:schemeClr val="lt1"/>
+          </a:fontRef>
+        </p:style>
+        <p:txBody>
+          <a:bodyPr rtlCol="0" anchor="ctr"/>
+          <a:lstStyle/>
+          <a:p/>
+        </p:txBody>
+      </p:sp>
+      <p:sp>
+        <p:nvSpPr>
+          <p:cNvPr id="6" name="TextBox 5"/>
+          <p:cNvSpPr txBox="1"/>
+          <p:nvPr/>
+        </p:nvSpPr>
+        <p:spPr>
+          <a:xfrm>
+            <a:off x="2194560" y="2514600"/>
+            <a:ext cx="548640" cy="777240"/>
+          </a:xfrm>
+          <a:prstGeom prst="rect">
+            <a:avLst/>
+          </a:prstGeom>
+          <a:noFill/>
+        </p:spPr>
+        <p:txBody>
+          <a:bodyPr wrap="square" lIns="45720" rIns="45720" tIns="27432" bIns="27432" anchor="ctr">
+            <a:spAutoFit/>
+          </a:bodyPr>
+          <a:lstStyle/>
+          <a:p>
+            <a:r>
+              <a:rPr sz="2200" b="1">
+                <a:solidFill>
+                  <a:srgbClr val="00D4AA"/>
+                </a:solidFill>
+                <a:latin typeface="Inter"/>
+              </a:rPr>
+              <a:t>✓</a:t>
+            </a:r>
+          </a:p>
+        </p:txBody>
+      </p:sp>
+      <p:sp>
+        <p:nvSpPr>
+          <p:cNvPr id="7" name="TextBox 6"/>
+          <p:cNvSpPr txBox="1"/>
+          <p:nvPr/>
+        </p:nvSpPr>
+        <p:spPr>
+          <a:xfrm>
+            <a:off x="2788920" y="2514600"/>
+            <a:ext cx="7223760" cy="777240"/>
+          </a:xfrm>
+          <a:prstGeom prst="rect">
+            <a:avLst/>
+          </a:prstGeom>
+          <a:noFill/>
+        </p:spPr>
+        <p:txBody>
+          <a:bodyPr wrap="square" lIns="45720" rIns="45720" tIns="27432" bIns="27432" anchor="ctr">
+            <a:spAutoFit/>
+          </a:bodyPr>
+          <a:lstStyle/>
+          <a:p>
+            <a:r>
+              <a:rPr sz="1800" b="1">
+                <a:solidFill>
+                  <a:srgbClr val="FFFFFF"/>
+                </a:solidFill>
+                <a:latin typeface="Inter"/>
+              </a:rPr>
+              <a:t>Upgrade monthly on a branch, gate running</a:t>
+            </a:r>
+          </a:p>
+        </p:txBody>
+      </p:sp>
+      <p:sp>
+        <p:nvSpPr>
+          <p:cNvPr id="8" name="Rounded Rectangle 7"/>
+          <p:cNvSpPr/>
+          <p:nvPr/>
+        </p:nvSpPr>
+        <p:spPr>
+          <a:xfrm>
+            <a:off x="2011680" y="3474720"/>
+            <a:ext cx="8138160" cy="777240"/>
+          </a:xfrm>
+          <a:prstGeom prst="roundRect">
+            <a:avLst>
+              <a:gd name="adj" fmla="val 6588"/>
+            </a:avLst>
+          </a:prstGeom>
+          <a:solidFill>
+            <a:srgbClr val="1A2742"/>
+          </a:solidFill>
+          <a:ln>
+            <a:noFill/>
+          </a:ln>
+          <a:effectLst/>
+        </p:spPr>
+        <p:style>
+          <a:lnRef idx="1">
+            <a:schemeClr val="accent1"/>
+          </a:lnRef>
+          <a:fillRef idx="3">
+            <a:schemeClr val="accent1"/>
+          </a:fillRef>
+          <a:effectRef idx="2">
+            <a:schemeClr val="accent1"/>
+          </a:effectRef>
+          <a:fontRef idx="minor">
+            <a:schemeClr val="lt1"/>
+          </a:fontRef>
+        </p:style>
+        <p:txBody>
+          <a:bodyPr rtlCol="0" anchor="ctr"/>
+          <a:lstStyle/>
+          <a:p/>
+        </p:txBody>
+      </p:sp>
+      <p:sp>
+        <p:nvSpPr>
+          <p:cNvPr id="9" name="TextBox 8"/>
+          <p:cNvSpPr txBox="1"/>
+          <p:nvPr/>
+        </p:nvSpPr>
+        <p:spPr>
+          <a:xfrm>
+            <a:off x="2194560" y="3474720"/>
+            <a:ext cx="548640" cy="777240"/>
+          </a:xfrm>
+          <a:prstGeom prst="rect">
+            <a:avLst/>
+          </a:prstGeom>
+          <a:noFill/>
+        </p:spPr>
+        <p:txBody>
+          <a:bodyPr wrap="square" lIns="45720" rIns="45720" tIns="27432" bIns="27432" anchor="ctr">
+            <a:spAutoFit/>
+          </a:bodyPr>
+          <a:lstStyle/>
+          <a:p>
+            <a:r>
+              <a:rPr sz="2200" b="1">
+                <a:solidFill>
+                  <a:srgbClr val="00D4AA"/>
+                </a:solidFill>
+                <a:latin typeface="Inter"/>
+              </a:rPr>
+              <a:t>✓</a:t>
+            </a:r>
+          </a:p>
+        </p:txBody>
+      </p:sp>
+      <p:sp>
+        <p:nvSpPr>
+          <p:cNvPr id="10" name="TextBox 9"/>
+          <p:cNvSpPr txBox="1"/>
+          <p:nvPr/>
+        </p:nvSpPr>
+        <p:spPr>
+          <a:xfrm>
+            <a:off x="2788920" y="3474720"/>
+            <a:ext cx="7223760" cy="777240"/>
+          </a:xfrm>
+          <a:prstGeom prst="rect">
+            <a:avLst/>
+          </a:prstGeom>
+          <a:noFill/>
+        </p:spPr>
+        <p:txBody>
+          <a:bodyPr wrap="square" lIns="45720" rIns="45720" tIns="27432" bIns="27432" anchor="ctr">
+            <a:spAutoFit/>
+          </a:bodyPr>
+          <a:lstStyle/>
+          <a:p>
+            <a:r>
+              <a:rPr sz="1800" b="1">
+                <a:solidFill>
+                  <a:srgbClr val="FFFFFF"/>
+                </a:solidFill>
+                <a:latin typeface="Inter"/>
+              </a:rPr>
+              <a:t>Ask with command, error and versions</a:t>
+            </a:r>
+          </a:p>
+        </p:txBody>
+      </p:sp>
+      <p:sp>
+        <p:nvSpPr>
+          <p:cNvPr id="11" name="Rounded Rectangle 10"/>
+          <p:cNvSpPr/>
+          <p:nvPr/>
+        </p:nvSpPr>
+        <p:spPr>
+          <a:xfrm>
+            <a:off x="2011680" y="4434840"/>
+            <a:ext cx="8138160" cy="777240"/>
+          </a:xfrm>
+          <a:prstGeom prst="roundRect">
+            <a:avLst>
+              <a:gd name="adj" fmla="val 6588"/>
+            </a:avLst>
+          </a:prstGeom>
+          <a:solidFill>
+            <a:srgbClr val="1A2742"/>
+          </a:solidFill>
+          <a:ln>
+            <a:noFill/>
+          </a:ln>
+          <a:effectLst/>
+        </p:spPr>
+        <p:style>
+          <a:lnRef idx="1">
+            <a:schemeClr val="accent1"/>
+          </a:lnRef>
+          <a:fillRef idx="3">
+            <a:schemeClr val="accent1"/>
+          </a:fillRef>
+          <a:effectRef idx="2">
+            <a:schemeClr val="accent1"/>
+          </a:effectRef>
+          <a:fontRef idx="minor">
+            <a:schemeClr val="lt1"/>
+          </a:fontRef>
+        </p:style>
+        <p:txBody>
+          <a:bodyPr rtlCol="0" anchor="ctr"/>
+          <a:lstStyle/>
+          <a:p/>
+        </p:txBody>
+      </p:sp>
+      <p:sp>
+        <p:nvSpPr>
+          <p:cNvPr id="12" name="TextBox 11"/>
+          <p:cNvSpPr txBox="1"/>
+          <p:nvPr/>
+        </p:nvSpPr>
+        <p:spPr>
+          <a:xfrm>
+            <a:off x="2194560" y="4434840"/>
+            <a:ext cx="548640" cy="777240"/>
+          </a:xfrm>
+          <a:prstGeom prst="rect">
+            <a:avLst/>
+          </a:prstGeom>
+          <a:noFill/>
+        </p:spPr>
+        <p:txBody>
+          <a:bodyPr wrap="square" lIns="45720" rIns="45720" tIns="27432" bIns="27432" anchor="ctr">
+            <a:spAutoFit/>
+          </a:bodyPr>
+          <a:lstStyle/>
+          <a:p>
+            <a:r>
+              <a:rPr sz="2200" b="1">
+                <a:solidFill>
+                  <a:srgbClr val="00D4AA"/>
+                </a:solidFill>
+                <a:latin typeface="Inter"/>
+              </a:rPr>
+              <a:t>✓</a:t>
+            </a:r>
+          </a:p>
+        </p:txBody>
+      </p:sp>
+      <p:sp>
+        <p:nvSpPr>
+          <p:cNvPr id="13" name="TextBox 12"/>
+          <p:cNvSpPr txBox="1"/>
+          <p:nvPr/>
+        </p:nvSpPr>
+        <p:spPr>
+          <a:xfrm>
+            <a:off x="2788920" y="4434840"/>
+            <a:ext cx="7223760" cy="777240"/>
+          </a:xfrm>
+          <a:prstGeom prst="rect">
+            <a:avLst/>
+          </a:prstGeom>
+          <a:noFill/>
+        </p:spPr>
+        <p:txBody>
+          <a:bodyPr wrap="square" lIns="45720" rIns="45720" tIns="27432" bIns="27432" anchor="ctr">
+            <a:spAutoFit/>
+          </a:bodyPr>
+          <a:lstStyle/>
+          <a:p>
+            <a:r>
+              <a:rPr sz="1800" b="1">
+                <a:solidFill>
+                  <a:srgbClr val="FFFFFF"/>
+                </a:solidFill>
+                <a:latin typeface="Inter"/>
+              </a:rPr>
+              <a:t>Related courses are optional</a:t>
+            </a:r>
+          </a:p>
+        </p:txBody>
+      </p:sp>
+    </p:spTree>
+  </p:cSld>
+  <p:clrMapOvr>
+    <a:masterClrMapping/>
+  </p:clrMapOvr>
+</p:sld>
+</file>
+
+<file path=ppt/slides/slide29.xml><?xml version="1.0" encoding="utf-8"?>
+<p:sld xmlns:a="http://schemas.openxmlformats.org/drawingml/2006/main" xmlns:p="http://schemas.openxmlformats.org/presentationml/2006/main" xmlns:r="http://schemas.openxmlformats.org/officeDocument/2006/relationships">
+  <p:cSld>
+    <p:bg>
+      <p:bgPr>
+        <a:solidFill>
+          <a:srgbClr val="0A1628"/>
+        </a:solidFill>
+        <a:effectLst/>
+      </p:bgPr>
+    </p:bg>
+    <p:spTree>
+      <p:nvGrpSpPr>
+        <p:cNvPr id="1" name=""/>
+        <p:cNvGrpSpPr/>
+        <p:nvPr/>
+      </p:nvGrpSpPr>
+      <p:grpSpPr/>
+      <p:sp>
+        <p:nvSpPr>
+          <p:cNvPr id="2" name="TextBox 1"/>
+          <p:cNvSpPr txBox="1"/>
+          <p:nvPr/>
+        </p:nvSpPr>
+        <p:spPr>
+          <a:xfrm>
+            <a:off x="457200" y="6419088"/>
+            <a:ext cx="8686800" cy="320040"/>
+          </a:xfrm>
+          <a:prstGeom prst="rect">
+            <a:avLst/>
+          </a:prstGeom>
+          <a:noFill/>
+        </p:spPr>
+        <p:txBody>
+          <a:bodyPr wrap="square" lIns="45720" rIns="45720" tIns="27432" bIns="27432" anchor="t">
+            <a:spAutoFit/>
+          </a:bodyPr>
+          <a:lstStyle/>
+          <a:p>
+            <a:r>
+              <a:rPr sz="900" b="0">
+                <a:solidFill>
+                  <a:srgbClr val="64748B"/>
+                </a:solidFill>
+                <a:latin typeface="Inter"/>
+              </a:rPr>
+              <a:t>AI Agent Observability &amp; Cost Control · Section 15 · Lecture 15.4</a:t>
+            </a:r>
+          </a:p>
+        </p:txBody>
+      </p:sp>
+      <p:sp>
+        <p:nvSpPr>
+          <p:cNvPr id="3" name="TextBox 2"/>
+          <p:cNvSpPr txBox="1"/>
+          <p:nvPr/>
+        </p:nvSpPr>
+        <p:spPr>
+          <a:xfrm>
+            <a:off x="1371600" y="822960"/>
+            <a:ext cx="9418320" cy="457200"/>
+          </a:xfrm>
+          <a:prstGeom prst="rect">
+            <a:avLst/>
+          </a:prstGeom>
+          <a:noFill/>
+        </p:spPr>
+        <p:txBody>
+          <a:bodyPr wrap="square" lIns="45720" rIns="45720" tIns="27432" bIns="27432" anchor="t">
+            <a:spAutoFit/>
+          </a:bodyPr>
+          <a:lstStyle/>
+          <a:p>
+            <a:pPr algn="ctr"/>
+            <a:r>
+              <a:rPr sz="1200" b="1">
+                <a:solidFill>
+                  <a:srgbClr val="00D4AA"/>
+                </a:solidFill>
+                <a:latin typeface="Inter"/>
+              </a:rPr>
+              <a:t>SECTION COMPLETE</a:t>
+            </a:r>
+          </a:p>
+        </p:txBody>
+      </p:sp>
+      <p:sp>
+        <p:nvSpPr>
+          <p:cNvPr id="4" name="TextBox 3"/>
+          <p:cNvSpPr txBox="1"/>
+          <p:nvPr/>
+        </p:nvSpPr>
+        <p:spPr>
+          <a:xfrm>
+            <a:off x="1371600" y="1234440"/>
+            <a:ext cx="9418320" cy="822960"/>
+          </a:xfrm>
+          <a:prstGeom prst="rect">
+            <a:avLst/>
+          </a:prstGeom>
+          <a:noFill/>
+        </p:spPr>
+        <p:txBody>
+          <a:bodyPr wrap="square" lIns="45720" rIns="45720" tIns="27432" bIns="27432" anchor="t">
+            <a:spAutoFit/>
+          </a:bodyPr>
+          <a:lstStyle/>
+          <a:p>
+            <a:pPr algn="ctr"/>
+            <a:r>
+              <a:rPr sz="2600" b="1">
+                <a:solidFill>
+                  <a:srgbClr val="FFFFFF"/>
+                </a:solidFill>
+                <a:latin typeface="Inter"/>
+              </a:rPr>
+              <a:t>You can now</a:t>
+            </a:r>
+          </a:p>
+        </p:txBody>
+      </p:sp>
+      <p:sp>
+        <p:nvSpPr>
+          <p:cNvPr id="5" name="Rounded Rectangle 4"/>
+          <p:cNvSpPr/>
+          <p:nvPr/>
+        </p:nvSpPr>
+        <p:spPr>
+          <a:xfrm>
+            <a:off x="2011680" y="2514600"/>
+            <a:ext cx="8138160" cy="777240"/>
+          </a:xfrm>
+          <a:prstGeom prst="roundRect">
+            <a:avLst>
+              <a:gd name="adj" fmla="val 6588"/>
+            </a:avLst>
+          </a:prstGeom>
+          <a:solidFill>
+            <a:srgbClr val="1A2742"/>
+          </a:solidFill>
+          <a:ln>
+            <a:noFill/>
+          </a:ln>
+          <a:effectLst/>
+        </p:spPr>
+        <p:style>
+          <a:lnRef idx="1">
+            <a:schemeClr val="accent1"/>
+          </a:lnRef>
+          <a:fillRef idx="3">
+            <a:schemeClr val="accent1"/>
+          </a:fillRef>
+          <a:effectRef idx="2">
+            <a:schemeClr val="accent1"/>
+          </a:effectRef>
+          <a:fontRef idx="minor">
+            <a:schemeClr val="lt1"/>
+          </a:fontRef>
+        </p:style>
+        <p:txBody>
+          <a:bodyPr rtlCol="0" anchor="ctr"/>
+          <a:lstStyle/>
+          <a:p/>
+        </p:txBody>
+      </p:sp>
+      <p:sp>
+        <p:nvSpPr>
+          <p:cNvPr id="6" name="TextBox 5"/>
+          <p:cNvSpPr txBox="1"/>
+          <p:nvPr/>
+        </p:nvSpPr>
+        <p:spPr>
+          <a:xfrm>
+            <a:off x="2194560" y="2514600"/>
+            <a:ext cx="548640" cy="777240"/>
+          </a:xfrm>
+          <a:prstGeom prst="rect">
+            <a:avLst/>
+          </a:prstGeom>
+          <a:noFill/>
+        </p:spPr>
+        <p:txBody>
+          <a:bodyPr wrap="square" lIns="45720" rIns="45720" tIns="27432" bIns="27432" anchor="ctr">
+            <a:spAutoFit/>
+          </a:bodyPr>
+          <a:lstStyle/>
+          <a:p>
+            <a:r>
+              <a:rPr sz="2200" b="1">
+                <a:solidFill>
+                  <a:srgbClr val="00D4AA"/>
+                </a:solidFill>
+                <a:latin typeface="Inter"/>
+              </a:rPr>
+              <a:t>✓</a:t>
+            </a:r>
+          </a:p>
+        </p:txBody>
+      </p:sp>
+      <p:sp>
+        <p:nvSpPr>
+          <p:cNvPr id="7" name="TextBox 6"/>
+          <p:cNvSpPr txBox="1"/>
+          <p:nvPr/>
+        </p:nvSpPr>
+        <p:spPr>
+          <a:xfrm>
+            <a:off x="2788920" y="2514600"/>
+            <a:ext cx="7223760" cy="777240"/>
+          </a:xfrm>
+          <a:prstGeom prst="rect">
+            <a:avLst/>
+          </a:prstGeom>
+          <a:noFill/>
+        </p:spPr>
+        <p:txBody>
+          <a:bodyPr wrap="square" lIns="45720" rIns="45720" tIns="27432" bIns="27432" anchor="ctr">
+            <a:spAutoFit/>
+          </a:bodyPr>
+          <a:lstStyle/>
+          <a:p>
+            <a:r>
+              <a:rPr sz="1800" b="1">
+                <a:solidFill>
+                  <a:srgbClr val="FFFFFF"/>
+                </a:solidFill>
+                <a:latin typeface="Inter"/>
+              </a:rPr>
+              <a:t>Operate an AI agent with traces, budgets and SLOs</a:t>
+            </a:r>
+          </a:p>
+        </p:txBody>
+      </p:sp>
+      <p:sp>
+        <p:nvSpPr>
+          <p:cNvPr id="8" name="Rounded Rectangle 7"/>
+          <p:cNvSpPr/>
+          <p:nvPr/>
+        </p:nvSpPr>
+        <p:spPr>
+          <a:xfrm>
+            <a:off x="2011680" y="3474720"/>
+            <a:ext cx="8138160" cy="777240"/>
+          </a:xfrm>
+          <a:prstGeom prst="roundRect">
+            <a:avLst>
+              <a:gd name="adj" fmla="val 6588"/>
+            </a:avLst>
+          </a:prstGeom>
+          <a:solidFill>
+            <a:srgbClr val="1A2742"/>
+          </a:solidFill>
+          <a:ln>
+            <a:noFill/>
+          </a:ln>
+          <a:effectLst/>
+        </p:spPr>
+        <p:style>
+          <a:lnRef idx="1">
+            <a:schemeClr val="accent1"/>
+          </a:lnRef>
+          <a:fillRef idx="3">
+            <a:schemeClr val="accent1"/>
+          </a:fillRef>
+          <a:effectRef idx="2">
+            <a:schemeClr val="accent1"/>
+          </a:effectRef>
+          <a:fontRef idx="minor">
+            <a:schemeClr val="lt1"/>
+          </a:fontRef>
+        </p:style>
+        <p:txBody>
+          <a:bodyPr rtlCol="0" anchor="ctr"/>
+          <a:lstStyle/>
+          <a:p/>
+        </p:txBody>
+      </p:sp>
+      <p:sp>
+        <p:nvSpPr>
+          <p:cNvPr id="9" name="TextBox 8"/>
+          <p:cNvSpPr txBox="1"/>
+          <p:nvPr/>
+        </p:nvSpPr>
+        <p:spPr>
+          <a:xfrm>
+            <a:off x="2194560" y="3474720"/>
+            <a:ext cx="548640" cy="777240"/>
+          </a:xfrm>
+          <a:prstGeom prst="rect">
+            <a:avLst/>
+          </a:prstGeom>
+          <a:noFill/>
+        </p:spPr>
+        <p:txBody>
+          <a:bodyPr wrap="square" lIns="45720" rIns="45720" tIns="27432" bIns="27432" anchor="ctr">
+            <a:spAutoFit/>
+          </a:bodyPr>
+          <a:lstStyle/>
+          <a:p>
+            <a:r>
+              <a:rPr sz="2200" b="1">
+                <a:solidFill>
+                  <a:srgbClr val="00D4AA"/>
+                </a:solidFill>
+                <a:latin typeface="Inter"/>
+              </a:rPr>
+              <a:t>✓</a:t>
+            </a:r>
+          </a:p>
+        </p:txBody>
+      </p:sp>
+      <p:sp>
+        <p:nvSpPr>
+          <p:cNvPr id="10" name="TextBox 9"/>
+          <p:cNvSpPr txBox="1"/>
+          <p:nvPr/>
+        </p:nvSpPr>
+        <p:spPr>
+          <a:xfrm>
+            <a:off x="2788920" y="3474720"/>
+            <a:ext cx="7223760" cy="777240"/>
+          </a:xfrm>
+          <a:prstGeom prst="rect">
+            <a:avLst/>
+          </a:prstGeom>
+          <a:noFill/>
+        </p:spPr>
+        <p:txBody>
+          <a:bodyPr wrap="square" lIns="45720" rIns="45720" tIns="27432" bIns="27432" anchor="ctr">
+            <a:spAutoFit/>
+          </a:bodyPr>
+          <a:lstStyle/>
+          <a:p>
+            <a:r>
+              <a:rPr sz="1800" b="1">
+                <a:solidFill>
+                  <a:srgbClr val="FFFFFF"/>
+                </a:solidFill>
+                <a:latin typeface="Inter"/>
+              </a:rPr>
+              <a:t>Investigate and write up agent incidents</a:t>
+            </a:r>
+          </a:p>
+        </p:txBody>
+      </p:sp>
+      <p:sp>
+        <p:nvSpPr>
+          <p:cNvPr id="11" name="Rounded Rectangle 10"/>
+          <p:cNvSpPr/>
+          <p:nvPr/>
+        </p:nvSpPr>
+        <p:spPr>
+          <a:xfrm>
+            <a:off x="2011680" y="4434840"/>
+            <a:ext cx="8138160" cy="777240"/>
+          </a:xfrm>
+          <a:prstGeom prst="roundRect">
+            <a:avLst>
+              <a:gd name="adj" fmla="val 6588"/>
+            </a:avLst>
+          </a:prstGeom>
+          <a:solidFill>
+            <a:srgbClr val="1A2742"/>
+          </a:solidFill>
+          <a:ln>
+            <a:noFill/>
+          </a:ln>
+          <a:effectLst/>
+        </p:spPr>
+        <p:style>
+          <a:lnRef idx="1">
+            <a:schemeClr val="accent1"/>
+          </a:lnRef>
+          <a:fillRef idx="3">
+            <a:schemeClr val="accent1"/>
+          </a:fillRef>
+          <a:effectRef idx="2">
+            <a:schemeClr val="accent1"/>
+          </a:effectRef>
+          <a:fontRef idx="minor">
+            <a:schemeClr val="lt1"/>
+          </a:fontRef>
+        </p:style>
+        <p:txBody>
+          <a:bodyPr rtlCol="0" anchor="ctr"/>
+          <a:lstStyle/>
+          <a:p/>
+        </p:txBody>
+      </p:sp>
+      <p:sp>
+        <p:nvSpPr>
+          <p:cNvPr id="12" name="TextBox 11"/>
+          <p:cNvSpPr txBox="1"/>
+          <p:nvPr/>
+        </p:nvSpPr>
+        <p:spPr>
+          <a:xfrm>
+            <a:off x="2194560" y="4434840"/>
+            <a:ext cx="548640" cy="777240"/>
+          </a:xfrm>
+          <a:prstGeom prst="rect">
+            <a:avLst/>
+          </a:prstGeom>
+          <a:noFill/>
+        </p:spPr>
+        <p:txBody>
+          <a:bodyPr wrap="square" lIns="45720" rIns="45720" tIns="27432" bIns="27432" anchor="ctr">
+            <a:spAutoFit/>
+          </a:bodyPr>
+          <a:lstStyle/>
+          <a:p>
+            <a:r>
+              <a:rPr sz="2200" b="1">
+                <a:solidFill>
+                  <a:srgbClr val="00D4AA"/>
+                </a:solidFill>
+                <a:latin typeface="Inter"/>
+              </a:rPr>
+              <a:t>✓</a:t>
+            </a:r>
+          </a:p>
+        </p:txBody>
+      </p:sp>
+      <p:sp>
+        <p:nvSpPr>
+          <p:cNvPr id="13" name="TextBox 12"/>
+          <p:cNvSpPr txBox="1"/>
+          <p:nvPr/>
+        </p:nvSpPr>
+        <p:spPr>
+          <a:xfrm>
+            <a:off x="2788920" y="4434840"/>
+            <a:ext cx="7223760" cy="777240"/>
+          </a:xfrm>
+          <a:prstGeom prst="rect">
+            <a:avLst/>
+          </a:prstGeom>
+          <a:noFill/>
+        </p:spPr>
+        <p:txBody>
+          <a:bodyPr wrap="square" lIns="45720" rIns="45720" tIns="27432" bIns="27432" anchor="ctr">
+            <a:spAutoFit/>
+          </a:bodyPr>
+          <a:lstStyle/>
+          <a:p>
+            <a:r>
+              <a:rPr sz="1800" b="1">
+                <a:solidFill>
+                  <a:srgbClr val="FFFFFF"/>
+                </a:solidFill>
+                <a:latin typeface="Inter"/>
+              </a:rPr>
+              <a:t>Keep the stack current without breaking it</a:t>
             </a:r>
           </a:p>
         </p:txBody>
@@ -9139,7 +11488,7 @@
                 </a:solidFill>
                 <a:latin typeface="Inter"/>
               </a:rPr>
-              <a:t> to 14 of 20 or better</a:t>
+              <a:t> to 15 of 24 or better</a:t>
             </a:r>
           </a:p>
           <a:p>
@@ -9278,8 +11627,122 @@
         </p:nvSpPr>
         <p:spPr>
           <a:xfrm>
-            <a:off x="2377440" y="2286000"/>
-            <a:ext cx="1097280" cy="1097280"/>
+            <a:off x="1371600" y="822960"/>
+            <a:ext cx="9418320" cy="457200"/>
+          </a:xfrm>
+          <a:prstGeom prst="rect">
+            <a:avLst/>
+          </a:prstGeom>
+          <a:noFill/>
+        </p:spPr>
+        <p:txBody>
+          <a:bodyPr wrap="square" lIns="45720" rIns="45720" tIns="27432" bIns="27432" anchor="t">
+            <a:spAutoFit/>
+          </a:bodyPr>
+          <a:lstStyle/>
+          <a:p>
+            <a:pPr algn="ctr"/>
+            <a:r>
+              <a:rPr sz="1200" b="1">
+                <a:solidFill>
+                  <a:srgbClr val="00D4AA"/>
+                </a:solidFill>
+                <a:latin typeface="Inter"/>
+              </a:rPr>
+              <a:t>RECAP</a:t>
+            </a:r>
+          </a:p>
+        </p:txBody>
+      </p:sp>
+      <p:sp>
+        <p:nvSpPr>
+          <p:cNvPr id="4" name="TextBox 3"/>
+          <p:cNvSpPr txBox="1"/>
+          <p:nvPr/>
+        </p:nvSpPr>
+        <p:spPr>
+          <a:xfrm>
+            <a:off x="1371600" y="1234440"/>
+            <a:ext cx="9418320" cy="822960"/>
+          </a:xfrm>
+          <a:prstGeom prst="rect">
+            <a:avLst/>
+          </a:prstGeom>
+          <a:noFill/>
+        </p:spPr>
+        <p:txBody>
+          <a:bodyPr wrap="square" lIns="45720" rIns="45720" tIns="27432" bIns="27432" anchor="t">
+            <a:spAutoFit/>
+          </a:bodyPr>
+          <a:lstStyle/>
+          <a:p>
+            <a:pPr algn="ctr"/>
+            <a:r>
+              <a:rPr sz="2600" b="1">
+                <a:solidFill>
+                  <a:srgbClr val="FFFFFF"/>
+                </a:solidFill>
+                <a:latin typeface="Inter"/>
+              </a:rPr>
+              <a:t>Key takeaways</a:t>
+            </a:r>
+          </a:p>
+        </p:txBody>
+      </p:sp>
+      <p:sp>
+        <p:nvSpPr>
+          <p:cNvPr id="5" name="Rounded Rectangle 4"/>
+          <p:cNvSpPr/>
+          <p:nvPr/>
+        </p:nvSpPr>
+        <p:spPr>
+          <a:xfrm>
+            <a:off x="2011680" y="2514600"/>
+            <a:ext cx="8138160" cy="777240"/>
+          </a:xfrm>
+          <a:prstGeom prst="roundRect">
+            <a:avLst>
+              <a:gd name="adj" fmla="val 6588"/>
+            </a:avLst>
+          </a:prstGeom>
+          <a:solidFill>
+            <a:srgbClr val="1A2742"/>
+          </a:solidFill>
+          <a:ln>
+            <a:noFill/>
+          </a:ln>
+          <a:effectLst/>
+        </p:spPr>
+        <p:style>
+          <a:lnRef idx="1">
+            <a:schemeClr val="accent1"/>
+          </a:lnRef>
+          <a:fillRef idx="3">
+            <a:schemeClr val="accent1"/>
+          </a:fillRef>
+          <a:effectRef idx="2">
+            <a:schemeClr val="accent1"/>
+          </a:effectRef>
+          <a:fontRef idx="minor">
+            <a:schemeClr val="lt1"/>
+          </a:fontRef>
+        </p:style>
+        <p:txBody>
+          <a:bodyPr rtlCol="0" anchor="ctr"/>
+          <a:lstStyle/>
+          <a:p/>
+        </p:txBody>
+      </p:sp>
+      <p:sp>
+        <p:nvSpPr>
+          <p:cNvPr id="6" name="TextBox 5"/>
+          <p:cNvSpPr txBox="1"/>
+          <p:nvPr/>
+        </p:nvSpPr>
+        <p:spPr>
+          <a:xfrm>
+            <a:off x="2194560" y="2514600"/>
+            <a:ext cx="548640" cy="777240"/>
           </a:xfrm>
           <a:prstGeom prst="rect">
             <a:avLst/>
@@ -9293,27 +11756,27 @@
           <a:lstStyle/>
           <a:p>
             <a:r>
-              <a:rPr sz="5400" b="1">
+              <a:rPr sz="2200" b="1">
                 <a:solidFill>
                   <a:srgbClr val="00D4AA"/>
                 </a:solidFill>
                 <a:latin typeface="Inter"/>
               </a:rPr>
-              <a:t>→</a:t>
-            </a:r>
-          </a:p>
-        </p:txBody>
-      </p:sp>
-      <p:sp>
-        <p:nvSpPr>
-          <p:cNvPr id="4" name="TextBox 3"/>
+              <a:t>✓</a:t>
+            </a:r>
+          </a:p>
+        </p:txBody>
+      </p:sp>
+      <p:sp>
+        <p:nvSpPr>
+          <p:cNvPr id="7" name="TextBox 6"/>
           <p:cNvSpPr txBox="1"/>
           <p:nvPr/>
         </p:nvSpPr>
         <p:spPr>
           <a:xfrm>
-            <a:off x="3566160" y="2148840"/>
-            <a:ext cx="7315200" cy="457200"/>
+            <a:off x="2788920" y="2514600"/>
+            <a:ext cx="7223760" cy="777240"/>
           </a:xfrm>
           <a:prstGeom prst="rect">
             <a:avLst/>
@@ -9321,33 +11784,77 @@
           <a:noFill/>
         </p:spPr>
         <p:txBody>
-          <a:bodyPr wrap="square" lIns="45720" rIns="45720" tIns="27432" bIns="27432" anchor="t">
+          <a:bodyPr wrap="square" lIns="45720" rIns="45720" tIns="27432" bIns="27432" anchor="ctr">
             <a:spAutoFit/>
           </a:bodyPr>
           <a:lstStyle/>
           <a:p>
             <a:r>
-              <a:rPr sz="1400" b="0">
-                <a:solidFill>
-                  <a:srgbClr val="94A3B8"/>
-                </a:solidFill>
-                <a:latin typeface="Inter"/>
-              </a:rPr>
-              <a:t>Next up:</a:t>
-            </a:r>
-          </a:p>
-        </p:txBody>
-      </p:sp>
-      <p:sp>
-        <p:nvSpPr>
-          <p:cNvPr id="5" name="TextBox 4"/>
+              <a:rPr sz="1800" b="1">
+                <a:solidFill>
+                  <a:srgbClr val="FFFFFF"/>
+                </a:solidFill>
+                <a:latin typeface="Inter"/>
+              </a:rPr>
+              <a:t>See, explain, stop and prevent: all four</a:t>
+            </a:r>
+          </a:p>
+        </p:txBody>
+      </p:sp>
+      <p:sp>
+        <p:nvSpPr>
+          <p:cNvPr id="8" name="Rounded Rectangle 7"/>
+          <p:cNvSpPr/>
+          <p:nvPr/>
+        </p:nvSpPr>
+        <p:spPr>
+          <a:xfrm>
+            <a:off x="2011680" y="3474720"/>
+            <a:ext cx="8138160" cy="777240"/>
+          </a:xfrm>
+          <a:prstGeom prst="roundRect">
+            <a:avLst>
+              <a:gd name="adj" fmla="val 6588"/>
+            </a:avLst>
+          </a:prstGeom>
+          <a:solidFill>
+            <a:srgbClr val="1A2742"/>
+          </a:solidFill>
+          <a:ln>
+            <a:noFill/>
+          </a:ln>
+          <a:effectLst/>
+        </p:spPr>
+        <p:style>
+          <a:lnRef idx="1">
+            <a:schemeClr val="accent1"/>
+          </a:lnRef>
+          <a:fillRef idx="3">
+            <a:schemeClr val="accent1"/>
+          </a:fillRef>
+          <a:effectRef idx="2">
+            <a:schemeClr val="accent1"/>
+          </a:effectRef>
+          <a:fontRef idx="minor">
+            <a:schemeClr val="lt1"/>
+          </a:fontRef>
+        </p:style>
+        <p:txBody>
+          <a:bodyPr rtlCol="0" anchor="ctr"/>
+          <a:lstStyle/>
+          <a:p/>
+        </p:txBody>
+      </p:sp>
+      <p:sp>
+        <p:nvSpPr>
+          <p:cNvPr id="9" name="TextBox 8"/>
           <p:cNvSpPr txBox="1"/>
           <p:nvPr/>
         </p:nvSpPr>
         <p:spPr>
           <a:xfrm>
-            <a:off x="3566160" y="2560320"/>
-            <a:ext cx="7315200" cy="1097280"/>
+            <a:off x="2194560" y="3474720"/>
+            <a:ext cx="548640" cy="777240"/>
           </a:xfrm>
           <a:prstGeom prst="rect">
             <a:avLst/>
@@ -9355,33 +11862,33 @@
           <a:noFill/>
         </p:spPr>
         <p:txBody>
-          <a:bodyPr wrap="square" lIns="45720" rIns="45720" tIns="27432" bIns="27432" anchor="t">
+          <a:bodyPr wrap="square" lIns="45720" rIns="45720" tIns="27432" bIns="27432" anchor="ctr">
             <a:spAutoFit/>
           </a:bodyPr>
           <a:lstStyle/>
           <a:p>
             <a:r>
-              <a:rPr sz="2600" b="1">
-                <a:solidFill>
-                  <a:srgbClr val="FFFFFF"/>
-                </a:solidFill>
-                <a:latin typeface="Inter"/>
-              </a:rPr>
-              <a:t>Careers: LLMOps, AI platform and AI SRE roles</a:t>
-            </a:r>
-          </a:p>
-        </p:txBody>
-      </p:sp>
-      <p:sp>
-        <p:nvSpPr>
-          <p:cNvPr id="6" name="TextBox 5"/>
+              <a:rPr sz="2200" b="1">
+                <a:solidFill>
+                  <a:srgbClr val="00D4AA"/>
+                </a:solidFill>
+                <a:latin typeface="Inter"/>
+              </a:rPr>
+              <a:t>✓</a:t>
+            </a:r>
+          </a:p>
+        </p:txBody>
+      </p:sp>
+      <p:sp>
+        <p:nvSpPr>
+          <p:cNvPr id="10" name="TextBox 9"/>
           <p:cNvSpPr txBox="1"/>
           <p:nvPr/>
         </p:nvSpPr>
         <p:spPr>
           <a:xfrm>
-            <a:off x="3566160" y="3703320"/>
-            <a:ext cx="7315200" cy="1097280"/>
+            <a:off x="2788920" y="3474720"/>
+            <a:ext cx="7223760" cy="777240"/>
           </a:xfrm>
           <a:prstGeom prst="rect">
             <a:avLst/>
@@ -9389,19 +11896,131 @@
           <a:noFill/>
         </p:spPr>
         <p:txBody>
-          <a:bodyPr wrap="square" lIns="45720" rIns="45720" tIns="27432" bIns="27432" anchor="t">
+          <a:bodyPr wrap="square" lIns="45720" rIns="45720" tIns="27432" bIns="27432" anchor="ctr">
             <a:spAutoFit/>
           </a:bodyPr>
           <a:lstStyle/>
           <a:p>
             <a:r>
-              <a:rPr sz="1400" b="0">
-                <a:solidFill>
-                  <a:srgbClr val="94A3B8"/>
-                </a:solidFill>
-                <a:latin typeface="Inter"/>
-              </a:rPr>
-              <a:t>Next, careers: the roles that hire for exactly this, and twelve interview questions with model answers.</a:t>
+              <a:rPr sz="1800" b="1">
+                <a:solidFill>
+                  <a:srgbClr val="FFFFFF"/>
+                </a:solidFill>
+                <a:latin typeface="Inter"/>
+              </a:rPr>
+              <a:t>Five pillars of agent operations</a:t>
+            </a:r>
+          </a:p>
+        </p:txBody>
+      </p:sp>
+      <p:sp>
+        <p:nvSpPr>
+          <p:cNvPr id="11" name="Rounded Rectangle 10"/>
+          <p:cNvSpPr/>
+          <p:nvPr/>
+        </p:nvSpPr>
+        <p:spPr>
+          <a:xfrm>
+            <a:off x="2011680" y="4434840"/>
+            <a:ext cx="8138160" cy="777240"/>
+          </a:xfrm>
+          <a:prstGeom prst="roundRect">
+            <a:avLst>
+              <a:gd name="adj" fmla="val 6588"/>
+            </a:avLst>
+          </a:prstGeom>
+          <a:solidFill>
+            <a:srgbClr val="1A2742"/>
+          </a:solidFill>
+          <a:ln>
+            <a:noFill/>
+          </a:ln>
+          <a:effectLst/>
+        </p:spPr>
+        <p:style>
+          <a:lnRef idx="1">
+            <a:schemeClr val="accent1"/>
+          </a:lnRef>
+          <a:fillRef idx="3">
+            <a:schemeClr val="accent1"/>
+          </a:fillRef>
+          <a:effectRef idx="2">
+            <a:schemeClr val="accent1"/>
+          </a:effectRef>
+          <a:fontRef idx="minor">
+            <a:schemeClr val="lt1"/>
+          </a:fontRef>
+        </p:style>
+        <p:txBody>
+          <a:bodyPr rtlCol="0" anchor="ctr"/>
+          <a:lstStyle/>
+          <a:p/>
+        </p:txBody>
+      </p:sp>
+      <p:sp>
+        <p:nvSpPr>
+          <p:cNvPr id="12" name="TextBox 11"/>
+          <p:cNvSpPr txBox="1"/>
+          <p:nvPr/>
+        </p:nvSpPr>
+        <p:spPr>
+          <a:xfrm>
+            <a:off x="2194560" y="4434840"/>
+            <a:ext cx="548640" cy="777240"/>
+          </a:xfrm>
+          <a:prstGeom prst="rect">
+            <a:avLst/>
+          </a:prstGeom>
+          <a:noFill/>
+        </p:spPr>
+        <p:txBody>
+          <a:bodyPr wrap="square" lIns="45720" rIns="45720" tIns="27432" bIns="27432" anchor="ctr">
+            <a:spAutoFit/>
+          </a:bodyPr>
+          <a:lstStyle/>
+          <a:p>
+            <a:r>
+              <a:rPr sz="2200" b="1">
+                <a:solidFill>
+                  <a:srgbClr val="00D4AA"/>
+                </a:solidFill>
+                <a:latin typeface="Inter"/>
+              </a:rPr>
+              <a:t>✓</a:t>
+            </a:r>
+          </a:p>
+        </p:txBody>
+      </p:sp>
+      <p:sp>
+        <p:nvSpPr>
+          <p:cNvPr id="13" name="TextBox 12"/>
+          <p:cNvSpPr txBox="1"/>
+          <p:nvPr/>
+        </p:nvSpPr>
+        <p:spPr>
+          <a:xfrm>
+            <a:off x="2788920" y="4434840"/>
+            <a:ext cx="7223760" cy="777240"/>
+          </a:xfrm>
+          <a:prstGeom prst="rect">
+            <a:avLst/>
+          </a:prstGeom>
+          <a:noFill/>
+        </p:spPr>
+        <p:txBody>
+          <a:bodyPr wrap="square" lIns="45720" rIns="45720" tIns="27432" bIns="27432" anchor="ctr">
+            <a:spAutoFit/>
+          </a:bodyPr>
+          <a:lstStyle/>
+          <a:p>
+            <a:r>
+              <a:rPr sz="1800" b="1">
+                <a:solidFill>
+                  <a:srgbClr val="FFFFFF"/>
+                </a:solidFill>
+                <a:latin typeface="Inter"/>
+              </a:rPr>
+              <a:t>Next seven days: capstone, report, one span</a:t>
             </a:r>
           </a:p>
         </p:txBody>
@@ -9461,7 +12080,7 @@
                 </a:solidFill>
                 <a:latin typeface="Inter"/>
               </a:rPr>
-              <a:t>AI Agent Observability &amp; Cost Control · Section 15 · Lecture 15.2</a:t>
+              <a:t>AI Agent Observability &amp; Cost Control · Section 15 · Lecture 15.1</a:t>
             </a:r>
           </a:p>
         </p:txBody>
@@ -9474,8 +12093,42 @@
         </p:nvSpPr>
         <p:spPr>
           <a:xfrm>
-            <a:off x="6675120" y="320040"/>
-            <a:ext cx="5074920" cy="548640"/>
+            <a:off x="2377440" y="2286000"/>
+            <a:ext cx="1097280" cy="1097280"/>
+          </a:xfrm>
+          <a:prstGeom prst="rect">
+            <a:avLst/>
+          </a:prstGeom>
+          <a:noFill/>
+        </p:spPr>
+        <p:txBody>
+          <a:bodyPr wrap="square" lIns="45720" rIns="45720" tIns="27432" bIns="27432" anchor="ctr">
+            <a:spAutoFit/>
+          </a:bodyPr>
+          <a:lstStyle/>
+          <a:p>
+            <a:r>
+              <a:rPr sz="5400" b="1">
+                <a:solidFill>
+                  <a:srgbClr val="00D4AA"/>
+                </a:solidFill>
+                <a:latin typeface="Inter"/>
+              </a:rPr>
+              <a:t>→</a:t>
+            </a:r>
+          </a:p>
+        </p:txBody>
+      </p:sp>
+      <p:sp>
+        <p:nvSpPr>
+          <p:cNvPr id="4" name="TextBox 3"/>
+          <p:cNvSpPr txBox="1"/>
+          <p:nvPr/>
+        </p:nvSpPr>
+        <p:spPr>
+          <a:xfrm>
+            <a:off x="3566160" y="2148840"/>
+            <a:ext cx="7315200" cy="457200"/>
           </a:xfrm>
           <a:prstGeom prst="rect">
             <a:avLst/>
@@ -9488,29 +12141,28 @@
           </a:bodyPr>
           <a:lstStyle/>
           <a:p>
-            <a:pPr algn="r"/>
-            <a:r>
-              <a:rPr sz="1000" b="0">
+            <a:r>
+              <a:rPr sz="1400" b="0">
                 <a:solidFill>
                   <a:srgbClr val="94A3B8"/>
                 </a:solidFill>
                 <a:latin typeface="Inter"/>
               </a:rPr>
-              <a:t>SECTION 15 · WRAP-UP AND CAREERS</a:t>
-            </a:r>
-          </a:p>
-        </p:txBody>
-      </p:sp>
-      <p:sp>
-        <p:nvSpPr>
-          <p:cNvPr id="4" name="TextBox 3"/>
+              <a:t>Next up:</a:t>
+            </a:r>
+          </a:p>
+        </p:txBody>
+      </p:sp>
+      <p:sp>
+        <p:nvSpPr>
+          <p:cNvPr id="5" name="TextBox 4"/>
           <p:cNvSpPr txBox="1"/>
           <p:nvPr/>
         </p:nvSpPr>
         <p:spPr>
           <a:xfrm>
-            <a:off x="914400" y="1417320"/>
-            <a:ext cx="10332720" cy="457200"/>
+            <a:off x="3566160" y="2560320"/>
+            <a:ext cx="7315200" cy="1097280"/>
           </a:xfrm>
           <a:prstGeom prst="rect">
             <a:avLst/>
@@ -9524,27 +12176,27 @@
           <a:lstStyle/>
           <a:p>
             <a:r>
-              <a:rPr sz="1200" b="1">
-                <a:solidFill>
-                  <a:srgbClr val="00D4AA"/>
-                </a:solidFill>
-                <a:latin typeface="Inter"/>
-              </a:rPr>
-              <a:t>LECTURE 15.2</a:t>
-            </a:r>
-          </a:p>
-        </p:txBody>
-      </p:sp>
-      <p:sp>
-        <p:nvSpPr>
-          <p:cNvPr id="5" name="TextBox 4"/>
+              <a:rPr sz="2600" b="1">
+                <a:solidFill>
+                  <a:srgbClr val="FFFFFF"/>
+                </a:solidFill>
+                <a:latin typeface="Inter"/>
+              </a:rPr>
+              <a:t>Careers: LLMOps, AI platform and AI SRE roles</a:t>
+            </a:r>
+          </a:p>
+        </p:txBody>
+      </p:sp>
+      <p:sp>
+        <p:nvSpPr>
+          <p:cNvPr id="6" name="TextBox 5"/>
           <p:cNvSpPr txBox="1"/>
           <p:nvPr/>
         </p:nvSpPr>
         <p:spPr>
           <a:xfrm>
-            <a:off x="914400" y="1874519"/>
-            <a:ext cx="10332720" cy="1645920"/>
+            <a:off x="3566160" y="3703320"/>
+            <a:ext cx="7315200" cy="1097280"/>
           </a:xfrm>
           <a:prstGeom prst="rect">
             <a:avLst/>
@@ -9557,100 +12209,14 @@
           </a:bodyPr>
           <a:lstStyle/>
           <a:p>
-            <a:pPr>
-              <a:lnSpc>
-                <a:spcPct val="110000"/>
-              </a:lnSpc>
-            </a:pPr>
-            <a:r>
-              <a:rPr sz="3000" b="1">
-                <a:solidFill>
-                  <a:srgbClr val="FFFFFF"/>
-                </a:solidFill>
-                <a:latin typeface="Inter"/>
-              </a:rPr>
-              <a:t>Careers: LLMOps, AI platform and AI SRE roles</a:t>
-            </a:r>
-          </a:p>
-        </p:txBody>
-      </p:sp>
-      <p:sp>
-        <p:nvSpPr>
-          <p:cNvPr id="6" name="Rectangle 5"/>
-          <p:cNvSpPr/>
-          <p:nvPr/>
-        </p:nvSpPr>
-        <p:spPr>
-          <a:xfrm>
-            <a:off x="914400" y="3794760"/>
-            <a:ext cx="64008" cy="1143000"/>
-          </a:xfrm>
-          <a:prstGeom prst="rect">
-            <a:avLst/>
-          </a:prstGeom>
-          <a:solidFill>
-            <a:srgbClr val="00D4AA"/>
-          </a:solidFill>
-          <a:ln>
-            <a:noFill/>
-          </a:ln>
-          <a:effectLst/>
-        </p:spPr>
-        <p:style>
-          <a:lnRef idx="1">
-            <a:schemeClr val="accent1"/>
-          </a:lnRef>
-          <a:fillRef idx="3">
-            <a:schemeClr val="accent1"/>
-          </a:fillRef>
-          <a:effectRef idx="2">
-            <a:schemeClr val="accent1"/>
-          </a:effectRef>
-          <a:fontRef idx="minor">
-            <a:schemeClr val="lt1"/>
-          </a:fontRef>
-        </p:style>
-        <p:txBody>
-          <a:bodyPr rtlCol="0" anchor="ctr"/>
-          <a:lstStyle/>
-          <a:p/>
-        </p:txBody>
-      </p:sp>
-      <p:sp>
-        <p:nvSpPr>
-          <p:cNvPr id="7" name="TextBox 6"/>
-          <p:cNvSpPr txBox="1"/>
-          <p:nvPr/>
-        </p:nvSpPr>
-        <p:spPr>
-          <a:xfrm>
-            <a:off x="1188720" y="3749039"/>
-            <a:ext cx="9692640" cy="1280160"/>
-          </a:xfrm>
-          <a:prstGeom prst="rect">
-            <a:avLst/>
-          </a:prstGeom>
-          <a:noFill/>
-        </p:spPr>
-        <p:txBody>
-          <a:bodyPr wrap="square" lIns="45720" rIns="45720" tIns="27432" bIns="27432" anchor="ctr">
-            <a:spAutoFit/>
-          </a:bodyPr>
-          <a:lstStyle/>
-          <a:p>
-            <a:pPr>
-              <a:lnSpc>
-                <a:spcPct val="130000"/>
-              </a:lnSpc>
-            </a:pPr>
-            <a:r>
-              <a:rPr sz="1600" b="0">
-                <a:solidFill>
-                  <a:srgbClr val="CBD5E1"/>
-                </a:solidFill>
-                <a:latin typeface="Inter"/>
-              </a:rPr>
-              <a:t>Name the role titles that hire for agent observability and cost skills and what each emphasises.</a:t>
+            <a:r>
+              <a:rPr sz="1400" b="0">
+                <a:solidFill>
+                  <a:srgbClr val="94A3B8"/>
+                </a:solidFill>
+                <a:latin typeface="Inter"/>
+              </a:rPr>
+              <a:t>Next, careers: the roles that hire for exactly this, and twelve interview questions with model answers.</a:t>
             </a:r>
           </a:p>
         </p:txBody>
@@ -9723,8 +12289,77 @@
         </p:nvSpPr>
         <p:spPr>
           <a:xfrm>
-            <a:off x="457200" y="411480"/>
-            <a:ext cx="11247120" cy="868680"/>
+            <a:off x="6675120" y="320040"/>
+            <a:ext cx="5074920" cy="548640"/>
+          </a:xfrm>
+          <a:prstGeom prst="rect">
+            <a:avLst/>
+          </a:prstGeom>
+          <a:noFill/>
+        </p:spPr>
+        <p:txBody>
+          <a:bodyPr wrap="square" lIns="45720" rIns="45720" tIns="27432" bIns="27432" anchor="t">
+            <a:spAutoFit/>
+          </a:bodyPr>
+          <a:lstStyle/>
+          <a:p>
+            <a:pPr algn="r"/>
+            <a:r>
+              <a:rPr sz="1000" b="0">
+                <a:solidFill>
+                  <a:srgbClr val="94A3B8"/>
+                </a:solidFill>
+                <a:latin typeface="Inter"/>
+              </a:rPr>
+              <a:t>SECTION 15 · WRAP-UP AND CAREERS</a:t>
+            </a:r>
+          </a:p>
+        </p:txBody>
+      </p:sp>
+      <p:sp>
+        <p:nvSpPr>
+          <p:cNvPr id="4" name="TextBox 3"/>
+          <p:cNvSpPr txBox="1"/>
+          <p:nvPr/>
+        </p:nvSpPr>
+        <p:spPr>
+          <a:xfrm>
+            <a:off x="914400" y="1417320"/>
+            <a:ext cx="10332720" cy="457200"/>
+          </a:xfrm>
+          <a:prstGeom prst="rect">
+            <a:avLst/>
+          </a:prstGeom>
+          <a:noFill/>
+        </p:spPr>
+        <p:txBody>
+          <a:bodyPr wrap="square" lIns="45720" rIns="45720" tIns="27432" bIns="27432" anchor="t">
+            <a:spAutoFit/>
+          </a:bodyPr>
+          <a:lstStyle/>
+          <a:p>
+            <a:r>
+              <a:rPr sz="1200" b="1">
+                <a:solidFill>
+                  <a:srgbClr val="00D4AA"/>
+                </a:solidFill>
+                <a:latin typeface="Inter"/>
+              </a:rPr>
+              <a:t>LECTURE 15.2</a:t>
+            </a:r>
+          </a:p>
+        </p:txBody>
+      </p:sp>
+      <p:sp>
+        <p:nvSpPr>
+          <p:cNvPr id="5" name="TextBox 4"/>
+          <p:cNvSpPr txBox="1"/>
+          <p:nvPr/>
+        </p:nvSpPr>
+        <p:spPr>
+          <a:xfrm>
+            <a:off x="914400" y="1874519"/>
+            <a:ext cx="10332720" cy="1645920"/>
           </a:xfrm>
           <a:prstGeom prst="rect">
             <a:avLst/>
@@ -9743,27 +12378,27 @@
               </a:lnSpc>
             </a:pPr>
             <a:r>
-              <a:rPr sz="2600" b="1">
+              <a:rPr sz="3000" b="1">
                 <a:solidFill>
                   <a:srgbClr val="FFFFFF"/>
                 </a:solidFill>
                 <a:latin typeface="Inter"/>
               </a:rPr>
-              <a:t>Roles that hire for this</a:t>
-            </a:r>
-          </a:p>
-        </p:txBody>
-      </p:sp>
-      <p:sp>
-        <p:nvSpPr>
-          <p:cNvPr id="4" name="Rectangle 3"/>
+              <a:t>Careers: LLMOps, AI platform and AI SRE roles</a:t>
+            </a:r>
+          </a:p>
+        </p:txBody>
+      </p:sp>
+      <p:sp>
+        <p:nvSpPr>
+          <p:cNvPr id="6" name="Rectangle 5"/>
           <p:cNvSpPr/>
           <p:nvPr/>
         </p:nvSpPr>
         <p:spPr>
           <a:xfrm>
-            <a:off x="502920" y="1024128"/>
-            <a:ext cx="822960" cy="54864"/>
+            <a:off x="914400" y="3794760"/>
+            <a:ext cx="64008" cy="1143000"/>
           </a:xfrm>
           <a:prstGeom prst="rect">
             <a:avLst/>
@@ -9798,14 +12433,14 @@
       </p:sp>
       <p:sp>
         <p:nvSpPr>
-          <p:cNvPr id="5" name="TextBox 4"/>
+          <p:cNvPr id="7" name="TextBox 6"/>
           <p:cNvSpPr txBox="1"/>
           <p:nvPr/>
         </p:nvSpPr>
         <p:spPr>
           <a:xfrm>
-            <a:off x="640080" y="1417320"/>
-            <a:ext cx="10881360" cy="4892040"/>
+            <a:off x="1188720" y="3749039"/>
+            <a:ext cx="9692640" cy="1280160"/>
           </a:xfrm>
           <a:prstGeom prst="rect">
             <a:avLst/>
@@ -9813,128 +12448,24 @@
           <a:noFill/>
         </p:spPr>
         <p:txBody>
-          <a:bodyPr wrap="square" lIns="45720" rIns="45720" tIns="27432" bIns="27432" anchor="t">
+          <a:bodyPr wrap="square" lIns="45720" rIns="45720" tIns="27432" bIns="27432" anchor="ctr">
             <a:spAutoFit/>
           </a:bodyPr>
           <a:lstStyle/>
           <a:p>
-            <a:pPr marL="292608" indent="-292608">
+            <a:pPr>
               <a:lnSpc>
-                <a:spcPct val="120000"/>
+                <a:spcPct val="130000"/>
               </a:lnSpc>
-              <a:spcAft>
-                <a:spcPts val="1260"/>
-              </a:spcAft>
-              <a:buClr>
-                <a:srgbClr val="00D4AA"/>
-              </a:buClr>
-              <a:buFont typeface="Inter"/>
-              <a:buChar char="•"/>
             </a:pPr>
             <a:r>
-              <a:rPr sz="1800" b="0">
-                <a:solidFill>
-                  <a:srgbClr val="FFFFFF"/>
-                </a:solidFill>
-                <a:latin typeface="Inter"/>
-              </a:rPr>
-              <a:t>LLMOps engineer / MLOps engineer (LLM): tracing, evals in production, cost, prompt and model lifecycle</a:t>
-            </a:r>
-          </a:p>
-          <a:p>
-            <a:pPr marL="292608" indent="-292608">
-              <a:lnSpc>
-                <a:spcPct val="120000"/>
-              </a:lnSpc>
-              <a:spcAft>
-                <a:spcPts val="1260"/>
-              </a:spcAft>
-              <a:buClr>
-                <a:srgbClr val="00D4AA"/>
-              </a:buClr>
-              <a:buFont typeface="Inter"/>
-              <a:buChar char="•"/>
-            </a:pPr>
-            <a:r>
-              <a:rPr sz="1800" b="0">
-                <a:solidFill>
-                  <a:srgbClr val="FFFFFF"/>
-                </a:solidFill>
-                <a:latin typeface="Inter"/>
-              </a:rPr>
-              <a:t>AI platform engineer: the shared stack: gateway, observability, budgets, routing for many teams</a:t>
-            </a:r>
-          </a:p>
-          <a:p>
-            <a:pPr marL="292608" indent="-292608">
-              <a:lnSpc>
-                <a:spcPct val="120000"/>
-              </a:lnSpc>
-              <a:spcAft>
-                <a:spcPts val="1260"/>
-              </a:spcAft>
-              <a:buClr>
-                <a:srgbClr val="00D4AA"/>
-              </a:buClr>
-              <a:buFont typeface="Inter"/>
-              <a:buChar char="•"/>
-            </a:pPr>
-            <a:r>
-              <a:rPr sz="1800" b="0">
-                <a:solidFill>
-                  <a:srgbClr val="FFFFFF"/>
-                </a:solidFill>
-                <a:latin typeface="Inter"/>
-              </a:rPr>
-              <a:t>AI reliability engineer / SRE (AI systems): SLOs, incident response, capacity, provider risk</a:t>
-            </a:r>
-          </a:p>
-          <a:p>
-            <a:pPr marL="292608" indent="-292608">
-              <a:lnSpc>
-                <a:spcPct val="120000"/>
-              </a:lnSpc>
-              <a:spcAft>
-                <a:spcPts val="1260"/>
-              </a:spcAft>
-              <a:buClr>
-                <a:srgbClr val="00D4AA"/>
-              </a:buClr>
-              <a:buFont typeface="Inter"/>
-              <a:buChar char="•"/>
-            </a:pPr>
-            <a:r>
-              <a:rPr sz="1800" b="0">
-                <a:solidFill>
-                  <a:srgbClr val="FFFFFF"/>
-                </a:solidFill>
-                <a:latin typeface="Inter"/>
-              </a:rPr>
-              <a:t>AI product engineer / forward deployed engineer: ships agents and owns their metrics</a:t>
-            </a:r>
-          </a:p>
-          <a:p>
-            <a:pPr marL="292608" indent="-292608">
-              <a:lnSpc>
-                <a:spcPct val="120000"/>
-              </a:lnSpc>
-              <a:spcAft>
-                <a:spcPts val="1260"/>
-              </a:spcAft>
-              <a:buClr>
-                <a:srgbClr val="00D4AA"/>
-              </a:buClr>
-              <a:buFont typeface="Inter"/>
-              <a:buChar char="•"/>
-            </a:pPr>
-            <a:r>
-              <a:rPr sz="1800" b="0">
-                <a:solidFill>
-                  <a:srgbClr val="FFFFFF"/>
-                </a:solidFill>
-                <a:latin typeface="Inter"/>
-              </a:rPr>
-              <a:t>Also: FinOps analyst (AI spend), staff engineer (AI), developer productivity (AI tooling)</a:t>
+              <a:rPr sz="1600" b="0">
+                <a:solidFill>
+                  <a:srgbClr val="CBD5E1"/>
+                </a:solidFill>
+                <a:latin typeface="Inter"/>
+              </a:rPr>
+              <a:t>Name the role titles that hire for agent observability and cost skills and what each emphasises.</a:t>
             </a:r>
           </a:p>
         </p:txBody>
@@ -10033,7 +12564,7 @@
                 </a:solidFill>
                 <a:latin typeface="Inter"/>
               </a:rPr>
-              <a:t>Your evidence</a:t>
+              <a:t>Roles that hire for this</a:t>
             </a:r>
           </a:p>
         </p:txBody>
@@ -10107,7 +12638,7 @@
                 <a:spcPct val="120000"/>
               </a:lnSpc>
               <a:spcAft>
-                <a:spcPts val="1539"/>
+                <a:spcPts val="1260"/>
               </a:spcAft>
               <a:buClr>
                 <a:srgbClr val="00D4AA"/>
@@ -10116,13 +12647,13 @@
               <a:buChar char="•"/>
             </a:pPr>
             <a:r>
-              <a:rPr sz="2200" b="0">
+              <a:rPr sz="1800" b="0">
                 <a:solidFill>
                   <a:srgbClr val="FFFFFF"/>
                 </a:solidFill>
                 <a:latin typeface="Inter"/>
               </a:rPr>
-              <a:t>The capstone repo: three numbers in the README</a:t>
+              <a:t>LLMOps engineer / MLOps engineer (LLM): tracing, evals in production, cost, prompt and model lifecycle</a:t>
             </a:r>
           </a:p>
           <a:p>
@@ -10131,7 +12662,7 @@
                 <a:spcPct val="120000"/>
               </a:lnSpc>
               <a:spcAft>
-                <a:spcPts val="1539"/>
+                <a:spcPts val="1260"/>
               </a:spcAft>
               <a:buClr>
                 <a:srgbClr val="00D4AA"/>
@@ -10140,13 +12671,13 @@
               <a:buChar char="•"/>
             </a:pPr>
             <a:r>
-              <a:rPr sz="2200" b="0">
+              <a:rPr sz="1800" b="0">
                 <a:solidFill>
                   <a:srgbClr val="FFFFFF"/>
                 </a:solidFill>
                 <a:latin typeface="Inter"/>
               </a:rPr>
-              <a:t>Two postmortems and one drift report</a:t>
+              <a:t>AI platform engineer: the shared stack: gateway, observability, budgets, routing for many teams</a:t>
             </a:r>
           </a:p>
           <a:p>
@@ -10155,7 +12686,7 @@
                 <a:spcPct val="120000"/>
               </a:lnSpc>
               <a:spcAft>
-                <a:spcPts val="1539"/>
+                <a:spcPts val="1260"/>
               </a:spcAft>
               <a:buClr>
                 <a:srgbClr val="00D4AA"/>
@@ -10164,13 +12695,13 @@
               <a:buChar char="•"/>
             </a:pPr>
             <a:r>
-              <a:rPr sz="2200" b="0">
+              <a:rPr sz="1800" b="0">
                 <a:solidFill>
                   <a:srgbClr val="FFFFFF"/>
                 </a:solidFill>
                 <a:latin typeface="Inter"/>
               </a:rPr>
-              <a:t>A red pull request screenshot</a:t>
+              <a:t>AI reliability engineer / SRE (AI systems): SLOs, incident response, capacity, provider risk</a:t>
             </a:r>
           </a:p>
           <a:p>
@@ -10179,7 +12710,7 @@
                 <a:spcPct val="120000"/>
               </a:lnSpc>
               <a:spcAft>
-                <a:spcPts val="1539"/>
+                <a:spcPts val="1260"/>
               </a:spcAft>
               <a:buClr>
                 <a:srgbClr val="00D4AA"/>
@@ -10188,13 +12719,13 @@
               <a:buChar char="•"/>
             </a:pPr>
             <a:r>
-              <a:rPr sz="2200" b="0">
+              <a:rPr sz="1800" b="0">
                 <a:solidFill>
                   <a:srgbClr val="FFFFFF"/>
                 </a:solidFill>
                 <a:latin typeface="Inter"/>
               </a:rPr>
-              <a:t>The weekly report</a:t>
+              <a:t>AI product engineer / forward deployed engineer: ships agents and owns their metrics</a:t>
             </a:r>
           </a:p>
           <a:p>
@@ -10203,7 +12734,7 @@
                 <a:spcPct val="120000"/>
               </a:lnSpc>
               <a:spcAft>
-                <a:spcPts val="1539"/>
+                <a:spcPts val="1260"/>
               </a:spcAft>
               <a:buClr>
                 <a:srgbClr val="00D4AA"/>
@@ -10212,13 +12743,13 @@
               <a:buChar char="•"/>
             </a:pPr>
             <a:r>
-              <a:rPr sz="2200" b="0">
+              <a:rPr sz="1800" b="0">
                 <a:solidFill>
                   <a:srgbClr val="FFFFFF"/>
                 </a:solidFill>
                 <a:latin typeface="Inter"/>
               </a:rPr>
-              <a:t>The domain-swap project, which proves you can do it twice</a:t>
+              <a:t>Also: FinOps analyst (AI spend), staff engineer (AI), developer productivity (AI tooling)</a:t>
             </a:r>
           </a:p>
         </p:txBody>
@@ -10317,7 +12848,7 @@
                 </a:solidFill>
                 <a:latin typeface="Inter"/>
               </a:rPr>
-              <a:t>Interview questions 1-4: tracing and attribution</a:t>
+              <a:t>Your evidence</a:t>
             </a:r>
           </a:p>
         </p:txBody>
@@ -10391,7 +12922,7 @@
                 <a:spcPct val="120000"/>
               </a:lnSpc>
               <a:spcAft>
-                <a:spcPts val="1260"/>
+                <a:spcPts val="1539"/>
               </a:spcAft>
               <a:buClr>
                 <a:srgbClr val="00D4AA"/>
@@ -10400,13 +12931,13 @@
               <a:buChar char="•"/>
             </a:pPr>
             <a:r>
-              <a:rPr sz="1800" b="0">
+              <a:rPr sz="2200" b="0">
                 <a:solidFill>
                   <a:srgbClr val="FFFFFF"/>
                 </a:solidFill>
                 <a:latin typeface="Inter"/>
               </a:rPr>
-              <a:t>How do you trace a multi-step agent so the trace explains the tool calls?</a:t>
+              <a:t>The capstone repo: three numbers in the README</a:t>
             </a:r>
           </a:p>
           <a:p>
@@ -10415,7 +12946,7 @@
                 <a:spcPct val="120000"/>
               </a:lnSpc>
               <a:spcAft>
-                <a:spcPts val="1260"/>
+                <a:spcPts val="1539"/>
               </a:spcAft>
               <a:buClr>
                 <a:srgbClr val="00D4AA"/>
@@ -10424,13 +12955,13 @@
               <a:buChar char="•"/>
             </a:pPr>
             <a:r>
-              <a:rPr sz="1800" b="0">
+              <a:rPr sz="2200" b="0">
                 <a:solidFill>
                   <a:srgbClr val="FFFFFF"/>
                 </a:solidFill>
                 <a:latin typeface="Inter"/>
               </a:rPr>
-              <a:t>What are the GenAI semantic conventions and why use them?</a:t>
+              <a:t>Two postmortems and one drift report</a:t>
             </a:r>
           </a:p>
           <a:p>
@@ -10439,7 +12970,7 @@
                 <a:spcPct val="120000"/>
               </a:lnSpc>
               <a:spcAft>
-                <a:spcPts val="1260"/>
+                <a:spcPts val="1539"/>
               </a:spcAft>
               <a:buClr>
                 <a:srgbClr val="00D4AA"/>
@@ -10448,13 +12979,13 @@
               <a:buChar char="•"/>
             </a:pPr>
             <a:r>
-              <a:rPr sz="1800" b="0">
+              <a:rPr sz="2200" b="0">
                 <a:solidFill>
                   <a:srgbClr val="FFFFFF"/>
                 </a:solidFill>
                 <a:latin typeface="Inter"/>
               </a:rPr>
-              <a:t>How do you attribute cost to a tenant or feature?</a:t>
+              <a:t>A red pull request screenshot</a:t>
             </a:r>
           </a:p>
           <a:p>
@@ -10463,7 +12994,7 @@
                 <a:spcPct val="120000"/>
               </a:lnSpc>
               <a:spcAft>
-                <a:spcPts val="1260"/>
+                <a:spcPts val="1539"/>
               </a:spcAft>
               <a:buClr>
                 <a:srgbClr val="00D4AA"/>
@@ -10472,13 +13003,37 @@
               <a:buChar char="•"/>
             </a:pPr>
             <a:r>
-              <a:rPr sz="1800" b="0">
+              <a:rPr sz="2200" b="0">
                 <a:solidFill>
                   <a:srgbClr val="FFFFFF"/>
                 </a:solidFill>
                 <a:latin typeface="Inter"/>
               </a:rPr>
-              <a:t>What do you never put in a trace, and how do you enforce that?</a:t>
+              <a:t>The weekly report</a:t>
+            </a:r>
+          </a:p>
+          <a:p>
+            <a:pPr marL="292608" indent="-292608">
+              <a:lnSpc>
+                <a:spcPct val="120000"/>
+              </a:lnSpc>
+              <a:spcAft>
+                <a:spcPts val="1539"/>
+              </a:spcAft>
+              <a:buClr>
+                <a:srgbClr val="00D4AA"/>
+              </a:buClr>
+              <a:buFont typeface="Inter"/>
+              <a:buChar char="•"/>
+            </a:pPr>
+            <a:r>
+              <a:rPr sz="2200" b="0">
+                <a:solidFill>
+                  <a:srgbClr val="FFFFFF"/>
+                </a:solidFill>
+                <a:latin typeface="Inter"/>
+              </a:rPr>
+              <a:t>The domain-swap project, which proves you can do it twice</a:t>
             </a:r>
           </a:p>
         </p:txBody>
